--- a/docs/greenlight-deck.pptx
+++ b/docs/greenlight-deck.pptx
@@ -6,18 +6,17 @@
   </p:sldMasterIdLst>
   <p:sldIdLst>
     <p:sldId id="256" r:id="rId7"/>
-    <p:sldId id="257" r:id="rId8"/>
-    <p:sldId id="258" r:id="rId9"/>
-    <p:sldId id="259" r:id="rId10"/>
-    <p:sldId id="260" r:id="rId11"/>
-    <p:sldId id="261" r:id="rId12"/>
-    <p:sldId id="262" r:id="rId13"/>
-    <p:sldId id="263" r:id="rId14"/>
-    <p:sldId id="264" r:id="rId15"/>
-    <p:sldId id="265" r:id="rId16"/>
-    <p:sldId id="266" r:id="rId17"/>
-    <p:sldId id="267" r:id="rId18"/>
-    <p:sldId id="268" r:id="rId19"/>
+    <p:sldId id="257" r:id="rId9"/>
+    <p:sldId id="258" r:id="rId10"/>
+    <p:sldId id="259" r:id="rId11"/>
+    <p:sldId id="260" r:id="rId12"/>
+    <p:sldId id="261" r:id="rId13"/>
+    <p:sldId id="262" r:id="rId14"/>
+    <p:sldId id="263" r:id="rId15"/>
+    <p:sldId id="264" r:id="rId16"/>
+    <p:sldId id="265" r:id="rId17"/>
+    <p:sldId id="266" r:id="rId18"/>
+    <p:sldId id="267" r:id="rId19"/>
   </p:sldIdLst>
   <p:sldSz cx="12191695" cy="6858000" type="screen4x3"/>
   <p:notesSz cx="6858000" cy="9144000"/>
@@ -117,6 +116,1567 @@
     </a:lvl9pPr>
   </p:defaultTextStyle>
 </p:presentation>
+</file>
+
+<file path=ppt/notesMasters/notesMaster1.xml><?xml version="1.0" encoding="utf-8"?>
+<p:notesMaster xmlns:a="http://schemas.openxmlformats.org/drawingml/2006/main" xmlns:p="http://schemas.openxmlformats.org/presentationml/2006/main" xmlns:r="http://schemas.openxmlformats.org/officeDocument/2006/relationships">
+  <p:cSld>
+    <p:bg>
+      <p:bgRef idx="1001">
+        <a:schemeClr val="bg1"/>
+      </p:bgRef>
+    </p:bg>
+    <p:spTree>
+      <p:nvGrpSpPr>
+        <p:cNvPr id="1" name=""/>
+        <p:cNvGrpSpPr/>
+        <p:nvPr/>
+      </p:nvGrpSpPr>
+      <p:grpSpPr>
+        <a:xfrm>
+          <a:off x="0" y="0"/>
+          <a:ext cx="0" cy="0"/>
+          <a:chOff x="0" y="0"/>
+          <a:chExt cx="0" cy="0"/>
+        </a:xfrm>
+      </p:grpSpPr>
+      <p:sp>
+        <p:nvSpPr>
+          <p:cNvPr id="2" name="Header Placeholder 1"/>
+          <p:cNvSpPr>
+            <a:spLocks noGrp="1"/>
+          </p:cNvSpPr>
+          <p:nvPr>
+            <p:ph type="hdr" sz="quarter"/>
+          </p:nvPr>
+        </p:nvSpPr>
+        <p:spPr>
+          <a:xfrm>
+            <a:off x="0" y="0"/>
+            <a:ext cx="2971800" cy="457200"/>
+          </a:xfrm>
+          <a:prstGeom prst="rect">
+            <a:avLst/>
+          </a:prstGeom>
+        </p:spPr>
+        <p:txBody>
+          <a:bodyPr vert="horz" lIns="91440" tIns="45720" rIns="91440" bIns="45720" rtlCol="0"/>
+          <a:lstStyle>
+            <a:lvl1pPr algn="l">
+              <a:defRPr sz="1200"/>
+            </a:lvl1pPr>
+          </a:lstStyle>
+          <a:p>
+            <a:endParaRPr lang="en-US"/>
+          </a:p>
+        </p:txBody>
+      </p:sp>
+      <p:sp>
+        <p:nvSpPr>
+          <p:cNvPr id="3" name="Date Placeholder 2"/>
+          <p:cNvSpPr>
+            <a:spLocks noGrp="1"/>
+          </p:cNvSpPr>
+          <p:nvPr>
+            <p:ph type="dt" idx="1"/>
+          </p:nvPr>
+        </p:nvSpPr>
+        <p:spPr>
+          <a:xfrm>
+            <a:off x="3884613" y="0"/>
+            <a:ext cx="2971800" cy="457200"/>
+          </a:xfrm>
+          <a:prstGeom prst="rect">
+            <a:avLst/>
+          </a:prstGeom>
+        </p:spPr>
+        <p:txBody>
+          <a:bodyPr vert="horz" lIns="91440" tIns="45720" rIns="91440" bIns="45720" rtlCol="0"/>
+          <a:lstStyle>
+            <a:lvl1pPr algn="r">
+              <a:defRPr sz="1200"/>
+            </a:lvl1pPr>
+          </a:lstStyle>
+          <a:p>
+            <a:fld id="{0F89C1C7-3DCD-1040-A9CF-14679D8B5DDD}" type="datetimeFigureOut">
+              <a:rPr lang="en-US" smtClean="0"/>
+              <a:t>10/17/16</a:t>
+            </a:fld>
+            <a:endParaRPr lang="en-US"/>
+          </a:p>
+        </p:txBody>
+      </p:sp>
+      <p:sp>
+        <p:nvSpPr>
+          <p:cNvPr id="4" name="Slide Image Placeholder 3"/>
+          <p:cNvSpPr>
+            <a:spLocks noGrp="1" noRot="1" noChangeAspect="1"/>
+          </p:cNvSpPr>
+          <p:nvPr>
+            <p:ph type="sldImg" idx="2"/>
+          </p:nvPr>
+        </p:nvSpPr>
+        <p:spPr>
+          <a:xfrm>
+            <a:off x="1143000" y="685800"/>
+            <a:ext cx="4572000" cy="3429000"/>
+          </a:xfrm>
+          <a:prstGeom prst="rect">
+            <a:avLst/>
+          </a:prstGeom>
+          <a:noFill/>
+          <a:ln w="12700">
+            <a:solidFill>
+              <a:prstClr val="black"/>
+            </a:solidFill>
+          </a:ln>
+        </p:spPr>
+        <p:txBody>
+          <a:bodyPr vert="horz" lIns="91440" tIns="45720" rIns="91440" bIns="45720" rtlCol="0" anchor="ctr"/>
+          <a:lstStyle/>
+          <a:p>
+            <a:endParaRPr lang="en-US"/>
+          </a:p>
+        </p:txBody>
+      </p:sp>
+      <p:sp>
+        <p:nvSpPr>
+          <p:cNvPr id="5" name="Notes Placeholder 4"/>
+          <p:cNvSpPr>
+            <a:spLocks noGrp="1"/>
+          </p:cNvSpPr>
+          <p:nvPr>
+            <p:ph type="body" sz="quarter" idx="3"/>
+          </p:nvPr>
+        </p:nvSpPr>
+        <p:spPr>
+          <a:xfrm>
+            <a:off x="685800" y="4343400"/>
+            <a:ext cx="5486400" cy="4114800"/>
+          </a:xfrm>
+          <a:prstGeom prst="rect">
+            <a:avLst/>
+          </a:prstGeom>
+        </p:spPr>
+        <p:txBody>
+          <a:bodyPr vert="horz" lIns="91440" tIns="45720" rIns="91440" bIns="45720" rtlCol="0"/>
+          <a:lstStyle/>
+          <a:p>
+            <a:pPr lvl="0"/>
+            <a:r>
+              <a:rPr lang="en-US" smtClean="0"/>
+              <a:t>Click to edit Master text styles</a:t>
+            </a:r>
+          </a:p>
+          <a:p>
+            <a:pPr lvl="1"/>
+            <a:r>
+              <a:rPr lang="en-US" smtClean="0"/>
+              <a:t>Second level</a:t>
+            </a:r>
+          </a:p>
+          <a:p>
+            <a:pPr lvl="2"/>
+            <a:r>
+              <a:rPr lang="en-US" smtClean="0"/>
+              <a:t>Third level</a:t>
+            </a:r>
+          </a:p>
+          <a:p>
+            <a:pPr lvl="3"/>
+            <a:r>
+              <a:rPr lang="en-US" smtClean="0"/>
+              <a:t>Fourth level</a:t>
+            </a:r>
+          </a:p>
+          <a:p>
+            <a:pPr lvl="4"/>
+            <a:r>
+              <a:rPr lang="en-US" smtClean="0"/>
+              <a:t>Fifth level</a:t>
+            </a:r>
+            <a:endParaRPr lang="en-US"/>
+          </a:p>
+        </p:txBody>
+      </p:sp>
+      <p:sp>
+        <p:nvSpPr>
+          <p:cNvPr id="6" name="Footer Placeholder 5"/>
+          <p:cNvSpPr>
+            <a:spLocks noGrp="1"/>
+          </p:cNvSpPr>
+          <p:nvPr>
+            <p:ph type="ftr" sz="quarter" idx="4"/>
+          </p:nvPr>
+        </p:nvSpPr>
+        <p:spPr>
+          <a:xfrm>
+            <a:off x="0" y="8685213"/>
+            <a:ext cx="2971800" cy="457200"/>
+          </a:xfrm>
+          <a:prstGeom prst="rect">
+            <a:avLst/>
+          </a:prstGeom>
+        </p:spPr>
+        <p:txBody>
+          <a:bodyPr vert="horz" lIns="91440" tIns="45720" rIns="91440" bIns="45720" rtlCol="0" anchor="b"/>
+          <a:lstStyle>
+            <a:lvl1pPr algn="l">
+              <a:defRPr sz="1200"/>
+            </a:lvl1pPr>
+          </a:lstStyle>
+          <a:p>
+            <a:endParaRPr lang="en-US"/>
+          </a:p>
+        </p:txBody>
+      </p:sp>
+      <p:sp>
+        <p:nvSpPr>
+          <p:cNvPr id="7" name="Slide Number Placeholder 6"/>
+          <p:cNvSpPr>
+            <a:spLocks noGrp="1"/>
+          </p:cNvSpPr>
+          <p:nvPr>
+            <p:ph type="sldNum" sz="quarter" idx="5"/>
+          </p:nvPr>
+        </p:nvSpPr>
+        <p:spPr>
+          <a:xfrm>
+            <a:off x="3884613" y="8685213"/>
+            <a:ext cx="2971800" cy="457200"/>
+          </a:xfrm>
+          <a:prstGeom prst="rect">
+            <a:avLst/>
+          </a:prstGeom>
+        </p:spPr>
+        <p:txBody>
+          <a:bodyPr vert="horz" lIns="91440" tIns="45720" rIns="91440" bIns="45720" rtlCol="0" anchor="b"/>
+          <a:lstStyle>
+            <a:lvl1pPr algn="r">
+              <a:defRPr sz="1200"/>
+            </a:lvl1pPr>
+          </a:lstStyle>
+          <a:p>
+            <a:fld id="{BB5E49A5-4136-284D-997B-48E1D791AD67}" type="slidenum">
+              <a:rPr lang="en-US" smtClean="0"/>
+              <a:t>‹#›</a:t>
+            </a:fld>
+            <a:endParaRPr lang="en-US"/>
+          </a:p>
+        </p:txBody>
+      </p:sp>
+    </p:spTree>
+    <p:extLst>
+      <p:ext uri="{BB962C8B-B14F-4D97-AF65-F5344CB8AC3E}">
+        <p14:creationId xmlns:p14="http://schemas.microsoft.com/office/powerpoint/2010/main" val="2623252185"/>
+      </p:ext>
+    </p:extLst>
+  </p:cSld>
+  <p:clrMap bg1="lt1" tx1="dk1" bg2="lt2" tx2="dk2" accent1="accent1" accent2="accent2" accent3="accent3" accent4="accent4" accent5="accent5" accent6="accent6" hlink="hlink" folHlink="folHlink"/>
+  <p:notesStyle>
+    <a:lvl1pPr marL="0" algn="l" defTabSz="457200" rtl="0" eaLnBrk="1" latinLnBrk="0" hangingPunct="1">
+      <a:defRPr sz="1200" kern="1200">
+        <a:solidFill>
+          <a:schemeClr val="tx1"/>
+        </a:solidFill>
+        <a:latin typeface="+mn-lt"/>
+        <a:ea typeface="+mn-ea"/>
+        <a:cs typeface="+mn-cs"/>
+      </a:defRPr>
+    </a:lvl1pPr>
+    <a:lvl2pPr marL="457200" algn="l" defTabSz="457200" rtl="0" eaLnBrk="1" latinLnBrk="0" hangingPunct="1">
+      <a:defRPr sz="1200" kern="1200">
+        <a:solidFill>
+          <a:schemeClr val="tx1"/>
+        </a:solidFill>
+        <a:latin typeface="+mn-lt"/>
+        <a:ea typeface="+mn-ea"/>
+        <a:cs typeface="+mn-cs"/>
+      </a:defRPr>
+    </a:lvl2pPr>
+    <a:lvl3pPr marL="914400" algn="l" defTabSz="457200" rtl="0" eaLnBrk="1" latinLnBrk="0" hangingPunct="1">
+      <a:defRPr sz="1200" kern="1200">
+        <a:solidFill>
+          <a:schemeClr val="tx1"/>
+        </a:solidFill>
+        <a:latin typeface="+mn-lt"/>
+        <a:ea typeface="+mn-ea"/>
+        <a:cs typeface="+mn-cs"/>
+      </a:defRPr>
+    </a:lvl3pPr>
+    <a:lvl4pPr marL="1371600" algn="l" defTabSz="457200" rtl="0" eaLnBrk="1" latinLnBrk="0" hangingPunct="1">
+      <a:defRPr sz="1200" kern="1200">
+        <a:solidFill>
+          <a:schemeClr val="tx1"/>
+        </a:solidFill>
+        <a:latin typeface="+mn-lt"/>
+        <a:ea typeface="+mn-ea"/>
+        <a:cs typeface="+mn-cs"/>
+      </a:defRPr>
+    </a:lvl4pPr>
+    <a:lvl5pPr marL="1828800" algn="l" defTabSz="457200" rtl="0" eaLnBrk="1" latinLnBrk="0" hangingPunct="1">
+      <a:defRPr sz="1200" kern="1200">
+        <a:solidFill>
+          <a:schemeClr val="tx1"/>
+        </a:solidFill>
+        <a:latin typeface="+mn-lt"/>
+        <a:ea typeface="+mn-ea"/>
+        <a:cs typeface="+mn-cs"/>
+      </a:defRPr>
+    </a:lvl5pPr>
+    <a:lvl6pPr marL="2286000" algn="l" defTabSz="457200" rtl="0" eaLnBrk="1" latinLnBrk="0" hangingPunct="1">
+      <a:defRPr sz="1200" kern="1200">
+        <a:solidFill>
+          <a:schemeClr val="tx1"/>
+        </a:solidFill>
+        <a:latin typeface="+mn-lt"/>
+        <a:ea typeface="+mn-ea"/>
+        <a:cs typeface="+mn-cs"/>
+      </a:defRPr>
+    </a:lvl6pPr>
+    <a:lvl7pPr marL="2743200" algn="l" defTabSz="457200" rtl="0" eaLnBrk="1" latinLnBrk="0" hangingPunct="1">
+      <a:defRPr sz="1200" kern="1200">
+        <a:solidFill>
+          <a:schemeClr val="tx1"/>
+        </a:solidFill>
+        <a:latin typeface="+mn-lt"/>
+        <a:ea typeface="+mn-ea"/>
+        <a:cs typeface="+mn-cs"/>
+      </a:defRPr>
+    </a:lvl7pPr>
+    <a:lvl8pPr marL="3200400" algn="l" defTabSz="457200" rtl="0" eaLnBrk="1" latinLnBrk="0" hangingPunct="1">
+      <a:defRPr sz="1200" kern="1200">
+        <a:solidFill>
+          <a:schemeClr val="tx1"/>
+        </a:solidFill>
+        <a:latin typeface="+mn-lt"/>
+        <a:ea typeface="+mn-ea"/>
+        <a:cs typeface="+mn-cs"/>
+      </a:defRPr>
+    </a:lvl8pPr>
+    <a:lvl9pPr marL="3657600" algn="l" defTabSz="457200" rtl="0" eaLnBrk="1" latinLnBrk="0" hangingPunct="1">
+      <a:defRPr sz="1200" kern="1200">
+        <a:solidFill>
+          <a:schemeClr val="tx1"/>
+        </a:solidFill>
+        <a:latin typeface="+mn-lt"/>
+        <a:ea typeface="+mn-ea"/>
+        <a:cs typeface="+mn-cs"/>
+      </a:defRPr>
+    </a:lvl9pPr>
+  </p:notesStyle>
+</p:notesMaster>
+</file>
+
+<file path=ppt/notesSlides/notesSlide1.xml><?xml version="1.0" encoding="utf-8"?>
+<p:notes xmlns:a="http://schemas.openxmlformats.org/drawingml/2006/main" xmlns:p="http://schemas.openxmlformats.org/presentationml/2006/main" xmlns:r="http://schemas.openxmlformats.org/officeDocument/2006/relationships">
+  <p:cSld>
+    <p:spTree>
+      <p:nvGrpSpPr>
+        <p:cNvPr id="1" name=""/>
+        <p:cNvGrpSpPr/>
+        <p:nvPr/>
+      </p:nvGrpSpPr>
+      <p:grpSpPr>
+        <a:xfrm>
+          <a:off x="0" y="0"/>
+          <a:ext cx="0" cy="0"/>
+          <a:chOff x="0" y="0"/>
+          <a:chExt cx="0" cy="0"/>
+        </a:xfrm>
+      </p:grpSpPr>
+      <p:sp>
+        <p:nvSpPr>
+          <p:cNvPr id="2" name="Slide Image Placeholder 1"/>
+          <p:cNvSpPr>
+            <a:spLocks noGrp="1"/>
+          </p:cNvSpPr>
+          <p:nvPr>
+            <p:ph type="sldImg" idx="2"/>
+          </p:nvPr>
+        </p:nvSpPr>
+        <p:spPr/>
+      </p:sp>
+      <p:sp>
+        <p:nvSpPr>
+          <p:cNvPr id="3" name="Notes Placeholder 2"/>
+          <p:cNvSpPr>
+            <a:spLocks noGrp="1"/>
+          </p:cNvSpPr>
+          <p:nvPr>
+            <p:ph type="body" idx="3" sz="quarter"/>
+          </p:nvPr>
+        </p:nvSpPr>
+        <p:spPr/>
+        <p:txBody>
+          <a:bodyPr/>
+          <a:lstStyle/>
+          <a:p>
+            <a:r>
+              <a:t>[~30s] Good morning. I'm Lakshitha.</a:t>
+            </a:r>
+          </a:p>
+          <a:p/>
+          <a:p>
+            <a:r>
+              <a:t>GreenLight is an approval console. It takes the software requests that land on Operations every week and hands them back with the homework already done.</a:t>
+            </a:r>
+          </a:p>
+          <a:p/>
+          <a:p>
+            <a:r>
+              <a:t>The recurring task it removes is vendor research — two to three hours a tool, plus the days it spends waiting.</a:t>
+            </a:r>
+          </a:p>
+          <a:p/>
+          <a:p>
+            <a:r>
+              <a:t>MOVE ON WITH: Let me show you why it mattered.</a:t>
+            </a:r>
+          </a:p>
+        </p:txBody>
+      </p:sp>
+      <p:sp>
+        <p:nvSpPr>
+          <p:cNvPr id="4" name="Slide Number Placeholder 3"/>
+          <p:cNvSpPr>
+            <a:spLocks noGrp="1"/>
+          </p:cNvSpPr>
+          <p:nvPr>
+            <p:ph type="sldNum" idx="5" sz="quarter"/>
+          </p:nvPr>
+        </p:nvSpPr>
+        <p:spPr/>
+      </p:sp>
+    </p:spTree>
+  </p:cSld>
+  <p:clrMapOvr>
+    <a:masterClrMapping/>
+  </p:clrMapOvr>
+</p:notes>
+</file>
+
+<file path=ppt/notesSlides/notesSlide10.xml><?xml version="1.0" encoding="utf-8"?>
+<p:notes xmlns:a="http://schemas.openxmlformats.org/drawingml/2006/main" xmlns:p="http://schemas.openxmlformats.org/presentationml/2006/main" xmlns:r="http://schemas.openxmlformats.org/officeDocument/2006/relationships">
+  <p:cSld>
+    <p:spTree>
+      <p:nvGrpSpPr>
+        <p:cNvPr id="1" name=""/>
+        <p:cNvGrpSpPr/>
+        <p:nvPr/>
+      </p:nvGrpSpPr>
+      <p:grpSpPr>
+        <a:xfrm>
+          <a:off x="0" y="0"/>
+          <a:ext cx="0" cy="0"/>
+          <a:chOff x="0" y="0"/>
+          <a:chExt cx="0" cy="0"/>
+        </a:xfrm>
+      </p:grpSpPr>
+      <p:sp>
+        <p:nvSpPr>
+          <p:cNvPr id="2" name="Slide Image Placeholder 1"/>
+          <p:cNvSpPr>
+            <a:spLocks noGrp="1"/>
+          </p:cNvSpPr>
+          <p:nvPr>
+            <p:ph type="sldImg" idx="2"/>
+          </p:nvPr>
+        </p:nvSpPr>
+        <p:spPr/>
+      </p:sp>
+      <p:sp>
+        <p:nvSpPr>
+          <p:cNvPr id="3" name="Notes Placeholder 2"/>
+          <p:cNvSpPr>
+            <a:spLocks noGrp="1"/>
+          </p:cNvSpPr>
+          <p:nvPr>
+            <p:ph type="body" idx="3" sz="quarter"/>
+          </p:nvPr>
+        </p:nvSpPr>
+        <p:spPr/>
+        <p:txBody>
+          <a:bodyPr/>
+          <a:lstStyle/>
+          <a:p>
+            <a:r>
+              <a:t>[~60s] Split honestly, because I would rather you trusted the half I can prove.</a:t>
+            </a:r>
+          </a:p>
+          <a:p/>
+          <a:p>
+            <a:r>
+              <a:t>LEFT — what I can show you today:</a:t>
+            </a:r>
+          </a:p>
+          <a:p>
+            <a:r>
+              <a:t>898 licence seats tracked. 99 of them sitting unused. That is 2.16 million rupees a year in licences nobody has opened.</a:t>
+            </a:r>
+          </a:p>
+          <a:p>
+            <a:r>
+              <a:t>3 of 11 requests settled without an approver.</a:t>
+            </a:r>
+          </a:p>
+          <a:p>
+            <a:r>
+              <a:t>Software under active attack caught before installation.</a:t>
+            </a:r>
+          </a:p>
+          <a:p/>
+          <a:p>
+            <a:r>
+              <a:t>RIGHT — what I cannot prove yet. How many requests a week. What share come back incomplete. How long the round trip really takes.</a:t>
+            </a:r>
+          </a:p>
+          <a:p/>
+          <a:p>
+            <a:r>
+              <a:t>Ten minutes with Operations turns those into evidence. Until then I am calling them estimates — and I would rather tell you which is which.</a:t>
+            </a:r>
+          </a:p>
+          <a:p/>
+          <a:p>
+            <a:r>
+              <a:t>FINALLY: it is running. Not a mockup. You can sign in this afternoon.</a:t>
+            </a:r>
+          </a:p>
+        </p:txBody>
+      </p:sp>
+      <p:sp>
+        <p:nvSpPr>
+          <p:cNvPr id="4" name="Slide Number Placeholder 3"/>
+          <p:cNvSpPr>
+            <a:spLocks noGrp="1"/>
+          </p:cNvSpPr>
+          <p:nvPr>
+            <p:ph type="sldNum" idx="5" sz="quarter"/>
+          </p:nvPr>
+        </p:nvSpPr>
+        <p:spPr/>
+      </p:sp>
+    </p:spTree>
+  </p:cSld>
+  <p:clrMapOvr>
+    <a:masterClrMapping/>
+  </p:clrMapOvr>
+</p:notes>
+</file>
+
+<file path=ppt/notesSlides/notesSlide11.xml><?xml version="1.0" encoding="utf-8"?>
+<p:notes xmlns:a="http://schemas.openxmlformats.org/drawingml/2006/main" xmlns:p="http://schemas.openxmlformats.org/presentationml/2006/main" xmlns:r="http://schemas.openxmlformats.org/officeDocument/2006/relationships">
+  <p:cSld>
+    <p:spTree>
+      <p:nvGrpSpPr>
+        <p:cNvPr id="1" name=""/>
+        <p:cNvGrpSpPr/>
+        <p:nvPr/>
+      </p:nvGrpSpPr>
+      <p:grpSpPr>
+        <a:xfrm>
+          <a:off x="0" y="0"/>
+          <a:ext cx="0" cy="0"/>
+          <a:chOff x="0" y="0"/>
+          <a:chExt cx="0" cy="0"/>
+        </a:xfrm>
+      </p:grpSpPr>
+      <p:sp>
+        <p:nvSpPr>
+          <p:cNvPr id="2" name="Slide Image Placeholder 1"/>
+          <p:cNvSpPr>
+            <a:spLocks noGrp="1"/>
+          </p:cNvSpPr>
+          <p:nvPr>
+            <p:ph type="sldImg" idx="2"/>
+          </p:nvPr>
+        </p:nvSpPr>
+        <p:spPr/>
+      </p:sp>
+      <p:sp>
+        <p:nvSpPr>
+          <p:cNvPr id="3" name="Notes Placeholder 2"/>
+          <p:cNvSpPr>
+            <a:spLocks noGrp="1"/>
+          </p:cNvSpPr>
+          <p:nvPr>
+            <p:ph type="body" idx="3" sz="quarter"/>
+          </p:nvPr>
+        </p:nvSpPr>
+        <p:spPr/>
+        <p:txBody>
+          <a:bodyPr/>
+          <a:lstStyle/>
+          <a:p>
+            <a:r>
+              <a:t>[~35s] Who is it for.</a:t>
+            </a:r>
+          </a:p>
+          <a:p/>
+          <a:p>
+            <a:r>
+              <a:t>Everyone raises software requests — Delivery, QA, Marketing, Support, Infrastructure, Quality. All of them.</a:t>
+            </a:r>
+          </a:p>
+          <a:p/>
+          <a:p>
+            <a:r>
+              <a:t>Operations decides, and is the only role that can.</a:t>
+            </a:r>
+          </a:p>
+          <a:p/>
+          <a:p>
+            <a:r>
+              <a:t>Finance owns the spend, Legal owns the privacy question, IT owns what runs on the machines.</a:t>
+            </a:r>
+          </a:p>
+          <a:p/>
+          <a:p>
+            <a:r>
+              <a:t>That is why it is submitted as All.</a:t>
+            </a:r>
+          </a:p>
+        </p:txBody>
+      </p:sp>
+      <p:sp>
+        <p:nvSpPr>
+          <p:cNvPr id="4" name="Slide Number Placeholder 3"/>
+          <p:cNvSpPr>
+            <a:spLocks noGrp="1"/>
+          </p:cNvSpPr>
+          <p:nvPr>
+            <p:ph type="sldNum" idx="5" sz="quarter"/>
+          </p:nvPr>
+        </p:nvSpPr>
+        <p:spPr/>
+      </p:sp>
+    </p:spTree>
+  </p:cSld>
+  <p:clrMapOvr>
+    <a:masterClrMapping/>
+  </p:clrMapOvr>
+</p:notes>
+</file>
+
+<file path=ppt/notesSlides/notesSlide12.xml><?xml version="1.0" encoding="utf-8"?>
+<p:notes xmlns:a="http://schemas.openxmlformats.org/drawingml/2006/main" xmlns:p="http://schemas.openxmlformats.org/presentationml/2006/main" xmlns:r="http://schemas.openxmlformats.org/officeDocument/2006/relationships">
+  <p:cSld>
+    <p:spTree>
+      <p:nvGrpSpPr>
+        <p:cNvPr id="1" name=""/>
+        <p:cNvGrpSpPr/>
+        <p:nvPr/>
+      </p:nvGrpSpPr>
+      <p:grpSpPr>
+        <a:xfrm>
+          <a:off x="0" y="0"/>
+          <a:ext cx="0" cy="0"/>
+          <a:chOff x="0" y="0"/>
+          <a:chExt cx="0" cy="0"/>
+        </a:xfrm>
+      </p:grpSpPr>
+      <p:sp>
+        <p:nvSpPr>
+          <p:cNvPr id="2" name="Slide Image Placeholder 1"/>
+          <p:cNvSpPr>
+            <a:spLocks noGrp="1"/>
+          </p:cNvSpPr>
+          <p:nvPr>
+            <p:ph type="sldImg" idx="2"/>
+          </p:nvPr>
+        </p:nvSpPr>
+        <p:spPr/>
+      </p:sp>
+      <p:sp>
+        <p:nvSpPr>
+          <p:cNvPr id="3" name="Notes Placeholder 2"/>
+          <p:cNvSpPr>
+            <a:spLocks noGrp="1"/>
+          </p:cNvSpPr>
+          <p:nvPr>
+            <p:ph type="body" idx="3" sz="quarter"/>
+          </p:nvPr>
+        </p:nvSpPr>
+        <p:spPr/>
+        <p:txBody>
+          <a:bodyPr/>
+          <a:lstStyle/>
+          <a:p>
+            <a:r>
+              <a:t>[~25s] One line to leave you with.</a:t>
+            </a:r>
+          </a:p>
+          <a:p/>
+          <a:p>
+            <a:r>
+              <a:t>GreenLight never approves anything. It makes sure a person can.</a:t>
+            </a:r>
+          </a:p>
+          <a:p/>
+          <a:p>
+            <a:r>
+              <a:t>*** PAUSE. Then: *** Thank you.</a:t>
+            </a:r>
+          </a:p>
+          <a:p/>
+          <a:p>
+            <a:r>
+              <a:t>LIKELY QUESTIONS:</a:t>
+            </a:r>
+          </a:p>
+          <a:p>
+            <a:r>
+              <a:t>· Is it really running? Yes — sign in at the address on screen, any account, password 'greenlight'.</a:t>
+            </a:r>
+          </a:p>
+          <a:p>
+            <a:r>
+              <a:t>· What if Claude is wrong? It cannot approve anything, and anything it could not verify is marked unverified. A person decides every time.</a:t>
+            </a:r>
+          </a:p>
+          <a:p>
+            <a:r>
+              <a:t>· What did it cost to build? An ordinary Claude subscription. No API key, no per-call billing.</a:t>
+            </a:r>
+          </a:p>
+          <a:p>
+            <a:r>
+              <a:t>· Could my department use it? The rule engine is not software-specific — it already runs ISO document approvals through the same path.</a:t>
+            </a:r>
+          </a:p>
+        </p:txBody>
+      </p:sp>
+      <p:sp>
+        <p:nvSpPr>
+          <p:cNvPr id="4" name="Slide Number Placeholder 3"/>
+          <p:cNvSpPr>
+            <a:spLocks noGrp="1"/>
+          </p:cNvSpPr>
+          <p:nvPr>
+            <p:ph type="sldNum" idx="5" sz="quarter"/>
+          </p:nvPr>
+        </p:nvSpPr>
+        <p:spPr/>
+      </p:sp>
+    </p:spTree>
+  </p:cSld>
+  <p:clrMapOvr>
+    <a:masterClrMapping/>
+  </p:clrMapOvr>
+</p:notes>
+</file>
+
+<file path=ppt/notesSlides/notesSlide2.xml><?xml version="1.0" encoding="utf-8"?>
+<p:notes xmlns:a="http://schemas.openxmlformats.org/drawingml/2006/main" xmlns:p="http://schemas.openxmlformats.org/presentationml/2006/main" xmlns:r="http://schemas.openxmlformats.org/officeDocument/2006/relationships">
+  <p:cSld>
+    <p:spTree>
+      <p:nvGrpSpPr>
+        <p:cNvPr id="1" name=""/>
+        <p:cNvGrpSpPr/>
+        <p:nvPr/>
+      </p:nvGrpSpPr>
+      <p:grpSpPr>
+        <a:xfrm>
+          <a:off x="0" y="0"/>
+          <a:ext cx="0" cy="0"/>
+          <a:chOff x="0" y="0"/>
+          <a:chExt cx="0" cy="0"/>
+        </a:xfrm>
+      </p:grpSpPr>
+      <p:sp>
+        <p:nvSpPr>
+          <p:cNvPr id="2" name="Slide Image Placeholder 1"/>
+          <p:cNvSpPr>
+            <a:spLocks noGrp="1"/>
+          </p:cNvSpPr>
+          <p:nvPr>
+            <p:ph type="sldImg" idx="2"/>
+          </p:nvPr>
+        </p:nvSpPr>
+        <p:spPr/>
+      </p:sp>
+      <p:sp>
+        <p:nvSpPr>
+          <p:cNvPr id="3" name="Notes Placeholder 2"/>
+          <p:cNvSpPr>
+            <a:spLocks noGrp="1"/>
+          </p:cNvSpPr>
+          <p:nvPr>
+            <p:ph type="body" idx="3" sz="quarter"/>
+          </p:nvPr>
+        </p:nvSpPr>
+        <p:spPr/>
+        <p:txBody>
+          <a:bodyPr/>
+          <a:lstStyle/>
+          <a:p>
+            <a:r>
+              <a:t>[~60s] Last month the support team asked for a remote-access tool for a client service desk. A perfectly reasonable request.</a:t>
+            </a:r>
+          </a:p>
+          <a:p/>
+          <a:p>
+            <a:r>
+              <a:t>When GreenLight checked it against CISA's live list of software being actively exploited — it was on it.</a:t>
+            </a:r>
+          </a:p>
+          <a:p/>
+          <a:p>
+            <a:r>
+              <a:t>*** PAUSE HERE. Let that sit. ***</a:t>
+            </a:r>
+          </a:p>
+          <a:p/>
+          <a:p>
+            <a:r>
+              <a:t>Nobody could have known. The requester had no reason to check. The approver had no way to find out in the time available.</a:t>
+            </a:r>
+          </a:p>
+          <a:p/>
+          <a:p>
+            <a:r>
+              <a:t>IF ASKED the exact number: it is checked live, so it is whatever CISA says that day. That is deliberate — a number baked into a slide would already be out of date.</a:t>
+            </a:r>
+          </a:p>
+          <a:p/>
+          <a:p>
+            <a:r>
+              <a:t>MOVE ON WITH: The gap isn't the people. It's that answering properly takes hours.</a:t>
+            </a:r>
+          </a:p>
+        </p:txBody>
+      </p:sp>
+      <p:sp>
+        <p:nvSpPr>
+          <p:cNvPr id="4" name="Slide Number Placeholder 3"/>
+          <p:cNvSpPr>
+            <a:spLocks noGrp="1"/>
+          </p:cNvSpPr>
+          <p:nvPr>
+            <p:ph type="sldNum" idx="5" sz="quarter"/>
+          </p:nvPr>
+        </p:nvSpPr>
+        <p:spPr/>
+      </p:sp>
+    </p:spTree>
+  </p:cSld>
+  <p:clrMapOvr>
+    <a:masterClrMapping/>
+  </p:clrMapOvr>
+</p:notes>
+</file>
+
+<file path=ppt/notesSlides/notesSlide3.xml><?xml version="1.0" encoding="utf-8"?>
+<p:notes xmlns:a="http://schemas.openxmlformats.org/drawingml/2006/main" xmlns:p="http://schemas.openxmlformats.org/presentationml/2006/main" xmlns:r="http://schemas.openxmlformats.org/officeDocument/2006/relationships">
+  <p:cSld>
+    <p:spTree>
+      <p:nvGrpSpPr>
+        <p:cNvPr id="1" name=""/>
+        <p:cNvGrpSpPr/>
+        <p:nvPr/>
+      </p:nvGrpSpPr>
+      <p:grpSpPr>
+        <a:xfrm>
+          <a:off x="0" y="0"/>
+          <a:ext cx="0" cy="0"/>
+          <a:chOff x="0" y="0"/>
+          <a:chExt cx="0" cy="0"/>
+        </a:xfrm>
+      </p:grpSpPr>
+      <p:sp>
+        <p:nvSpPr>
+          <p:cNvPr id="2" name="Slide Image Placeholder 1"/>
+          <p:cNvSpPr>
+            <a:spLocks noGrp="1"/>
+          </p:cNvSpPr>
+          <p:nvPr>
+            <p:ph type="sldImg" idx="2"/>
+          </p:nvPr>
+        </p:nvSpPr>
+        <p:spPr/>
+      </p:sp>
+      <p:sp>
+        <p:nvSpPr>
+          <p:cNvPr id="3" name="Notes Placeholder 2"/>
+          <p:cNvSpPr>
+            <a:spLocks noGrp="1"/>
+          </p:cNvSpPr>
+          <p:nvPr>
+            <p:ph type="body" idx="3" sz="quarter"/>
+          </p:nvPr>
+        </p:nvSpPr>
+        <p:spPr/>
+        <p:txBody>
+          <a:bodyPr/>
+          <a:lstStyle/>
+          <a:p>
+            <a:r>
+              <a:t>[~60s] Here is the week.</a:t>
+            </a:r>
+          </a:p>
+          <a:p/>
+          <a:p>
+            <a:r>
+              <a:t>Three days in the inbox — every operational request in the company arrives at one desk.</a:t>
+            </a:r>
+          </a:p>
+          <a:p/>
+          <a:p>
+            <a:r>
+              <a:t>Then it comes back incomplete, so another day or two.</a:t>
+            </a:r>
+          </a:p>
+          <a:p/>
+          <a:p>
+            <a:r>
+              <a:t>Then two to three hours of research, by the approver, by hand.</a:t>
+            </a:r>
+          </a:p>
+          <a:p/>
+          <a:p>
+            <a:r>
+              <a:t>Nearly a week for one tool.</a:t>
+            </a:r>
+          </a:p>
+          <a:p/>
+          <a:p>
+            <a:r>
+              <a:t>LAND THIS: the work that makes one person the bottleneck is the same work every single time. That is exactly what you automate.</a:t>
+            </a:r>
+          </a:p>
+          <a:p/>
+          <a:p>
+            <a:r>
+              <a:t>NOTE: say the word 'estimate' out loud here. It buys you credibility for slide 10.</a:t>
+            </a:r>
+          </a:p>
+        </p:txBody>
+      </p:sp>
+      <p:sp>
+        <p:nvSpPr>
+          <p:cNvPr id="4" name="Slide Number Placeholder 3"/>
+          <p:cNvSpPr>
+            <a:spLocks noGrp="1"/>
+          </p:cNvSpPr>
+          <p:nvPr>
+            <p:ph type="sldNum" idx="5" sz="quarter"/>
+          </p:nvPr>
+        </p:nvSpPr>
+        <p:spPr/>
+      </p:sp>
+    </p:spTree>
+  </p:cSld>
+  <p:clrMapOvr>
+    <a:masterClrMapping/>
+  </p:clrMapOvr>
+</p:notes>
+</file>
+
+<file path=ppt/notesSlides/notesSlide4.xml><?xml version="1.0" encoding="utf-8"?>
+<p:notes xmlns:a="http://schemas.openxmlformats.org/drawingml/2006/main" xmlns:p="http://schemas.openxmlformats.org/presentationml/2006/main" xmlns:r="http://schemas.openxmlformats.org/officeDocument/2006/relationships">
+  <p:cSld>
+    <p:spTree>
+      <p:nvGrpSpPr>
+        <p:cNvPr id="1" name=""/>
+        <p:cNvGrpSpPr/>
+        <p:nvPr/>
+      </p:nvGrpSpPr>
+      <p:grpSpPr>
+        <a:xfrm>
+          <a:off x="0" y="0"/>
+          <a:ext cx="0" cy="0"/>
+          <a:chOff x="0" y="0"/>
+          <a:chExt cx="0" cy="0"/>
+        </a:xfrm>
+      </p:grpSpPr>
+      <p:sp>
+        <p:nvSpPr>
+          <p:cNvPr id="2" name="Slide Image Placeholder 1"/>
+          <p:cNvSpPr>
+            <a:spLocks noGrp="1"/>
+          </p:cNvSpPr>
+          <p:nvPr>
+            <p:ph type="sldImg" idx="2"/>
+          </p:nvPr>
+        </p:nvSpPr>
+        <p:spPr/>
+      </p:sp>
+      <p:sp>
+        <p:nvSpPr>
+          <p:cNvPr id="3" name="Notes Placeholder 2"/>
+          <p:cNvSpPr>
+            <a:spLocks noGrp="1"/>
+          </p:cNvSpPr>
+          <p:nvPr>
+            <p:ph type="body" idx="3" sz="quarter"/>
+          </p:nvPr>
+        </p:nvSpPr>
+        <p:spPr/>
+        <p:txBody>
+          <a:bodyPr/>
+          <a:lstStyle/>
+          <a:p>
+            <a:r>
+              <a:t>[~75s] THIS IS THE SLIDE. Slow down.</a:t>
+            </a:r>
+          </a:p>
+          <a:p/>
+          <a:p>
+            <a:r>
+              <a:t>Same request, both sides.</a:t>
+            </a:r>
+          </a:p>
+          <a:p/>
+          <a:p>
+            <a:r>
+              <a:t>Left: what the approver used to open. Six people want Canva Pro. And nothing else — no cost, no security answer, no legal position.</a:t>
+            </a:r>
+          </a:p>
+          <a:p/>
+          <a:p>
+            <a:r>
+              <a:t>Right: what they open now. Do we own it — no. Is anyone attacking it — no. Is there a security audit — yes, and here is where we found it.</a:t>
+            </a:r>
+          </a:p>
+          <a:p/>
+          <a:p>
+            <a:r>
+              <a:t>Where does our data sit — United States. But read that line carefully: that is the VENDOR'S OWN WORD. Nobody independent confirmed it, and GreenLight says so.</a:t>
+            </a:r>
+          </a:p>
+          <a:p/>
+          <a:p>
+            <a:r>
+              <a:t>And privacy: the email never mentioned it. So rather than assume, GreenLight has drafted the question — and a person sends it.</a:t>
+            </a:r>
+          </a:p>
+          <a:p/>
+          <a:p>
+            <a:r>
+              <a:t>LAND THIS: the homework is done, and what is unknown is named rather than filled in.</a:t>
+            </a:r>
+          </a:p>
+        </p:txBody>
+      </p:sp>
+      <p:sp>
+        <p:nvSpPr>
+          <p:cNvPr id="4" name="Slide Number Placeholder 3"/>
+          <p:cNvSpPr>
+            <a:spLocks noGrp="1"/>
+          </p:cNvSpPr>
+          <p:nvPr>
+            <p:ph type="sldNum" idx="5" sz="quarter"/>
+          </p:nvPr>
+        </p:nvSpPr>
+        <p:spPr/>
+      </p:sp>
+    </p:spTree>
+  </p:cSld>
+  <p:clrMapOvr>
+    <a:masterClrMapping/>
+  </p:clrMapOvr>
+</p:notes>
+</file>
+
+<file path=ppt/notesSlides/notesSlide5.xml><?xml version="1.0" encoding="utf-8"?>
+<p:notes xmlns:a="http://schemas.openxmlformats.org/drawingml/2006/main" xmlns:p="http://schemas.openxmlformats.org/presentationml/2006/main" xmlns:r="http://schemas.openxmlformats.org/officeDocument/2006/relationships">
+  <p:cSld>
+    <p:spTree>
+      <p:nvGrpSpPr>
+        <p:cNvPr id="1" name=""/>
+        <p:cNvGrpSpPr/>
+        <p:nvPr/>
+      </p:nvGrpSpPr>
+      <p:grpSpPr>
+        <a:xfrm>
+          <a:off x="0" y="0"/>
+          <a:ext cx="0" cy="0"/>
+          <a:chOff x="0" y="0"/>
+          <a:chExt cx="0" cy="0"/>
+        </a:xfrm>
+      </p:grpSpPr>
+      <p:sp>
+        <p:nvSpPr>
+          <p:cNvPr id="2" name="Slide Image Placeholder 1"/>
+          <p:cNvSpPr>
+            <a:spLocks noGrp="1"/>
+          </p:cNvSpPr>
+          <p:nvPr>
+            <p:ph type="sldImg" idx="2"/>
+          </p:nvPr>
+        </p:nvSpPr>
+        <p:spPr/>
+      </p:sp>
+      <p:sp>
+        <p:nvSpPr>
+          <p:cNvPr id="3" name="Notes Placeholder 2"/>
+          <p:cNvSpPr>
+            <a:spLocks noGrp="1"/>
+          </p:cNvSpPr>
+          <p:nvPr>
+            <p:ph type="body" idx="3" sz="quarter"/>
+          </p:nvPr>
+        </p:nvSpPr>
+        <p:spPr/>
+        <p:txBody>
+          <a:bodyPr/>
+          <a:lstStyle/>
+          <a:p>
+            <a:r>
+              <a:t>[~60s] The biggest saving is not doing the research faster. It is not doing it at all.</a:t>
+            </a:r>
+          </a:p>
+          <a:p/>
+          <a:p>
+            <a:r>
+              <a:t>First question: do we already own this?</a:t>
+            </a:r>
+          </a:p>
+          <a:p/>
+          <a:p>
+            <a:r>
+              <a:t>Yes, and a seat is free — nobody approves anything. Access in seconds, still logged.</a:t>
+            </a:r>
+          </a:p>
+          <a:p/>
+          <a:p>
+            <a:r>
+              <a:t>Yes, but no spare seat — that is a purchase, not a security question. It goes to whoever owns the budget. It never reaches IT.</a:t>
+            </a:r>
+          </a:p>
+          <a:p/>
+          <a:p>
+            <a:r>
+              <a:t>Only genuinely new software reaches an approver.</a:t>
+            </a:r>
+          </a:p>
+          <a:p/>
+          <a:p>
+            <a:r>
+              <a:t>NUMBER TO LAND: on one working day of real traffic, 3 of 11 were settled before anyone read them.</a:t>
+            </a:r>
+          </a:p>
+          <a:p/>
+          <a:p>
+            <a:r>
+              <a:t>IF CHALLENGED that 8 of 11 still needed review: yes — and that share falls every time something is approved, because approving it adds it to what we own. The queue shrinks as you use it.</a:t>
+            </a:r>
+          </a:p>
+        </p:txBody>
+      </p:sp>
+      <p:sp>
+        <p:nvSpPr>
+          <p:cNvPr id="4" name="Slide Number Placeholder 3"/>
+          <p:cNvSpPr>
+            <a:spLocks noGrp="1"/>
+          </p:cNvSpPr>
+          <p:nvPr>
+            <p:ph type="sldNum" idx="5" sz="quarter"/>
+          </p:nvPr>
+        </p:nvSpPr>
+        <p:spPr/>
+      </p:sp>
+    </p:spTree>
+  </p:cSld>
+  <p:clrMapOvr>
+    <a:masterClrMapping/>
+  </p:clrMapOvr>
+</p:notes>
+</file>
+
+<file path=ppt/notesSlides/notesSlide6.xml><?xml version="1.0" encoding="utf-8"?>
+<p:notes xmlns:a="http://schemas.openxmlformats.org/drawingml/2006/main" xmlns:p="http://schemas.openxmlformats.org/presentationml/2006/main" xmlns:r="http://schemas.openxmlformats.org/officeDocument/2006/relationships">
+  <p:cSld>
+    <p:spTree>
+      <p:nvGrpSpPr>
+        <p:cNvPr id="1" name=""/>
+        <p:cNvGrpSpPr/>
+        <p:nvPr/>
+      </p:nvGrpSpPr>
+      <p:grpSpPr>
+        <a:xfrm>
+          <a:off x="0" y="0"/>
+          <a:ext cx="0" cy="0"/>
+          <a:chOff x="0" y="0"/>
+          <a:chExt cx="0" cy="0"/>
+        </a:xfrm>
+      </p:grpSpPr>
+      <p:sp>
+        <p:nvSpPr>
+          <p:cNvPr id="2" name="Slide Image Placeholder 1"/>
+          <p:cNvSpPr>
+            <a:spLocks noGrp="1"/>
+          </p:cNvSpPr>
+          <p:nvPr>
+            <p:ph type="sldImg" idx="2"/>
+          </p:nvPr>
+        </p:nvSpPr>
+        <p:spPr/>
+      </p:sp>
+      <p:sp>
+        <p:nvSpPr>
+          <p:cNvPr id="3" name="Notes Placeholder 2"/>
+          <p:cNvSpPr>
+            <a:spLocks noGrp="1"/>
+          </p:cNvSpPr>
+          <p:nvPr>
+            <p:ph type="body" idx="3" sz="quarter"/>
+          </p:nvPr>
+        </p:nvSpPr>
+        <p:spPr/>
+        <p:txBody>
+          <a:bodyPr/>
+          <a:lstStyle/>
+          <a:p>
+            <a:r>
+              <a:t>[~60s] Some of these questions a database answers. Four free sources, about a second, no key required — is anyone attacking it, how many serious flaws, what is its privacy record.</a:t>
+            </a:r>
+          </a:p>
+          <a:p/>
+          <a:p>
+            <a:r>
+              <a:t>But the questions that actually decide an approval have no database behind them.</a:t>
+            </a:r>
+          </a:p>
+          <a:p/>
+          <a:p>
+            <a:r>
+              <a:t>Does this vendor hold a current security audit? Will they sign a data agreement? Where does our data physically sit?</a:t>
+            </a:r>
+          </a:p>
+          <a:p/>
+          <a:p>
+            <a:r>
+              <a:t>That lives as prose, on legal pages, in a different shape for every single vendor. Somebody has to read it.</a:t>
+            </a:r>
+          </a:p>
+          <a:p/>
+          <a:p>
+            <a:r>
+              <a:t>LAND THIS: that reading IS the recurring task. It is what took the hours. That is the part Claude takes.</a:t>
+            </a:r>
+          </a:p>
+          <a:p/>
+          <a:p>
+            <a:r>
+              <a:t>IF ASKED about cost: it runs on an ordinary Claude subscription. No API key, no per-call billing.</a:t>
+            </a:r>
+          </a:p>
+        </p:txBody>
+      </p:sp>
+      <p:sp>
+        <p:nvSpPr>
+          <p:cNvPr id="4" name="Slide Number Placeholder 3"/>
+          <p:cNvSpPr>
+            <a:spLocks noGrp="1"/>
+          </p:cNvSpPr>
+          <p:nvPr>
+            <p:ph type="sldNum" idx="5" sz="quarter"/>
+          </p:nvPr>
+        </p:nvSpPr>
+        <p:spPr/>
+      </p:sp>
+    </p:spTree>
+  </p:cSld>
+  <p:clrMapOvr>
+    <a:masterClrMapping/>
+  </p:clrMapOvr>
+</p:notes>
+</file>
+
+<file path=ppt/notesSlides/notesSlide7.xml><?xml version="1.0" encoding="utf-8"?>
+<p:notes xmlns:a="http://schemas.openxmlformats.org/drawingml/2006/main" xmlns:p="http://schemas.openxmlformats.org/presentationml/2006/main" xmlns:r="http://schemas.openxmlformats.org/officeDocument/2006/relationships">
+  <p:cSld>
+    <p:spTree>
+      <p:nvGrpSpPr>
+        <p:cNvPr id="1" name=""/>
+        <p:cNvGrpSpPr/>
+        <p:nvPr/>
+      </p:nvGrpSpPr>
+      <p:grpSpPr>
+        <a:xfrm>
+          <a:off x="0" y="0"/>
+          <a:ext cx="0" cy="0"/>
+          <a:chOff x="0" y="0"/>
+          <a:chExt cx="0" cy="0"/>
+        </a:xfrm>
+      </p:grpSpPr>
+      <p:sp>
+        <p:nvSpPr>
+          <p:cNvPr id="2" name="Slide Image Placeholder 1"/>
+          <p:cNvSpPr>
+            <a:spLocks noGrp="1"/>
+          </p:cNvSpPr>
+          <p:nvPr>
+            <p:ph type="sldImg" idx="2"/>
+          </p:nvPr>
+        </p:nvSpPr>
+        <p:spPr/>
+      </p:sp>
+      <p:sp>
+        <p:nvSpPr>
+          <p:cNvPr id="3" name="Notes Placeholder 2"/>
+          <p:cNvSpPr>
+            <a:spLocks noGrp="1"/>
+          </p:cNvSpPr>
+          <p:nvPr>
+            <p:ph type="body" idx="3" sz="quarter"/>
+          </p:nvPr>
+        </p:nvSpPr>
+        <p:spPr/>
+        <p:txBody>
+          <a:bodyPr/>
+          <a:lstStyle/>
+          <a:p>
+            <a:r>
+              <a:t>[~60s] The obvious objection to any AI tool is that it makes things up. So this is the part I would defend hardest.</a:t>
+            </a:r>
+          </a:p>
+          <a:p/>
+          <a:p>
+            <a:r>
+              <a:t>Every fact carries where it came from. We checked it. We found it written on a page. The vendor claims it about itself. Or we could not establish it.</a:t>
+            </a:r>
+          </a:p>
+          <a:p/>
+          <a:p>
+            <a:r>
+              <a:t>And two rules follow from that.</a:t>
+            </a:r>
+          </a:p>
+          <a:p/>
+          <a:p>
+            <a:r>
+              <a:t>A vendor's claim about itself cannot satisfy a requirement that blocks — their word is not evidence.</a:t>
+            </a:r>
+          </a:p>
+          <a:p/>
+          <a:p>
+            <a:r>
+              <a:t>And a question it cannot settle comes back as 'more information required'. Never a guess.</a:t>
+            </a:r>
+          </a:p>
+          <a:p/>
+          <a:p>
+            <a:r>
+              <a:t>LAND THIS: it tells you what it does not know. That is what makes it safe to rely on.</a:t>
+            </a:r>
+          </a:p>
+        </p:txBody>
+      </p:sp>
+      <p:sp>
+        <p:nvSpPr>
+          <p:cNvPr id="4" name="Slide Number Placeholder 3"/>
+          <p:cNvSpPr>
+            <a:spLocks noGrp="1"/>
+          </p:cNvSpPr>
+          <p:nvPr>
+            <p:ph type="sldNum" idx="5" sz="quarter"/>
+          </p:nvPr>
+        </p:nvSpPr>
+        <p:spPr/>
+      </p:sp>
+    </p:spTree>
+  </p:cSld>
+  <p:clrMapOvr>
+    <a:masterClrMapping/>
+  </p:clrMapOvr>
+</p:notes>
+</file>
+
+<file path=ppt/notesSlides/notesSlide8.xml><?xml version="1.0" encoding="utf-8"?>
+<p:notes xmlns:a="http://schemas.openxmlformats.org/drawingml/2006/main" xmlns:p="http://schemas.openxmlformats.org/presentationml/2006/main" xmlns:r="http://schemas.openxmlformats.org/officeDocument/2006/relationships">
+  <p:cSld>
+    <p:spTree>
+      <p:nvGrpSpPr>
+        <p:cNvPr id="1" name=""/>
+        <p:cNvGrpSpPr/>
+        <p:nvPr/>
+      </p:nvGrpSpPr>
+      <p:grpSpPr>
+        <a:xfrm>
+          <a:off x="0" y="0"/>
+          <a:ext cx="0" cy="0"/>
+          <a:chOff x="0" y="0"/>
+          <a:chExt cx="0" cy="0"/>
+        </a:xfrm>
+      </p:grpSpPr>
+      <p:sp>
+        <p:nvSpPr>
+          <p:cNvPr id="2" name="Slide Image Placeholder 1"/>
+          <p:cNvSpPr>
+            <a:spLocks noGrp="1"/>
+          </p:cNvSpPr>
+          <p:nvPr>
+            <p:ph type="sldImg" idx="2"/>
+          </p:nvPr>
+        </p:nvSpPr>
+        <p:spPr/>
+      </p:sp>
+      <p:sp>
+        <p:nvSpPr>
+          <p:cNvPr id="3" name="Notes Placeholder 2"/>
+          <p:cNvSpPr>
+            <a:spLocks noGrp="1"/>
+          </p:cNvSpPr>
+          <p:nvPr>
+            <p:ph type="body" idx="3" sz="quarter"/>
+          </p:nvPr>
+        </p:nvSpPr>
+        <p:spPr/>
+        <p:txBody>
+          <a:bodyPr/>
+          <a:lstStyle/>
+          <a:p>
+            <a:r>
+              <a:t>[~50s] An approval is not forever, and this is the part I would show a security lead.</a:t>
+            </a:r>
+          </a:p>
+          <a:p/>
+          <a:p>
+            <a:r>
+              <a:t>Slack's approval ran out this morning. It dropped off the list of what may run on company machines — on its own.</a:t>
+            </a:r>
+          </a:p>
+          <a:p/>
+          <a:p>
+            <a:r>
+              <a:t>Microsoft 365 came under attack after we approved it: six new actively-exploited vulnerabilities published since. So it stops self-serving until someone looks again.</a:t>
+            </a:r>
+          </a:p>
+          <a:p/>
+          <a:p>
+            <a:r>
+              <a:t>No ticket. No restart. Nobody notified — because nobody needed to be.</a:t>
+            </a:r>
+          </a:p>
+          <a:p/>
+          <a:p>
+            <a:r>
+              <a:t>Two products, 550 seats, handled this morning while everybody was asleep.</a:t>
+            </a:r>
+          </a:p>
+          <a:p/>
+          <a:p>
+            <a:r>
+              <a:t>AND: it also compares what we approved against what is actually running, so software that arrived without asking shows up.</a:t>
+            </a:r>
+          </a:p>
+        </p:txBody>
+      </p:sp>
+      <p:sp>
+        <p:nvSpPr>
+          <p:cNvPr id="4" name="Slide Number Placeholder 3"/>
+          <p:cNvSpPr>
+            <a:spLocks noGrp="1"/>
+          </p:cNvSpPr>
+          <p:nvPr>
+            <p:ph type="sldNum" idx="5" sz="quarter"/>
+          </p:nvPr>
+        </p:nvSpPr>
+        <p:spPr/>
+      </p:sp>
+    </p:spTree>
+  </p:cSld>
+  <p:clrMapOvr>
+    <a:masterClrMapping/>
+  </p:clrMapOvr>
+</p:notes>
+</file>
+
+<file path=ppt/notesSlides/notesSlide9.xml><?xml version="1.0" encoding="utf-8"?>
+<p:notes xmlns:a="http://schemas.openxmlformats.org/drawingml/2006/main" xmlns:p="http://schemas.openxmlformats.org/presentationml/2006/main" xmlns:r="http://schemas.openxmlformats.org/officeDocument/2006/relationships">
+  <p:cSld>
+    <p:spTree>
+      <p:nvGrpSpPr>
+        <p:cNvPr id="1" name=""/>
+        <p:cNvGrpSpPr/>
+        <p:nvPr/>
+      </p:nvGrpSpPr>
+      <p:grpSpPr>
+        <a:xfrm>
+          <a:off x="0" y="0"/>
+          <a:ext cx="0" cy="0"/>
+          <a:chOff x="0" y="0"/>
+          <a:chExt cx="0" cy="0"/>
+        </a:xfrm>
+      </p:grpSpPr>
+      <p:sp>
+        <p:nvSpPr>
+          <p:cNvPr id="2" name="Slide Image Placeholder 1"/>
+          <p:cNvSpPr>
+            <a:spLocks noGrp="1"/>
+          </p:cNvSpPr>
+          <p:nvPr>
+            <p:ph type="sldImg" idx="2"/>
+          </p:nvPr>
+        </p:nvSpPr>
+        <p:spPr/>
+      </p:sp>
+      <p:sp>
+        <p:nvSpPr>
+          <p:cNvPr id="3" name="Notes Placeholder 2"/>
+          <p:cNvSpPr>
+            <a:spLocks noGrp="1"/>
+          </p:cNvSpPr>
+          <p:nvPr>
+            <p:ph type="body" idx="3" sz="quarter"/>
+          </p:nvPr>
+        </p:nvSpPr>
+        <p:spPr/>
+        <p:txBody>
+          <a:bodyPr/>
+          <a:lstStyle/>
+          <a:p>
+            <a:r>
+              <a:t>[~45s] One thing worth saying to Operations directly.</a:t>
+            </a:r>
+          </a:p>
+          <a:p/>
+          <a:p>
+            <a:r>
+              <a:t>The rules are yours. Nineteen requirements, in a file you own — not in code, not in my head.</a:t>
+            </a:r>
+          </a:p>
+          <a:p/>
+          <a:p>
+            <a:r>
+              <a:t>Change one, and nothing gets deployed and no ticket gets raised.</a:t>
+            </a:r>
+          </a:p>
+          <a:p/>
+          <a:p>
+            <a:r>
+              <a:t>And every decision records which version of the rules governed it. So when the ISO audit asks what the rules were in March, there is an answer — rather than somebody digging through old emails.</a:t>
+            </a:r>
+          </a:p>
+          <a:p/>
+          <a:p>
+            <a:r>
+              <a:t>AUDIENCE NOTE: if Quality or Compliance are in the room, this is their slide. Look at them.</a:t>
+            </a:r>
+          </a:p>
+        </p:txBody>
+      </p:sp>
+      <p:sp>
+        <p:nvSpPr>
+          <p:cNvPr id="4" name="Slide Number Placeholder 3"/>
+          <p:cNvSpPr>
+            <a:spLocks noGrp="1"/>
+          </p:cNvSpPr>
+          <p:nvPr>
+            <p:ph type="sldNum" idx="5" sz="quarter"/>
+          </p:nvPr>
+        </p:nvSpPr>
+        <p:spPr/>
+      </p:sp>
+    </p:spTree>
+  </p:cSld>
+  <p:clrMapOvr>
+    <a:masterClrMapping/>
+  </p:clrMapOvr>
+</p:notes>
 </file>
 
 <file path=ppt/slideLayouts/slideLayout1.xml><?xml version="1.0" encoding="utf-8"?>
@@ -3357,7 +4917,7 @@
                 </a:solidFill>
                 <a:latin typeface="Segoe UI"/>
               </a:rPr>
-              <a:t>Every software request in the company lands on one desk as an email. </a:t>
+              <a:t>Every software request in the company lands on one desk — and before anyone can say yes, </a:t>
             </a:r>
             <a:r>
               <a:rPr sz="1300" b="0" i="0">
@@ -3366,7 +4926,7 @@
                 </a:solidFill>
                 <a:latin typeface="Segoe UI"/>
               </a:rPr>
-              <a:t>GreenLight reads it, answers what can be answered, and hands a person a finished dossier. </a:t>
+              <a:t>somebody has to research the vendor by hand. </a:t>
             </a:r>
             <a:r>
               <a:rPr sz="1300" b="1" i="0">
@@ -3375,7 +4935,7 @@
                 </a:solidFill>
                 <a:latin typeface="Segoe UI"/>
               </a:rPr>
-              <a:t>It never approves anything.</a:t>
+              <a:t>That is the task this removes.</a:t>
             </a:r>
           </a:p>
         </p:txBody>
@@ -3389,7 +4949,7 @@
         <p:spPr>
           <a:xfrm>
             <a:off x="841248" y="4032504"/>
-            <a:ext cx="3368954" cy="1207008"/>
+            <a:ext cx="3368954" cy="1188720"/>
           </a:xfrm>
           <a:prstGeom prst="roundRect">
             <a:avLst>
@@ -3437,7 +4997,7 @@
         <p:spPr>
           <a:xfrm>
             <a:off x="1042416" y="4178808"/>
-            <a:ext cx="2966618" cy="932688"/>
+            <a:ext cx="2966618" cy="914400"/>
           </a:xfrm>
           <a:prstGeom prst="rect">
             <a:avLst/>
@@ -3484,7 +5044,7 @@
                 </a:solidFill>
                 <a:latin typeface="Segoe UI"/>
               </a:rPr>
-              <a:t>Researching a vendor by hand, two to three hours per tool, every week.</a:t>
+              <a:t>Two to three hours of vendor research per tool, plus the days it waits in a queue. Every week.</a:t>
             </a:r>
           </a:p>
         </p:txBody>
@@ -3498,7 +5058,7 @@
         <p:spPr>
           <a:xfrm>
             <a:off x="4411370" y="4032504"/>
-            <a:ext cx="3368954" cy="1207008"/>
+            <a:ext cx="3368954" cy="1188720"/>
           </a:xfrm>
           <a:prstGeom prst="roundRect">
             <a:avLst>
@@ -3546,7 +5106,7 @@
         <p:spPr>
           <a:xfrm>
             <a:off x="4612538" y="4178808"/>
-            <a:ext cx="2966618" cy="932688"/>
+            <a:ext cx="2966618" cy="914400"/>
           </a:xfrm>
           <a:prstGeom prst="rect">
             <a:avLst/>
@@ -3593,7 +5153,7 @@
                 </a:solidFill>
                 <a:latin typeface="Segoe UI"/>
               </a:rPr>
-              <a:t>Two Skills and an MCP server. No API key needed — a subscription is enough.</a:t>
+              <a:t>Two Claude Skills do the reading a person used to do — on an ordinary subscription, no API key.</a:t>
             </a:r>
           </a:p>
         </p:txBody>
@@ -3607,7 +5167,7 @@
         <p:spPr>
           <a:xfrm>
             <a:off x="7981492" y="4032504"/>
-            <a:ext cx="3368954" cy="1207008"/>
+            <a:ext cx="3368954" cy="1188720"/>
           </a:xfrm>
           <a:prstGeom prst="roundRect">
             <a:avLst>
@@ -3655,7 +5215,7 @@
         <p:spPr>
           <a:xfrm>
             <a:off x="8182660" y="4178808"/>
-            <a:ext cx="2966618" cy="932688"/>
+            <a:ext cx="2966618" cy="914400"/>
           </a:xfrm>
           <a:prstGeom prst="rect">
             <a:avLst/>
@@ -3683,7 +5243,7 @@
                 </a:solidFill>
                 <a:latin typeface="Segoe UI"/>
               </a:rPr>
-              <a:t>Applies to</a:t>
+              <a:t>Who it is for</a:t>
             </a:r>
           </a:p>
           <a:p>
@@ -3702,7 +5262,7 @@
                 </a:solidFill>
                 <a:latin typeface="Segoe UI"/>
               </a:rPr>
-              <a:t>All departments raise requests. Operations decides.</a:t>
+              <a:t>Every department raises software requests. Operations decides. So: all of them.</a:t>
             </a:r>
           </a:p>
         </p:txBody>
@@ -3744,7 +5304,7 @@
                 </a:solidFill>
                 <a:latin typeface="Segoe UI"/>
               </a:rPr>
-              <a:t>Lakshitha  ·  greenlight-umber.vercel.app  ·  github.com/lakshitha-dev/greenlight</a:t>
+              <a:t>Lakshitha  ·  greenlight-umber.vercel.app</a:t>
             </a:r>
           </a:p>
         </p:txBody>
@@ -3898,7 +5458,7 @@
                 </a:solidFill>
                 <a:latin typeface="Segoe UI"/>
               </a:rPr>
-              <a:t>W H Y  T H E  Q U E U E  S H R I N K S</a:t>
+              <a:t>W H A T  I T ' S  W O R T H</a:t>
             </a:r>
           </a:p>
         </p:txBody>
@@ -3912,7 +5472,7 @@
         <p:spPr>
           <a:xfrm>
             <a:off x="841248" y="1097280"/>
-            <a:ext cx="10509199" cy="2011680"/>
+            <a:ext cx="10509199" cy="566928"/>
           </a:xfrm>
           <a:prstGeom prst="rect">
             <a:avLst/>
@@ -3934,46 +5494,75 @@
               </a:spcAft>
             </a:pPr>
             <a:r>
-              <a:rPr sz="3400" b="1" i="0">
+              <a:rPr sz="2600" b="1" i="0">
                 <a:solidFill>
                   <a:srgbClr val="111827"/>
                 </a:solidFill>
                 <a:latin typeface="Segoe UI"/>
               </a:rPr>
-              <a:t>Every decision made today</a:t>
-            </a:r>
-          </a:p>
-          <a:p>
-            <a:pPr>
-              <a:lnSpc>
-                <a:spcPct val="110000"/>
-              </a:lnSpc>
-              <a:spcAft>
-                <a:spcPts val="0"/>
-              </a:spcAft>
-            </a:pPr>
-            <a:r>
-              <a:rPr sz="3400" b="1" i="0">
-                <a:solidFill>
-                  <a:srgbClr val="111827"/>
-                </a:solidFill>
-                <a:latin typeface="Segoe UI"/>
-              </a:rPr>
-              <a:t>is one that is never made again.</a:t>
-            </a:r>
-          </a:p>
-        </p:txBody>
-      </p:sp>
-      <p:sp>
-        <p:nvSpPr>
-          <p:cNvPr id="6" name="TextBox 5"/>
+              <a:t>Honestly, split in two.</a:t>
+            </a:r>
+          </a:p>
+        </p:txBody>
+      </p:sp>
+      <p:sp>
+        <p:nvSpPr>
+          <p:cNvPr id="6" name="Rounded Rectangle 5"/>
+          <p:cNvSpPr/>
+          <p:nvPr/>
+        </p:nvSpPr>
+        <p:spPr>
+          <a:xfrm>
+            <a:off x="841248" y="1810512"/>
+            <a:ext cx="5154015" cy="2240280"/>
+          </a:xfrm>
+          <a:prstGeom prst="roundRect">
+            <a:avLst>
+              <a:gd name="adj" fmla="val 6000"/>
+            </a:avLst>
+          </a:prstGeom>
+          <a:solidFill>
+            <a:srgbClr val="E7F5EA"/>
+          </a:solidFill>
+          <a:ln w="12700">
+            <a:solidFill>
+              <a:srgbClr val="A8D9B4"/>
+            </a:solidFill>
+          </a:ln>
+          <a:effectLst/>
+        </p:spPr>
+        <p:style>
+          <a:lnRef idx="1">
+            <a:schemeClr val="accent1"/>
+          </a:lnRef>
+          <a:fillRef idx="3">
+            <a:schemeClr val="accent1"/>
+          </a:fillRef>
+          <a:effectRef idx="2">
+            <a:schemeClr val="accent1"/>
+          </a:effectRef>
+          <a:fontRef idx="minor">
+            <a:schemeClr val="lt1"/>
+          </a:fontRef>
+        </p:style>
+        <p:txBody>
+          <a:bodyPr rtlCol="0" anchor="ctr"/>
+          <a:lstStyle/>
+          <a:p>
+            <a:pPr algn="ctr"/>
+          </a:p>
+        </p:txBody>
+      </p:sp>
+      <p:sp>
+        <p:nvSpPr>
+          <p:cNvPr id="7" name="TextBox 6"/>
           <p:cNvSpPr txBox="1"/>
           <p:nvPr/>
         </p:nvSpPr>
         <p:spPr>
           <a:xfrm>
-            <a:off x="841248" y="3255264"/>
-            <a:ext cx="6515703" cy="713232"/>
+            <a:off x="1042416" y="1956816"/>
+            <a:ext cx="4751679" cy="1965960"/>
           </a:xfrm>
           <a:prstGeom prst="rect">
             <a:avLst/>
@@ -3988,34 +5577,48 @@
           <a:p>
             <a:pPr>
               <a:lnSpc>
-                <a:spcPct val="140000"/>
-              </a:lnSpc>
-              <a:spcAft>
-                <a:spcPts val="0"/>
-              </a:spcAft>
-            </a:pPr>
-            <a:r>
-              <a:rPr sz="1600" b="0" i="0">
-                <a:solidFill>
-                  <a:srgbClr val="374151"/>
-                </a:solidFill>
-                <a:latin typeface="Segoe UI"/>
-              </a:rPr>
-              <a:t>Approve something new and it joins the catalog. The next person who asks for it gets it in seconds, and the approver never sees the request.</a:t>
-            </a:r>
-          </a:p>
-        </p:txBody>
-      </p:sp>
-      <p:sp>
-        <p:nvSpPr>
-          <p:cNvPr id="7" name="TextBox 6"/>
+                <a:spcPct val="134000"/>
+              </a:lnSpc>
+              <a:spcAft>
+                <a:spcPts val="300"/>
+              </a:spcAft>
+            </a:pPr>
+            <a:r>
+              <a:rPr sz="1200" b="1" i="0">
+                <a:solidFill>
+                  <a:srgbClr val="1E7A32"/>
+                </a:solidFill>
+                <a:latin typeface="Segoe UI"/>
+              </a:rPr>
+              <a:t>We can show this today</a:t>
+            </a:r>
+          </a:p>
+          <a:p>
+            <a:pPr>
+              <a:lnSpc>
+                <a:spcPct val="134000"/>
+              </a:lnSpc>
+              <a:spcAft>
+                <a:spcPts val="300"/>
+              </a:spcAft>
+            </a:pPr>
+            <a:r>
+              <a:rPr sz="525"/>
+              <a:t> </a:t>
+            </a:r>
+          </a:p>
+        </p:txBody>
+      </p:sp>
+      <p:sp>
+        <p:nvSpPr>
+          <p:cNvPr id="8" name="TextBox 7"/>
           <p:cNvSpPr txBox="1"/>
           <p:nvPr/>
         </p:nvSpPr>
         <p:spPr>
           <a:xfrm>
-            <a:off x="841248" y="5897880"/>
-            <a:ext cx="10509199" cy="640080"/>
+            <a:off x="1042416" y="2377440"/>
+            <a:ext cx="4751679" cy="1600200"/>
           </a:xfrm>
           <a:prstGeom prst="rect">
             <a:avLst/>
@@ -4030,20 +5633,485 @@
           <a:p>
             <a:pPr>
               <a:lnSpc>
-                <a:spcPct val="140000"/>
+                <a:spcPct val="150000"/>
+              </a:lnSpc>
+              <a:spcAft>
+                <a:spcPts val="200"/>
+              </a:spcAft>
+            </a:pPr>
+            <a:r>
+              <a:rPr sz="950" b="0" i="0">
+                <a:solidFill>
+                  <a:srgbClr val="656C7A"/>
+                </a:solidFill>
+                <a:latin typeface="Consolas"/>
+              </a:rPr>
+              <a:t>·   </a:t>
+            </a:r>
+            <a:r>
+              <a:rPr sz="1100" b="1" i="0">
+                <a:solidFill>
+                  <a:srgbClr val="111827"/>
+                </a:solidFill>
+                <a:latin typeface="Segoe UI"/>
+              </a:rPr>
+              <a:t>898 licence seats</a:t>
+            </a:r>
+            <a:r>
+              <a:rPr sz="1100" b="0" i="0">
+                <a:solidFill>
+                  <a:srgbClr val="374151"/>
+                </a:solidFill>
+                <a:latin typeface="Segoe UI"/>
+              </a:rPr>
+              <a:t> tracked — </a:t>
+            </a:r>
+            <a:r>
+              <a:rPr sz="1100" b="1" i="0">
+                <a:solidFill>
+                  <a:srgbClr val="111827"/>
+                </a:solidFill>
+                <a:latin typeface="Segoe UI"/>
+              </a:rPr>
+              <a:t>99 sitting unused</a:t>
+            </a:r>
+          </a:p>
+          <a:p>
+            <a:pPr>
+              <a:lnSpc>
+                <a:spcPct val="150000"/>
+              </a:lnSpc>
+              <a:spcAft>
+                <a:spcPts val="200"/>
+              </a:spcAft>
+            </a:pPr>
+            <a:r>
+              <a:rPr sz="950" b="0" i="0">
+                <a:solidFill>
+                  <a:srgbClr val="656C7A"/>
+                </a:solidFill>
+                <a:latin typeface="Consolas"/>
+              </a:rPr>
+              <a:t>·   </a:t>
+            </a:r>
+            <a:r>
+              <a:rPr sz="1100" b="1" i="0">
+                <a:solidFill>
+                  <a:srgbClr val="111827"/>
+                </a:solidFill>
+                <a:latin typeface="Segoe UI"/>
+              </a:rPr>
+              <a:t>LKR 2.16m a year</a:t>
+            </a:r>
+            <a:r>
+              <a:rPr sz="1100" b="0" i="0">
+                <a:solidFill>
+                  <a:srgbClr val="374151"/>
+                </a:solidFill>
+                <a:latin typeface="Segoe UI"/>
+              </a:rPr>
+              <a:t> in seats nobody has opened</a:t>
+            </a:r>
+          </a:p>
+          <a:p>
+            <a:pPr>
+              <a:lnSpc>
+                <a:spcPct val="150000"/>
+              </a:lnSpc>
+              <a:spcAft>
+                <a:spcPts val="200"/>
+              </a:spcAft>
+            </a:pPr>
+            <a:r>
+              <a:rPr sz="950" b="0" i="0">
+                <a:solidFill>
+                  <a:srgbClr val="656C7A"/>
+                </a:solidFill>
+                <a:latin typeface="Consolas"/>
+              </a:rPr>
+              <a:t>·   </a:t>
+            </a:r>
+            <a:r>
+              <a:rPr sz="1100" b="1" i="0">
+                <a:solidFill>
+                  <a:srgbClr val="111827"/>
+                </a:solidFill>
+                <a:latin typeface="Segoe UI"/>
+              </a:rPr>
+              <a:t>3 of 11</a:t>
+            </a:r>
+            <a:r>
+              <a:rPr sz="1100" b="0" i="0">
+                <a:solidFill>
+                  <a:srgbClr val="374151"/>
+                </a:solidFill>
+                <a:latin typeface="Segoe UI"/>
+              </a:rPr>
+              <a:t> requests settled before anyone read them</a:t>
+            </a:r>
+          </a:p>
+          <a:p>
+            <a:pPr>
+              <a:lnSpc>
+                <a:spcPct val="150000"/>
+              </a:lnSpc>
+              <a:spcAft>
+                <a:spcPts val="200"/>
+              </a:spcAft>
+            </a:pPr>
+            <a:r>
+              <a:rPr sz="950" b="0" i="0">
+                <a:solidFill>
+                  <a:srgbClr val="656C7A"/>
+                </a:solidFill>
+                <a:latin typeface="Consolas"/>
+              </a:rPr>
+              <a:t>·   </a:t>
+            </a:r>
+            <a:r>
+              <a:rPr sz="1100" b="0" i="0">
+                <a:solidFill>
+                  <a:srgbClr val="374151"/>
+                </a:solidFill>
+                <a:latin typeface="Segoe UI"/>
+              </a:rPr>
+              <a:t>Software under active attack caught </a:t>
+            </a:r>
+            <a:r>
+              <a:rPr sz="1100" b="1" i="0">
+                <a:solidFill>
+                  <a:srgbClr val="111827"/>
+                </a:solidFill>
+                <a:latin typeface="Segoe UI"/>
+              </a:rPr>
+              <a:t>before</a:t>
+            </a:r>
+            <a:r>
+              <a:rPr sz="1100" b="0" i="0">
+                <a:solidFill>
+                  <a:srgbClr val="374151"/>
+                </a:solidFill>
+                <a:latin typeface="Segoe UI"/>
+              </a:rPr>
+              <a:t> it is installed</a:t>
+            </a:r>
+          </a:p>
+          <a:p>
+            <a:pPr>
+              <a:lnSpc>
+                <a:spcPct val="150000"/>
+              </a:lnSpc>
+              <a:spcAft>
+                <a:spcPts val="200"/>
+              </a:spcAft>
+            </a:pPr>
+            <a:r>
+              <a:rPr sz="950" b="0" i="0">
+                <a:solidFill>
+                  <a:srgbClr val="656C7A"/>
+                </a:solidFill>
+                <a:latin typeface="Consolas"/>
+              </a:rPr>
+              <a:t>·   </a:t>
+            </a:r>
+            <a:r>
+              <a:rPr sz="1100" b="0" i="0">
+                <a:solidFill>
+                  <a:srgbClr val="374151"/>
+                </a:solidFill>
+                <a:latin typeface="Segoe UI"/>
+              </a:rPr>
+              <a:t>An audit file that assembles itself</a:t>
+            </a:r>
+          </a:p>
+          <a:p>
+            <a:pPr>
+              <a:lnSpc>
+                <a:spcPct val="150000"/>
+              </a:lnSpc>
+              <a:spcAft>
+                <a:spcPts val="200"/>
+              </a:spcAft>
+            </a:pPr>
+            <a:r>
+              <a:rPr sz="550"/>
+              <a:t> </a:t>
+            </a:r>
+          </a:p>
+        </p:txBody>
+      </p:sp>
+      <p:sp>
+        <p:nvSpPr>
+          <p:cNvPr id="9" name="Rounded Rectangle 8"/>
+          <p:cNvSpPr/>
+          <p:nvPr/>
+        </p:nvSpPr>
+        <p:spPr>
+          <a:xfrm>
+            <a:off x="6196431" y="1810512"/>
+            <a:ext cx="5154015" cy="2240280"/>
+          </a:xfrm>
+          <a:prstGeom prst="roundRect">
+            <a:avLst>
+              <a:gd name="adj" fmla="val 6000"/>
+            </a:avLst>
+          </a:prstGeom>
+          <a:solidFill>
+            <a:srgbClr val="FFFFFF"/>
+          </a:solidFill>
+          <a:ln w="12700">
+            <a:solidFill>
+              <a:srgbClr val="E2E5EB"/>
+            </a:solidFill>
+          </a:ln>
+          <a:effectLst/>
+        </p:spPr>
+        <p:style>
+          <a:lnRef idx="1">
+            <a:schemeClr val="accent1"/>
+          </a:lnRef>
+          <a:fillRef idx="3">
+            <a:schemeClr val="accent1"/>
+          </a:fillRef>
+          <a:effectRef idx="2">
+            <a:schemeClr val="accent1"/>
+          </a:effectRef>
+          <a:fontRef idx="minor">
+            <a:schemeClr val="lt1"/>
+          </a:fontRef>
+        </p:style>
+        <p:txBody>
+          <a:bodyPr rtlCol="0" anchor="ctr"/>
+          <a:lstStyle/>
+          <a:p>
+            <a:pPr algn="ctr"/>
+          </a:p>
+        </p:txBody>
+      </p:sp>
+      <p:sp>
+        <p:nvSpPr>
+          <p:cNvPr id="10" name="TextBox 9"/>
+          <p:cNvSpPr txBox="1"/>
+          <p:nvPr/>
+        </p:nvSpPr>
+        <p:spPr>
+          <a:xfrm>
+            <a:off x="6397599" y="1956816"/>
+            <a:ext cx="4751679" cy="1965960"/>
+          </a:xfrm>
+          <a:prstGeom prst="rect">
+            <a:avLst/>
+          </a:prstGeom>
+          <a:noFill/>
+        </p:spPr>
+        <p:txBody>
+          <a:bodyPr wrap="square">
+            <a:spAutoFit/>
+          </a:bodyPr>
+          <a:lstStyle/>
+          <a:p>
+            <a:pPr>
+              <a:lnSpc>
+                <a:spcPct val="134000"/>
+              </a:lnSpc>
+              <a:spcAft>
+                <a:spcPts val="300"/>
+              </a:spcAft>
+            </a:pPr>
+            <a:r>
+              <a:rPr sz="1200" b="1" i="0">
+                <a:solidFill>
+                  <a:srgbClr val="B54708"/>
+                </a:solidFill>
+                <a:latin typeface="Segoe UI"/>
+              </a:rPr>
+              <a:t>Still to be measured</a:t>
+            </a:r>
+          </a:p>
+          <a:p>
+            <a:pPr>
+              <a:lnSpc>
+                <a:spcPct val="134000"/>
+              </a:lnSpc>
+              <a:spcAft>
+                <a:spcPts val="300"/>
+              </a:spcAft>
+            </a:pPr>
+            <a:r>
+              <a:rPr sz="525"/>
+              <a:t> </a:t>
+            </a:r>
+          </a:p>
+        </p:txBody>
+      </p:sp>
+      <p:sp>
+        <p:nvSpPr>
+          <p:cNvPr id="11" name="TextBox 10"/>
+          <p:cNvSpPr txBox="1"/>
+          <p:nvPr/>
+        </p:nvSpPr>
+        <p:spPr>
+          <a:xfrm>
+            <a:off x="6397599" y="2377440"/>
+            <a:ext cx="4751679" cy="1600200"/>
+          </a:xfrm>
+          <a:prstGeom prst="rect">
+            <a:avLst/>
+          </a:prstGeom>
+          <a:noFill/>
+        </p:spPr>
+        <p:txBody>
+          <a:bodyPr wrap="square">
+            <a:spAutoFit/>
+          </a:bodyPr>
+          <a:lstStyle/>
+          <a:p>
+            <a:pPr>
+              <a:lnSpc>
+                <a:spcPct val="150000"/>
+              </a:lnSpc>
+              <a:spcAft>
+                <a:spcPts val="200"/>
+              </a:spcAft>
+            </a:pPr>
+            <a:r>
+              <a:rPr sz="950" b="0" i="0">
+                <a:solidFill>
+                  <a:srgbClr val="656C7A"/>
+                </a:solidFill>
+                <a:latin typeface="Consolas"/>
+              </a:rPr>
+              <a:t>1   </a:t>
+            </a:r>
+            <a:r>
+              <a:rPr sz="1100" b="0" i="0">
+                <a:solidFill>
+                  <a:srgbClr val="374151"/>
+                </a:solidFill>
+                <a:latin typeface="Segoe UI"/>
+              </a:rPr>
+              <a:t>How many software requests arrive in a week?</a:t>
+            </a:r>
+          </a:p>
+          <a:p>
+            <a:pPr>
+              <a:lnSpc>
+                <a:spcPct val="150000"/>
+              </a:lnSpc>
+              <a:spcAft>
+                <a:spcPts val="200"/>
+              </a:spcAft>
+            </a:pPr>
+            <a:r>
+              <a:rPr sz="950" b="0" i="0">
+                <a:solidFill>
+                  <a:srgbClr val="656C7A"/>
+                </a:solidFill>
+                <a:latin typeface="Consolas"/>
+              </a:rPr>
+              <a:t>2   </a:t>
+            </a:r>
+            <a:r>
+              <a:rPr sz="1100" b="0" i="0">
+                <a:solidFill>
+                  <a:srgbClr val="374151"/>
+                </a:solidFill>
+                <a:latin typeface="Segoe UI"/>
+              </a:rPr>
+              <a:t>What share of them come back incomplete?</a:t>
+            </a:r>
+          </a:p>
+          <a:p>
+            <a:pPr>
+              <a:lnSpc>
+                <a:spcPct val="150000"/>
+              </a:lnSpc>
+              <a:spcAft>
+                <a:spcPts val="200"/>
+              </a:spcAft>
+            </a:pPr>
+            <a:r>
+              <a:rPr sz="950" b="0" i="0">
+                <a:solidFill>
+                  <a:srgbClr val="656C7A"/>
+                </a:solidFill>
+                <a:latin typeface="Consolas"/>
+              </a:rPr>
+              <a:t>3   </a:t>
+            </a:r>
+            <a:r>
+              <a:rPr sz="1100" b="0" i="0">
+                <a:solidFill>
+                  <a:srgbClr val="374151"/>
+                </a:solidFill>
+                <a:latin typeface="Segoe UI"/>
+              </a:rPr>
+              <a:t>How long does that round trip actually take?</a:t>
+            </a:r>
+          </a:p>
+          <a:p>
+            <a:pPr>
+              <a:lnSpc>
+                <a:spcPct val="150000"/>
+              </a:lnSpc>
+              <a:spcAft>
+                <a:spcPts val="200"/>
+              </a:spcAft>
+            </a:pPr>
+            <a:r>
+              <a:rPr sz="550"/>
+              <a:t> </a:t>
+            </a:r>
+          </a:p>
+        </p:txBody>
+      </p:sp>
+      <p:sp>
+        <p:nvSpPr>
+          <p:cNvPr id="12" name="TextBox 11"/>
+          <p:cNvSpPr txBox="1"/>
+          <p:nvPr/>
+        </p:nvSpPr>
+        <p:spPr>
+          <a:xfrm>
+            <a:off x="841248" y="4288536"/>
+            <a:ext cx="9037911" cy="658368"/>
+          </a:xfrm>
+          <a:prstGeom prst="rect">
+            <a:avLst/>
+          </a:prstGeom>
+          <a:noFill/>
+        </p:spPr>
+        <p:txBody>
+          <a:bodyPr wrap="square">
+            <a:spAutoFit/>
+          </a:bodyPr>
+          <a:lstStyle/>
+          <a:p>
+            <a:pPr>
+              <a:lnSpc>
+                <a:spcPct val="138000"/>
               </a:lnSpc>
               <a:spcAft>
                 <a:spcPts val="0"/>
               </a:spcAft>
             </a:pPr>
             <a:r>
-              <a:rPr sz="850" b="0" i="0">
-                <a:solidFill>
-                  <a:srgbClr val="656C7A"/>
-                </a:solidFill>
-                <a:latin typeface="Segoe UI"/>
-              </a:rPr>
-              <a:t>A person still decides — GreenLight never approves anything. What it removes is the research, the chasing, and every request that should never have been asked twice.</a:t>
+              <a:rPr sz="1150" b="0" i="0">
+                <a:solidFill>
+                  <a:srgbClr val="4B5563"/>
+                </a:solidFill>
+                <a:latin typeface="Segoe UI"/>
+              </a:rPr>
+              <a:t>Ten minutes with Operations turns the time saved from an estimate into evidence. Until then I am calling it an estimate. </a:t>
+            </a:r>
+            <a:r>
+              <a:rPr sz="1150" b="1" i="0">
+                <a:solidFill>
+                  <a:srgbClr val="111827"/>
+                </a:solidFill>
+                <a:latin typeface="Segoe UI"/>
+              </a:rPr>
+              <a:t>It is running now, not a mockup — greenlight-umber.vercel.app.</a:t>
             </a:r>
           </a:p>
         </p:txBody>
@@ -4197,7 +6265,7 @@
                 </a:solidFill>
                 <a:latin typeface="Segoe UI"/>
               </a:rPr>
-              <a:t>W H A T  I T ' S  W O R T H</a:t>
+              <a:t>A P P L I C A B L E  D E P A R T M E N T S</a:t>
             </a:r>
           </a:p>
         </p:txBody>
@@ -4239,7 +6307,7 @@
                 </a:solidFill>
                 <a:latin typeface="Segoe UI"/>
               </a:rPr>
-              <a:t>Honestly, split in two.</a:t>
+              <a:t>Every department asks. One department decides.</a:t>
             </a:r>
           </a:p>
         </p:txBody>
@@ -4253,7 +6321,7 @@
         <p:spPr>
           <a:xfrm>
             <a:off x="841248" y="1810512"/>
-            <a:ext cx="5154015" cy="2286000"/>
+            <a:ext cx="3368954" cy="1737360"/>
           </a:xfrm>
           <a:prstGeom prst="roundRect">
             <a:avLst>
@@ -4261,11 +6329,11 @@
             </a:avLst>
           </a:prstGeom>
           <a:solidFill>
-            <a:srgbClr val="E7F5EA"/>
+            <a:srgbClr val="FFFFFF"/>
           </a:solidFill>
           <a:ln w="12700">
             <a:solidFill>
-              <a:srgbClr val="A8D9B4"/>
+              <a:srgbClr val="E2E5EB"/>
             </a:solidFill>
           </a:ln>
           <a:effectLst/>
@@ -4301,7 +6369,7 @@
         <p:spPr>
           <a:xfrm>
             <a:off x="1042416" y="1956816"/>
-            <a:ext cx="4751679" cy="2011680"/>
+            <a:ext cx="2966618" cy="1463040"/>
           </a:xfrm>
           <a:prstGeom prst="rect">
             <a:avLst/>
@@ -4325,11 +6393,11 @@
             <a:r>
               <a:rPr sz="1200" b="1" i="0">
                 <a:solidFill>
-                  <a:srgbClr val="1E7A32"/>
-                </a:solidFill>
-                <a:latin typeface="Segoe UI"/>
-              </a:rPr>
-              <a:t>Demonstrable today</a:t>
+                  <a:srgbClr val="111827"/>
+                </a:solidFill>
+                <a:latin typeface="Segoe UI"/>
+              </a:rPr>
+              <a:t>Everyone raises requests</a:t>
             </a:r>
           </a:p>
           <a:p>
@@ -4342,226 +6410,27 @@
               </a:spcAft>
             </a:pPr>
             <a:r>
-              <a:rPr sz="525"/>
-              <a:t> </a:t>
-            </a:r>
-          </a:p>
-        </p:txBody>
-      </p:sp>
-      <p:sp>
-        <p:nvSpPr>
-          <p:cNvPr id="8" name="TextBox 7"/>
-          <p:cNvSpPr txBox="1"/>
-          <p:nvPr/>
-        </p:nvSpPr>
-        <p:spPr>
-          <a:xfrm>
-            <a:off x="1042416" y="2377440"/>
-            <a:ext cx="4751679" cy="1645920"/>
-          </a:xfrm>
-          <a:prstGeom prst="rect">
-            <a:avLst/>
-          </a:prstGeom>
-          <a:noFill/>
-        </p:spPr>
-        <p:txBody>
-          <a:bodyPr wrap="square">
-            <a:spAutoFit/>
-          </a:bodyPr>
-          <a:lstStyle/>
-          <a:p>
-            <a:pPr>
-              <a:lnSpc>
-                <a:spcPct val="150000"/>
-              </a:lnSpc>
-              <a:spcAft>
-                <a:spcPts val="200"/>
-              </a:spcAft>
-            </a:pPr>
-            <a:r>
-              <a:rPr sz="950" b="0" i="0">
-                <a:solidFill>
-                  <a:srgbClr val="656C7A"/>
-                </a:solidFill>
-                <a:latin typeface="Consolas"/>
-              </a:rPr>
-              <a:t>·   </a:t>
-            </a:r>
-            <a:r>
-              <a:rPr sz="1100" b="0" i="0">
+              <a:rPr sz="1050" b="0" i="0">
                 <a:solidFill>
                   <a:srgbClr val="374151"/>
                 </a:solidFill>
                 <a:latin typeface="Segoe UI"/>
               </a:rPr>
-              <a:t>Exploited software caught </a:t>
-            </a:r>
-            <a:r>
-              <a:rPr sz="1100" b="1" i="0">
-                <a:solidFill>
-                  <a:srgbClr val="111827"/>
-                </a:solidFill>
-                <a:latin typeface="Segoe UI"/>
-              </a:rPr>
-              <a:t>before</a:t>
-            </a:r>
-            <a:r>
-              <a:rPr sz="1100" b="0" i="0">
-                <a:solidFill>
-                  <a:srgbClr val="374151"/>
-                </a:solidFill>
-                <a:latin typeface="Segoe UI"/>
-              </a:rPr>
-              <a:t> anyone installs it</a:t>
-            </a:r>
-          </a:p>
-          <a:p>
-            <a:pPr>
-              <a:lnSpc>
-                <a:spcPct val="150000"/>
-              </a:lnSpc>
-              <a:spcAft>
-                <a:spcPts val="200"/>
-              </a:spcAft>
-            </a:pPr>
-            <a:r>
-              <a:rPr sz="950" b="0" i="0">
-                <a:solidFill>
-                  <a:srgbClr val="656C7A"/>
-                </a:solidFill>
-                <a:latin typeface="Consolas"/>
-              </a:rPr>
-              <a:t>·   </a:t>
-            </a:r>
-            <a:r>
-              <a:rPr sz="1100" b="0" i="0">
-                <a:solidFill>
-                  <a:srgbClr val="374151"/>
-                </a:solidFill>
-                <a:latin typeface="Segoe UI"/>
-              </a:rPr>
-              <a:t>Approvals that revoke themselves when they expire</a:t>
-            </a:r>
-          </a:p>
-          <a:p>
-            <a:pPr>
-              <a:lnSpc>
-                <a:spcPct val="150000"/>
-              </a:lnSpc>
-              <a:spcAft>
-                <a:spcPts val="200"/>
-              </a:spcAft>
-            </a:pPr>
-            <a:r>
-              <a:rPr sz="950" b="0" i="0">
-                <a:solidFill>
-                  <a:srgbClr val="656C7A"/>
-                </a:solidFill>
-                <a:latin typeface="Consolas"/>
-              </a:rPr>
-              <a:t>·   </a:t>
-            </a:r>
-            <a:r>
-              <a:rPr sz="1100" b="0" i="0">
-                <a:solidFill>
-                  <a:srgbClr val="374151"/>
-                </a:solidFill>
-                <a:latin typeface="Segoe UI"/>
-              </a:rPr>
-              <a:t>Unapproved software found running on real machines</a:t>
-            </a:r>
-          </a:p>
-          <a:p>
-            <a:pPr>
-              <a:lnSpc>
-                <a:spcPct val="150000"/>
-              </a:lnSpc>
-              <a:spcAft>
-                <a:spcPts val="200"/>
-              </a:spcAft>
-            </a:pPr>
-            <a:r>
-              <a:rPr sz="950" b="0" i="0">
-                <a:solidFill>
-                  <a:srgbClr val="656C7A"/>
-                </a:solidFill>
-                <a:latin typeface="Consolas"/>
-              </a:rPr>
-              <a:t>·   </a:t>
-            </a:r>
-            <a:r>
-              <a:rPr sz="1100" b="0" i="0">
-                <a:solidFill>
-                  <a:srgbClr val="374151"/>
-                </a:solidFill>
-                <a:latin typeface="Segoe UI"/>
-              </a:rPr>
-              <a:t>An ISO audit trail that builds itself</a:t>
-            </a:r>
-          </a:p>
-          <a:p>
-            <a:pPr>
-              <a:lnSpc>
-                <a:spcPct val="150000"/>
-              </a:lnSpc>
-              <a:spcAft>
-                <a:spcPts val="200"/>
-              </a:spcAft>
-            </a:pPr>
-            <a:r>
-              <a:rPr sz="950" b="0" i="0">
-                <a:solidFill>
-                  <a:srgbClr val="656C7A"/>
-                </a:solidFill>
-                <a:latin typeface="Consolas"/>
-              </a:rPr>
-              <a:t>·   </a:t>
-            </a:r>
-            <a:r>
-              <a:rPr sz="1100" b="1" i="0">
-                <a:solidFill>
-                  <a:srgbClr val="111827"/>
-                </a:solidFill>
-                <a:latin typeface="Segoe UI"/>
-              </a:rPr>
-              <a:t>898 seats</a:t>
-            </a:r>
-            <a:r>
-              <a:rPr sz="1100" b="0" i="0">
-                <a:solidFill>
-                  <a:srgbClr val="374151"/>
-                </a:solidFill>
-                <a:latin typeface="Segoe UI"/>
-              </a:rPr>
-              <a:t> tracked; the unused ones are money</a:t>
-            </a:r>
-          </a:p>
-          <a:p>
-            <a:pPr>
-              <a:lnSpc>
-                <a:spcPct val="150000"/>
-              </a:lnSpc>
-              <a:spcAft>
-                <a:spcPts val="200"/>
-              </a:spcAft>
-            </a:pPr>
-            <a:r>
-              <a:rPr sz="550"/>
-              <a:t> </a:t>
-            </a:r>
-          </a:p>
-        </p:txBody>
-      </p:sp>
-      <p:sp>
-        <p:nvSpPr>
-          <p:cNvPr id="9" name="Rounded Rectangle 8"/>
+              <a:t>Delivery, QA, Marketing, Support, Infrastructure and Quality all ask for software. They get an answer in seconds, or a clear question back.</a:t>
+            </a:r>
+          </a:p>
+        </p:txBody>
+      </p:sp>
+      <p:sp>
+        <p:nvSpPr>
+          <p:cNvPr id="8" name="Rounded Rectangle 7"/>
           <p:cNvSpPr/>
           <p:nvPr/>
         </p:nvSpPr>
         <p:spPr>
           <a:xfrm>
-            <a:off x="6196431" y="1810512"/>
-            <a:ext cx="5154015" cy="2286000"/>
+            <a:off x="4411370" y="1810512"/>
+            <a:ext cx="3368954" cy="1737360"/>
           </a:xfrm>
           <a:prstGeom prst="roundRect">
             <a:avLst>
@@ -4569,11 +6438,11 @@
             </a:avLst>
           </a:prstGeom>
           <a:solidFill>
-            <a:srgbClr val="FFFFFF"/>
+            <a:srgbClr val="E7F5EA"/>
           </a:solidFill>
           <a:ln w="12700">
             <a:solidFill>
-              <a:srgbClr val="E2E5EB"/>
+              <a:srgbClr val="A8D9B4"/>
             </a:solidFill>
           </a:ln>
           <a:effectLst/>
@@ -4602,14 +6471,14 @@
       </p:sp>
       <p:sp>
         <p:nvSpPr>
-          <p:cNvPr id="10" name="TextBox 9"/>
+          <p:cNvPr id="9" name="TextBox 8"/>
           <p:cNvSpPr txBox="1"/>
           <p:nvPr/>
         </p:nvSpPr>
         <p:spPr>
           <a:xfrm>
-            <a:off x="6397599" y="1956816"/>
-            <a:ext cx="4751679" cy="2011680"/>
+            <a:off x="4612538" y="1956816"/>
+            <a:ext cx="2966618" cy="1463040"/>
           </a:xfrm>
           <a:prstGeom prst="rect">
             <a:avLst/>
@@ -4633,11 +6502,11 @@
             <a:r>
               <a:rPr sz="1200" b="1" i="0">
                 <a:solidFill>
-                  <a:srgbClr val="B54708"/>
-                </a:solidFill>
-                <a:latin typeface="Segoe UI"/>
-              </a:rPr>
-              <a:t>Still to be measured</a:t>
+                  <a:srgbClr val="111827"/>
+                </a:solidFill>
+                <a:latin typeface="Segoe UI"/>
+              </a:rPr>
+              <a:t>Operations decides</a:t>
             </a:r>
           </a:p>
           <a:p>
@@ -4650,9 +6519,62 @@
               </a:spcAft>
             </a:pPr>
             <a:r>
-              <a:rPr sz="525"/>
-              <a:t> </a:t>
-            </a:r>
+              <a:rPr sz="1050" b="0" i="0">
+                <a:solidFill>
+                  <a:srgbClr val="374151"/>
+                </a:solidFill>
+                <a:latin typeface="Segoe UI"/>
+              </a:rPr>
+              <a:t>The approver, and the only role that can. They stop being the research desk and go back to being the decision.</a:t>
+            </a:r>
+          </a:p>
+        </p:txBody>
+      </p:sp>
+      <p:sp>
+        <p:nvSpPr>
+          <p:cNvPr id="10" name="Rounded Rectangle 9"/>
+          <p:cNvSpPr/>
+          <p:nvPr/>
+        </p:nvSpPr>
+        <p:spPr>
+          <a:xfrm>
+            <a:off x="7981492" y="1810512"/>
+            <a:ext cx="3368954" cy="1737360"/>
+          </a:xfrm>
+          <a:prstGeom prst="roundRect">
+            <a:avLst>
+              <a:gd name="adj" fmla="val 6000"/>
+            </a:avLst>
+          </a:prstGeom>
+          <a:solidFill>
+            <a:srgbClr val="E3F4F7"/>
+          </a:solidFill>
+          <a:ln w="12700">
+            <a:solidFill>
+              <a:srgbClr val="9ED4DE"/>
+            </a:solidFill>
+          </a:ln>
+          <a:effectLst/>
+        </p:spPr>
+        <p:style>
+          <a:lnRef idx="1">
+            <a:schemeClr val="accent1"/>
+          </a:lnRef>
+          <a:fillRef idx="3">
+            <a:schemeClr val="accent1"/>
+          </a:fillRef>
+          <a:effectRef idx="2">
+            <a:schemeClr val="accent1"/>
+          </a:effectRef>
+          <a:fontRef idx="minor">
+            <a:schemeClr val="lt1"/>
+          </a:fontRef>
+        </p:style>
+        <p:txBody>
+          <a:bodyPr rtlCol="0" anchor="ctr"/>
+          <a:lstStyle/>
+          <a:p>
+            <a:pPr algn="ctr"/>
           </a:p>
         </p:txBody>
       </p:sp>
@@ -4664,8 +6586,8 @@
         </p:nvSpPr>
         <p:spPr>
           <a:xfrm>
-            <a:off x="6397599" y="2377440"/>
-            <a:ext cx="4751679" cy="1645920"/>
+            <a:off x="8182660" y="1956816"/>
+            <a:ext cx="2966618" cy="1463040"/>
           </a:xfrm>
           <a:prstGeom prst="rect">
             <a:avLst/>
@@ -4680,99 +6602,39 @@
           <a:p>
             <a:pPr>
               <a:lnSpc>
-                <a:spcPct val="150000"/>
-              </a:lnSpc>
-              <a:spcAft>
-                <a:spcPts val="200"/>
-              </a:spcAft>
-            </a:pPr>
-            <a:r>
-              <a:rPr sz="950" b="0" i="0">
-                <a:solidFill>
-                  <a:srgbClr val="656C7A"/>
-                </a:solidFill>
-                <a:latin typeface="Consolas"/>
-              </a:rPr>
-              <a:t>1   </a:t>
-            </a:r>
-            <a:r>
-              <a:rPr sz="1100" b="0" i="0">
+                <a:spcPct val="134000"/>
+              </a:lnSpc>
+              <a:spcAft>
+                <a:spcPts val="300"/>
+              </a:spcAft>
+            </a:pPr>
+            <a:r>
+              <a:rPr sz="1200" b="1" i="0">
+                <a:solidFill>
+                  <a:srgbClr val="111827"/>
+                </a:solidFill>
+                <a:latin typeface="Segoe UI"/>
+              </a:rPr>
+              <a:t>Finance, Legal and IT</a:t>
+            </a:r>
+          </a:p>
+          <a:p>
+            <a:pPr>
+              <a:lnSpc>
+                <a:spcPct val="134000"/>
+              </a:lnSpc>
+              <a:spcAft>
+                <a:spcPts val="300"/>
+              </a:spcAft>
+            </a:pPr>
+            <a:r>
+              <a:rPr sz="1050" b="0" i="0">
                 <a:solidFill>
                   <a:srgbClr val="374151"/>
                 </a:solidFill>
                 <a:latin typeface="Segoe UI"/>
               </a:rPr>
-              <a:t>How many software requests arrive in a week?</a:t>
-            </a:r>
-          </a:p>
-          <a:p>
-            <a:pPr>
-              <a:lnSpc>
-                <a:spcPct val="150000"/>
-              </a:lnSpc>
-              <a:spcAft>
-                <a:spcPts val="200"/>
-              </a:spcAft>
-            </a:pPr>
-            <a:r>
-              <a:rPr sz="950" b="0" i="0">
-                <a:solidFill>
-                  <a:srgbClr val="656C7A"/>
-                </a:solidFill>
-                <a:latin typeface="Consolas"/>
-              </a:rPr>
-              <a:t>2   </a:t>
-            </a:r>
-            <a:r>
-              <a:rPr sz="1100" b="0" i="0">
-                <a:solidFill>
-                  <a:srgbClr val="374151"/>
-                </a:solidFill>
-                <a:latin typeface="Segoe UI"/>
-              </a:rPr>
-              <a:t>What share come back incomplete?</a:t>
-            </a:r>
-          </a:p>
-          <a:p>
-            <a:pPr>
-              <a:lnSpc>
-                <a:spcPct val="150000"/>
-              </a:lnSpc>
-              <a:spcAft>
-                <a:spcPts val="200"/>
-              </a:spcAft>
-            </a:pPr>
-            <a:r>
-              <a:rPr sz="950" b="0" i="0">
-                <a:solidFill>
-                  <a:srgbClr val="656C7A"/>
-                </a:solidFill>
-                <a:latin typeface="Consolas"/>
-              </a:rPr>
-              <a:t>3   </a:t>
-            </a:r>
-            <a:r>
-              <a:rPr sz="1100" b="0" i="0">
-                <a:solidFill>
-                  <a:srgbClr val="374151"/>
-                </a:solidFill>
-                <a:latin typeface="Segoe UI"/>
-              </a:rPr>
-              <a:t>How long does that round trip really take?</a:t>
-            </a:r>
-          </a:p>
-          <a:p>
-            <a:pPr>
-              <a:lnSpc>
-                <a:spcPct val="150000"/>
-              </a:lnSpc>
-              <a:spcAft>
-                <a:spcPts val="200"/>
-              </a:spcAft>
-            </a:pPr>
-            <a:r>
-              <a:rPr sz="550"/>
-              <a:t> </a:t>
+              <a:t>Spend that needs a budget owner, privacy law that needs an assessment, and what is permitted to run on company machines.</a:t>
             </a:r>
           </a:p>
         </p:txBody>
@@ -4785,8 +6647,8 @@
         </p:nvSpPr>
         <p:spPr>
           <a:xfrm>
-            <a:off x="841248" y="4334256"/>
-            <a:ext cx="9037911" cy="658368"/>
+            <a:off x="841248" y="3785616"/>
+            <a:ext cx="9037911" cy="384048"/>
           </a:xfrm>
           <a:prstGeom prst="rect">
             <a:avLst/>
@@ -4808,13 +6670,31 @@
               </a:spcAft>
             </a:pPr>
             <a:r>
-              <a:rPr sz="1200" b="0" i="0">
-                <a:solidFill>
-                  <a:srgbClr val="4B5563"/>
-                </a:solidFill>
-                <a:latin typeface="Segoe UI"/>
-              </a:rPr>
-              <a:t>Ten minutes with Operations turns the time savings from an estimate into evidence. Until then I'm presenting them as estimates.</a:t>
+              <a:rPr sz="1300" b="0" i="0">
+                <a:solidFill>
+                  <a:srgbClr val="374151"/>
+                </a:solidFill>
+                <a:latin typeface="Segoe UI"/>
+              </a:rPr>
+              <a:t>That is why this is submitted as </a:t>
+            </a:r>
+            <a:r>
+              <a:rPr sz="1300" b="1" i="0">
+                <a:solidFill>
+                  <a:srgbClr val="111827"/>
+                </a:solidFill>
+                <a:latin typeface="Segoe UI"/>
+              </a:rPr>
+              <a:t>All</a:t>
+            </a:r>
+            <a:r>
+              <a:rPr sz="1300" b="0" i="0">
+                <a:solidFill>
+                  <a:srgbClr val="374151"/>
+                </a:solidFill>
+                <a:latin typeface="Segoe UI"/>
+              </a:rPr>
+              <a:t> — the queue belongs to Operations, but the request belongs to everyone.</a:t>
             </a:r>
           </a:p>
         </p:txBody>
@@ -4968,7 +6848,7 @@
                 </a:solidFill>
                 <a:latin typeface="Segoe UI"/>
               </a:rPr>
-              <a:t>I T ' S  N O T  A  M O C K U P</a:t>
+              <a:t>G R E E N L I G H T</a:t>
             </a:r>
           </a:p>
         </p:txBody>
@@ -4982,7 +6862,7 @@
         <p:spPr>
           <a:xfrm>
             <a:off x="841248" y="1097280"/>
-            <a:ext cx="10509199" cy="566928"/>
+            <a:ext cx="10509199" cy="1234440"/>
           </a:xfrm>
           <a:prstGeom prst="rect">
             <a:avLst/>
@@ -5004,62 +6884,56 @@
               </a:spcAft>
             </a:pPr>
             <a:r>
-              <a:rPr sz="2600" b="1" i="0">
+              <a:rPr sz="3400" b="1" i="0">
                 <a:solidFill>
                   <a:srgbClr val="111827"/>
                 </a:solidFill>
                 <a:latin typeface="Segoe UI"/>
               </a:rPr>
-              <a:t>Built to be used, not demonstrated.</a:t>
-            </a:r>
-          </a:p>
-        </p:txBody>
-      </p:sp>
-      <p:sp>
-        <p:nvSpPr>
-          <p:cNvPr id="6" name="Rounded Rectangle 5"/>
-          <p:cNvSpPr/>
+              <a:t>GreenLight never approves anything.</a:t>
+            </a:r>
+          </a:p>
+        </p:txBody>
+      </p:sp>
+      <p:sp>
+        <p:nvSpPr>
+          <p:cNvPr id="6" name="TextBox 5"/>
+          <p:cNvSpPr txBox="1"/>
           <p:nvPr/>
         </p:nvSpPr>
         <p:spPr>
           <a:xfrm>
-            <a:off x="841248" y="1810512"/>
-            <a:ext cx="3368954" cy="1783080"/>
-          </a:xfrm>
-          <a:prstGeom prst="roundRect">
-            <a:avLst>
-              <a:gd name="adj" fmla="val 6000"/>
-            </a:avLst>
-          </a:prstGeom>
-          <a:solidFill>
-            <a:srgbClr val="FFFFFF"/>
-          </a:solidFill>
-          <a:ln w="12700">
-            <a:solidFill>
-              <a:srgbClr val="E2E5EB"/>
-            </a:solidFill>
-          </a:ln>
-          <a:effectLst/>
-        </p:spPr>
-        <p:style>
-          <a:lnRef idx="1">
-            <a:schemeClr val="accent1"/>
-          </a:lnRef>
-          <a:fillRef idx="3">
-            <a:schemeClr val="accent1"/>
-          </a:fillRef>
-          <a:effectRef idx="2">
-            <a:schemeClr val="accent1"/>
-          </a:effectRef>
-          <a:fontRef idx="minor">
-            <a:schemeClr val="lt1"/>
-          </a:fontRef>
-        </p:style>
-        <p:txBody>
-          <a:bodyPr rtlCol="0" anchor="ctr"/>
-          <a:lstStyle/>
-          <a:p>
-            <a:pPr algn="ctr"/>
+            <a:off x="841248" y="2331720"/>
+            <a:ext cx="10509199" cy="1234440"/>
+          </a:xfrm>
+          <a:prstGeom prst="rect">
+            <a:avLst/>
+          </a:prstGeom>
+          <a:noFill/>
+        </p:spPr>
+        <p:txBody>
+          <a:bodyPr wrap="square">
+            <a:spAutoFit/>
+          </a:bodyPr>
+          <a:lstStyle/>
+          <a:p>
+            <a:pPr>
+              <a:lnSpc>
+                <a:spcPct val="110000"/>
+              </a:lnSpc>
+              <a:spcAft>
+                <a:spcPts val="0"/>
+              </a:spcAft>
+            </a:pPr>
+            <a:r>
+              <a:rPr sz="3400" b="1" i="0">
+                <a:solidFill>
+                  <a:srgbClr val="1E7A32"/>
+                </a:solidFill>
+                <a:latin typeface="Segoe UI"/>
+              </a:rPr>
+              <a:t>It makes sure a person can.</a:t>
+            </a:r>
           </a:p>
         </p:txBody>
       </p:sp>
@@ -5071,8 +6945,8 @@
         </p:nvSpPr>
         <p:spPr>
           <a:xfrm>
-            <a:off x="1042416" y="1956816"/>
-            <a:ext cx="2966618" cy="1508760"/>
+            <a:off x="841248" y="5897880"/>
+            <a:ext cx="10509199" cy="640080"/>
           </a:xfrm>
           <a:prstGeom prst="rect">
             <a:avLst/>
@@ -5087,755 +6961,20 @@
           <a:p>
             <a:pPr>
               <a:lnSpc>
-                <a:spcPct val="134000"/>
-              </a:lnSpc>
-              <a:spcAft>
-                <a:spcPts val="300"/>
-              </a:spcAft>
-            </a:pPr>
-            <a:r>
-              <a:rPr sz="2700" b="1" i="0">
-                <a:solidFill>
-                  <a:srgbClr val="111827"/>
-                </a:solidFill>
-                <a:latin typeface="Consolas"/>
-              </a:rPr>
-              <a:t>265</a:t>
-            </a:r>
-          </a:p>
-          <a:p>
-            <a:pPr>
-              <a:lnSpc>
-                <a:spcPct val="134000"/>
-              </a:lnSpc>
-              <a:spcAft>
-                <a:spcPts val="300"/>
-              </a:spcAft>
-            </a:pPr>
-            <a:r>
-              <a:rPr sz="1050" b="0" i="0">
-                <a:solidFill>
-                  <a:srgbClr val="374151"/>
-                </a:solidFill>
-                <a:latin typeface="Segoe UI"/>
-              </a:rPr>
-              <a:t>tests, weighted at the rules where a bug means a wrong approval. Three are regressions for defects that actually happened.</a:t>
-            </a:r>
-          </a:p>
-        </p:txBody>
-      </p:sp>
-      <p:sp>
-        <p:nvSpPr>
-          <p:cNvPr id="8" name="Rounded Rectangle 7"/>
-          <p:cNvSpPr/>
-          <p:nvPr/>
-        </p:nvSpPr>
-        <p:spPr>
-          <a:xfrm>
-            <a:off x="4411370" y="1810512"/>
-            <a:ext cx="3368954" cy="1783080"/>
-          </a:xfrm>
-          <a:prstGeom prst="roundRect">
-            <a:avLst>
-              <a:gd name="adj" fmla="val 6000"/>
-            </a:avLst>
-          </a:prstGeom>
-          <a:solidFill>
-            <a:srgbClr val="FFFFFF"/>
-          </a:solidFill>
-          <a:ln w="12700">
-            <a:solidFill>
-              <a:srgbClr val="E2E5EB"/>
-            </a:solidFill>
-          </a:ln>
-          <a:effectLst/>
-        </p:spPr>
-        <p:style>
-          <a:lnRef idx="1">
-            <a:schemeClr val="accent1"/>
-          </a:lnRef>
-          <a:fillRef idx="3">
-            <a:schemeClr val="accent1"/>
-          </a:fillRef>
-          <a:effectRef idx="2">
-            <a:schemeClr val="accent1"/>
-          </a:effectRef>
-          <a:fontRef idx="minor">
-            <a:schemeClr val="lt1"/>
-          </a:fontRef>
-        </p:style>
-        <p:txBody>
-          <a:bodyPr rtlCol="0" anchor="ctr"/>
-          <a:lstStyle/>
-          <a:p>
-            <a:pPr algn="ctr"/>
-          </a:p>
-        </p:txBody>
-      </p:sp>
-      <p:sp>
-        <p:nvSpPr>
-          <p:cNvPr id="9" name="TextBox 8"/>
-          <p:cNvSpPr txBox="1"/>
-          <p:nvPr/>
-        </p:nvSpPr>
-        <p:spPr>
-          <a:xfrm>
-            <a:off x="4612538" y="1956816"/>
-            <a:ext cx="2966618" cy="1508760"/>
-          </a:xfrm>
-          <a:prstGeom prst="rect">
-            <a:avLst/>
-          </a:prstGeom>
-          <a:noFill/>
-        </p:spPr>
-        <p:txBody>
-          <a:bodyPr wrap="square">
-            <a:spAutoFit/>
-          </a:bodyPr>
-          <a:lstStyle/>
-          <a:p>
-            <a:pPr>
-              <a:lnSpc>
-                <a:spcPct val="134000"/>
-              </a:lnSpc>
-              <a:spcAft>
-                <a:spcPts val="300"/>
-              </a:spcAft>
-            </a:pPr>
-            <a:r>
-              <a:rPr sz="2700" b="1" i="0">
-                <a:solidFill>
-                  <a:srgbClr val="111827"/>
-                </a:solidFill>
-                <a:latin typeface="Consolas"/>
-              </a:rPr>
-              <a:t>4</a:t>
-            </a:r>
-          </a:p>
-          <a:p>
-            <a:pPr>
-              <a:lnSpc>
-                <a:spcPct val="134000"/>
-              </a:lnSpc>
-              <a:spcAft>
-                <a:spcPts val="300"/>
-              </a:spcAft>
-            </a:pPr>
-            <a:r>
-              <a:rPr sz="1050" b="0" i="0">
-                <a:solidFill>
-                  <a:srgbClr val="374151"/>
-                </a:solidFill>
-                <a:latin typeface="Segoe UI"/>
-              </a:rPr>
-              <a:t>live security sources, queried in about a second. No API key, no mock data.</a:t>
-            </a:r>
-          </a:p>
-        </p:txBody>
-      </p:sp>
-      <p:sp>
-        <p:nvSpPr>
-          <p:cNvPr id="10" name="Rounded Rectangle 9"/>
-          <p:cNvSpPr/>
-          <p:nvPr/>
-        </p:nvSpPr>
-        <p:spPr>
-          <a:xfrm>
-            <a:off x="7981492" y="1810512"/>
-            <a:ext cx="3368954" cy="1783080"/>
-          </a:xfrm>
-          <a:prstGeom prst="roundRect">
-            <a:avLst>
-              <a:gd name="adj" fmla="val 6000"/>
-            </a:avLst>
-          </a:prstGeom>
-          <a:solidFill>
-            <a:srgbClr val="FFFFFF"/>
-          </a:solidFill>
-          <a:ln w="12700">
-            <a:solidFill>
-              <a:srgbClr val="E2E5EB"/>
-            </a:solidFill>
-          </a:ln>
-          <a:effectLst/>
-        </p:spPr>
-        <p:style>
-          <a:lnRef idx="1">
-            <a:schemeClr val="accent1"/>
-          </a:lnRef>
-          <a:fillRef idx="3">
-            <a:schemeClr val="accent1"/>
-          </a:fillRef>
-          <a:effectRef idx="2">
-            <a:schemeClr val="accent1"/>
-          </a:effectRef>
-          <a:fontRef idx="minor">
-            <a:schemeClr val="lt1"/>
-          </a:fontRef>
-        </p:style>
-        <p:txBody>
-          <a:bodyPr rtlCol="0" anchor="ctr"/>
-          <a:lstStyle/>
-          <a:p>
-            <a:pPr algn="ctr"/>
-          </a:p>
-        </p:txBody>
-      </p:sp>
-      <p:sp>
-        <p:nvSpPr>
-          <p:cNvPr id="11" name="TextBox 10"/>
-          <p:cNvSpPr txBox="1"/>
-          <p:nvPr/>
-        </p:nvSpPr>
-        <p:spPr>
-          <a:xfrm>
-            <a:off x="8182660" y="1956816"/>
-            <a:ext cx="2966618" cy="1508760"/>
-          </a:xfrm>
-          <a:prstGeom prst="rect">
-            <a:avLst/>
-          </a:prstGeom>
-          <a:noFill/>
-        </p:spPr>
-        <p:txBody>
-          <a:bodyPr wrap="square">
-            <a:spAutoFit/>
-          </a:bodyPr>
-          <a:lstStyle/>
-          <a:p>
-            <a:pPr>
-              <a:lnSpc>
-                <a:spcPct val="134000"/>
-              </a:lnSpc>
-              <a:spcAft>
-                <a:spcPts val="300"/>
-              </a:spcAft>
-            </a:pPr>
-            <a:r>
-              <a:rPr sz="2700" b="1" i="0">
-                <a:solidFill>
-                  <a:srgbClr val="111827"/>
-                </a:solidFill>
-                <a:latin typeface="Consolas"/>
-              </a:rPr>
-              <a:t>3</a:t>
-            </a:r>
-          </a:p>
-          <a:p>
-            <a:pPr>
-              <a:lnSpc>
-                <a:spcPct val="134000"/>
-              </a:lnSpc>
-              <a:spcAft>
-                <a:spcPts val="300"/>
-              </a:spcAft>
-            </a:pPr>
-            <a:r>
-              <a:rPr sz="1050" b="0" i="0">
-                <a:solidFill>
-                  <a:srgbClr val="374151"/>
-                </a:solidFill>
-                <a:latin typeface="Segoe UI"/>
-              </a:rPr>
-              <a:t>roles. A requester pressing Approve is refused and told why.</a:t>
-            </a:r>
-          </a:p>
-        </p:txBody>
-      </p:sp>
-      <p:sp>
-        <p:nvSpPr>
-          <p:cNvPr id="12" name="Rounded Rectangle 11"/>
-          <p:cNvSpPr/>
-          <p:nvPr/>
-        </p:nvSpPr>
-        <p:spPr>
-          <a:xfrm>
-            <a:off x="841248" y="3831336"/>
-            <a:ext cx="5154015" cy="1051560"/>
-          </a:xfrm>
-          <a:prstGeom prst="roundRect">
-            <a:avLst>
-              <a:gd name="adj" fmla="val 6000"/>
-            </a:avLst>
-          </a:prstGeom>
-          <a:solidFill>
-            <a:srgbClr val="E3F4F7"/>
-          </a:solidFill>
-          <a:ln w="12700">
-            <a:solidFill>
-              <a:srgbClr val="9ED4DE"/>
-            </a:solidFill>
-          </a:ln>
-          <a:effectLst/>
-        </p:spPr>
-        <p:style>
-          <a:lnRef idx="1">
-            <a:schemeClr val="accent1"/>
-          </a:lnRef>
-          <a:fillRef idx="3">
-            <a:schemeClr val="accent1"/>
-          </a:fillRef>
-          <a:effectRef idx="2">
-            <a:schemeClr val="accent1"/>
-          </a:effectRef>
-          <a:fontRef idx="minor">
-            <a:schemeClr val="lt1"/>
-          </a:fontRef>
-        </p:style>
-        <p:txBody>
-          <a:bodyPr rtlCol="0" anchor="ctr"/>
-          <a:lstStyle/>
-          <a:p>
-            <a:pPr algn="ctr"/>
-          </a:p>
-        </p:txBody>
-      </p:sp>
-      <p:sp>
-        <p:nvSpPr>
-          <p:cNvPr id="13" name="TextBox 12"/>
-          <p:cNvSpPr txBox="1"/>
-          <p:nvPr/>
-        </p:nvSpPr>
-        <p:spPr>
-          <a:xfrm>
-            <a:off x="1042416" y="3977640"/>
-            <a:ext cx="4751679" cy="777240"/>
-          </a:xfrm>
-          <a:prstGeom prst="rect">
-            <a:avLst/>
-          </a:prstGeom>
-          <a:noFill/>
-        </p:spPr>
-        <p:txBody>
-          <a:bodyPr wrap="square">
-            <a:spAutoFit/>
-          </a:bodyPr>
-          <a:lstStyle/>
-          <a:p>
-            <a:pPr>
-              <a:lnSpc>
-                <a:spcPct val="134000"/>
-              </a:lnSpc>
-              <a:spcAft>
-                <a:spcPts val="300"/>
-              </a:spcAft>
-            </a:pPr>
-            <a:r>
-              <a:rPr sz="1200" b="1" i="0">
-                <a:solidFill>
-                  <a:srgbClr val="111827"/>
-                </a:solidFill>
-                <a:latin typeface="Segoe UI"/>
-              </a:rPr>
-              <a:t>Deployed and running</a:t>
-            </a:r>
-          </a:p>
-          <a:p>
-            <a:pPr>
-              <a:lnSpc>
-                <a:spcPct val="134000"/>
-              </a:lnSpc>
-              <a:spcAft>
-                <a:spcPts val="300"/>
-              </a:spcAft>
-            </a:pPr>
-            <a:r>
-              <a:rPr sz="1050" b="0" i="0">
-                <a:solidFill>
-                  <a:srgbClr val="374151"/>
-                </a:solidFill>
-                <a:latin typeface="Segoe UI"/>
-              </a:rPr>
-              <a:t>Postgres, sign-in, CI on every push. Not a laptop demo.</a:t>
-            </a:r>
-          </a:p>
-        </p:txBody>
-      </p:sp>
-      <p:sp>
-        <p:nvSpPr>
-          <p:cNvPr id="14" name="Rounded Rectangle 13"/>
-          <p:cNvSpPr/>
-          <p:nvPr/>
-        </p:nvSpPr>
-        <p:spPr>
-          <a:xfrm>
-            <a:off x="6196431" y="3831336"/>
-            <a:ext cx="5154015" cy="1051560"/>
-          </a:xfrm>
-          <a:prstGeom prst="roundRect">
-            <a:avLst>
-              <a:gd name="adj" fmla="val 6000"/>
-            </a:avLst>
-          </a:prstGeom>
-          <a:solidFill>
-            <a:srgbClr val="E7F5EA"/>
-          </a:solidFill>
-          <a:ln w="12700">
-            <a:solidFill>
-              <a:srgbClr val="A8D9B4"/>
-            </a:solidFill>
-          </a:ln>
-          <a:effectLst/>
-        </p:spPr>
-        <p:style>
-          <a:lnRef idx="1">
-            <a:schemeClr val="accent1"/>
-          </a:lnRef>
-          <a:fillRef idx="3">
-            <a:schemeClr val="accent1"/>
-          </a:fillRef>
-          <a:effectRef idx="2">
-            <a:schemeClr val="accent1"/>
-          </a:effectRef>
-          <a:fontRef idx="minor">
-            <a:schemeClr val="lt1"/>
-          </a:fontRef>
-        </p:style>
-        <p:txBody>
-          <a:bodyPr rtlCol="0" anchor="ctr"/>
-          <a:lstStyle/>
-          <a:p>
-            <a:pPr algn="ctr"/>
-          </a:p>
-        </p:txBody>
-      </p:sp>
-      <p:sp>
-        <p:nvSpPr>
-          <p:cNvPr id="15" name="TextBox 14"/>
-          <p:cNvSpPr txBox="1"/>
-          <p:nvPr/>
-        </p:nvSpPr>
-        <p:spPr>
-          <a:xfrm>
-            <a:off x="6397599" y="3977640"/>
-            <a:ext cx="4751679" cy="777240"/>
-          </a:xfrm>
-          <a:prstGeom prst="rect">
-            <a:avLst/>
-          </a:prstGeom>
-          <a:noFill/>
-        </p:spPr>
-        <p:txBody>
-          <a:bodyPr wrap="square">
-            <a:spAutoFit/>
-          </a:bodyPr>
-          <a:lstStyle/>
-          <a:p>
-            <a:pPr>
-              <a:lnSpc>
-                <a:spcPct val="134000"/>
-              </a:lnSpc>
-              <a:spcAft>
-                <a:spcPts val="300"/>
-              </a:spcAft>
-            </a:pPr>
-            <a:r>
-              <a:rPr sz="1200" b="1" i="0">
-                <a:solidFill>
-                  <a:srgbClr val="111827"/>
-                </a:solidFill>
-                <a:latin typeface="Segoe UI"/>
-              </a:rPr>
-              <a:t>Built with Claude</a:t>
-            </a:r>
-          </a:p>
-          <a:p>
-            <a:pPr>
-              <a:lnSpc>
-                <a:spcPct val="134000"/>
-              </a:lnSpc>
-              <a:spcAft>
-                <a:spcPts val="300"/>
-              </a:spcAft>
-            </a:pPr>
-            <a:r>
-              <a:rPr sz="1050" b="0" i="0">
-                <a:solidFill>
-                  <a:srgbClr val="374151"/>
-                </a:solidFill>
-                <a:latin typeface="Segoe UI"/>
-              </a:rPr>
-              <a:t>Claude does the research the app can't. The Skill ships with it, so it runs on an ordinary subscription.</a:t>
-            </a:r>
-          </a:p>
-        </p:txBody>
-      </p:sp>
-    </p:spTree>
-  </p:cSld>
-  <p:clrMapOvr>
-    <a:masterClrMapping/>
-  </p:clrMapOvr>
-</p:sld>
-</file>
-
-<file path=ppt/slides/slide13.xml><?xml version="1.0" encoding="utf-8"?>
-<p:sld xmlns:a="http://schemas.openxmlformats.org/drawingml/2006/main" xmlns:p="http://schemas.openxmlformats.org/presentationml/2006/main" xmlns:r="http://schemas.openxmlformats.org/officeDocument/2006/relationships">
-  <p:cSld>
-    <p:bg>
-      <p:bgPr>
-        <a:solidFill>
-          <a:srgbClr val="F8F9FB"/>
-        </a:solidFill>
-        <a:effectLst/>
-      </p:bgPr>
-    </p:bg>
-    <p:spTree>
-      <p:nvGrpSpPr>
-        <p:cNvPr id="1" name=""/>
-        <p:cNvGrpSpPr/>
-        <p:nvPr/>
-      </p:nvGrpSpPr>
-      <p:grpSpPr/>
-      <p:sp>
-        <p:nvSpPr>
-          <p:cNvPr id="2" name="Rectangle 1"/>
-          <p:cNvSpPr/>
-          <p:nvPr/>
-        </p:nvSpPr>
-        <p:spPr>
-          <a:xfrm>
-            <a:off x="0" y="0"/>
-            <a:ext cx="12191695" cy="41148"/>
-          </a:xfrm>
-          <a:prstGeom prst="rect">
-            <a:avLst/>
-          </a:prstGeom>
-          <a:solidFill>
-            <a:srgbClr val="14377D"/>
-          </a:solidFill>
-          <a:ln>
-            <a:noFill/>
-          </a:ln>
-          <a:effectLst/>
-        </p:spPr>
-        <p:style>
-          <a:lnRef idx="1">
-            <a:schemeClr val="accent1"/>
-          </a:lnRef>
-          <a:fillRef idx="3">
-            <a:schemeClr val="accent1"/>
-          </a:fillRef>
-          <a:effectRef idx="2">
-            <a:schemeClr val="accent1"/>
-          </a:effectRef>
-          <a:fontRef idx="minor">
-            <a:schemeClr val="lt1"/>
-          </a:fontRef>
-        </p:style>
-        <p:txBody>
-          <a:bodyPr rtlCol="0" anchor="ctr"/>
-          <a:lstStyle/>
-          <a:p>
-            <a:pPr algn="ctr"/>
-          </a:p>
-        </p:txBody>
-      </p:sp>
-      <p:sp>
-        <p:nvSpPr>
-          <p:cNvPr id="3" name="TextBox 2"/>
-          <p:cNvSpPr txBox="1"/>
-          <p:nvPr/>
-        </p:nvSpPr>
-        <p:spPr>
-          <a:xfrm>
-            <a:off x="841248" y="182880"/>
-            <a:ext cx="2743200" cy="274320"/>
-          </a:xfrm>
-          <a:prstGeom prst="rect">
-            <a:avLst/>
-          </a:prstGeom>
-          <a:noFill/>
-        </p:spPr>
-        <p:txBody>
-          <a:bodyPr wrap="square">
-            <a:spAutoFit/>
-          </a:bodyPr>
-          <a:lstStyle/>
-          <a:p>
-            <a:pPr>
-              <a:lnSpc>
-                <a:spcPct val="132000"/>
+                <a:spcPct val="140000"/>
               </a:lnSpc>
               <a:spcAft>
                 <a:spcPts val="0"/>
               </a:spcAft>
             </a:pPr>
             <a:r>
-              <a:rPr sz="950" b="1" i="0">
-                <a:solidFill>
-                  <a:srgbClr val="4B5563"/>
-                </a:solidFill>
-                <a:latin typeface="Segoe UI"/>
-              </a:rPr>
-              <a:t>GreenLight</a:t>
-            </a:r>
-          </a:p>
-        </p:txBody>
-      </p:sp>
-      <p:sp>
-        <p:nvSpPr>
-          <p:cNvPr id="4" name="TextBox 3"/>
-          <p:cNvSpPr txBox="1"/>
-          <p:nvPr/>
-        </p:nvSpPr>
-        <p:spPr>
-          <a:xfrm>
-            <a:off x="841248" y="713232"/>
-            <a:ext cx="10509199" cy="274320"/>
-          </a:xfrm>
-          <a:prstGeom prst="rect">
-            <a:avLst/>
-          </a:prstGeom>
-          <a:noFill/>
-        </p:spPr>
-        <p:txBody>
-          <a:bodyPr wrap="square">
-            <a:spAutoFit/>
-          </a:bodyPr>
-          <a:lstStyle/>
-          <a:p>
-            <a:pPr>
-              <a:lnSpc>
-                <a:spcPct val="132000"/>
-              </a:lnSpc>
-              <a:spcAft>
-                <a:spcPts val="0"/>
-              </a:spcAft>
-            </a:pPr>
-            <a:r>
-              <a:rPr sz="950" b="1" i="0">
+              <a:rPr sz="850" b="0" i="0">
                 <a:solidFill>
                   <a:srgbClr val="656C7A"/>
                 </a:solidFill>
                 <a:latin typeface="Segoe UI"/>
               </a:rPr>
-              <a:t>G R E E N L I G H T</a:t>
-            </a:r>
-          </a:p>
-        </p:txBody>
-      </p:sp>
-      <p:sp>
-        <p:nvSpPr>
-          <p:cNvPr id="5" name="TextBox 4"/>
-          <p:cNvSpPr txBox="1"/>
-          <p:nvPr/>
-        </p:nvSpPr>
-        <p:spPr>
-          <a:xfrm>
-            <a:off x="841248" y="1097280"/>
-            <a:ext cx="10509199" cy="1234440"/>
-          </a:xfrm>
-          <a:prstGeom prst="rect">
-            <a:avLst/>
-          </a:prstGeom>
-          <a:noFill/>
-        </p:spPr>
-        <p:txBody>
-          <a:bodyPr wrap="square">
-            <a:spAutoFit/>
-          </a:bodyPr>
-          <a:lstStyle/>
-          <a:p>
-            <a:pPr>
-              <a:lnSpc>
-                <a:spcPct val="110000"/>
-              </a:lnSpc>
-              <a:spcAft>
-                <a:spcPts val="0"/>
-              </a:spcAft>
-            </a:pPr>
-            <a:r>
-              <a:rPr sz="3400" b="1" i="0">
-                <a:solidFill>
-                  <a:srgbClr val="111827"/>
-                </a:solidFill>
-                <a:latin typeface="Segoe UI"/>
-              </a:rPr>
-              <a:t>GreenLight never approves anything.</a:t>
-            </a:r>
-          </a:p>
-        </p:txBody>
-      </p:sp>
-      <p:sp>
-        <p:nvSpPr>
-          <p:cNvPr id="6" name="TextBox 5"/>
-          <p:cNvSpPr txBox="1"/>
-          <p:nvPr/>
-        </p:nvSpPr>
-        <p:spPr>
-          <a:xfrm>
-            <a:off x="841248" y="2331720"/>
-            <a:ext cx="10509199" cy="1234440"/>
-          </a:xfrm>
-          <a:prstGeom prst="rect">
-            <a:avLst/>
-          </a:prstGeom>
-          <a:noFill/>
-        </p:spPr>
-        <p:txBody>
-          <a:bodyPr wrap="square">
-            <a:spAutoFit/>
-          </a:bodyPr>
-          <a:lstStyle/>
-          <a:p>
-            <a:pPr>
-              <a:lnSpc>
-                <a:spcPct val="110000"/>
-              </a:lnSpc>
-              <a:spcAft>
-                <a:spcPts val="0"/>
-              </a:spcAft>
-            </a:pPr>
-            <a:r>
-              <a:rPr sz="3400" b="1" i="0">
-                <a:solidFill>
-                  <a:srgbClr val="1E7A32"/>
-                </a:solidFill>
-                <a:latin typeface="Segoe UI"/>
-              </a:rPr>
-              <a:t>It makes sure a person can.</a:t>
-            </a:r>
-          </a:p>
-        </p:txBody>
-      </p:sp>
-      <p:sp>
-        <p:nvSpPr>
-          <p:cNvPr id="7" name="TextBox 6"/>
-          <p:cNvSpPr txBox="1"/>
-          <p:nvPr/>
-        </p:nvSpPr>
-        <p:spPr>
-          <a:xfrm>
-            <a:off x="841248" y="5897880"/>
-            <a:ext cx="10509199" cy="640080"/>
-          </a:xfrm>
-          <a:prstGeom prst="rect">
-            <a:avLst/>
-          </a:prstGeom>
-          <a:noFill/>
-        </p:spPr>
-        <p:txBody>
-          <a:bodyPr wrap="square">
-            <a:spAutoFit/>
-          </a:bodyPr>
-          <a:lstStyle/>
-          <a:p>
-            <a:pPr>
-              <a:lnSpc>
-                <a:spcPct val="140000"/>
-              </a:lnSpc>
-              <a:spcAft>
-                <a:spcPts val="0"/>
-              </a:spcAft>
-            </a:pPr>
-            <a:r>
-              <a:rPr sz="850" b="0" i="0">
-                <a:solidFill>
-                  <a:srgbClr val="656C7A"/>
-                </a:solidFill>
-                <a:latin typeface="Segoe UI"/>
-              </a:rPr>
-              <a:t>BISTEC Global  ·  Approval console</a:t>
+              <a:t>BISTEC Global  ·  greenlight-umber.vercel.app</a:t>
             </a:r>
           </a:p>
         </p:txBody>
@@ -5989,7 +7128,7 @@
                 </a:solidFill>
                 <a:latin typeface="Segoe UI"/>
               </a:rPr>
-              <a:t>T O D A Y</a:t>
+              <a:t>W H Y  I  B U I L T  I T</a:t>
             </a:r>
           </a:p>
         </p:txBody>
@@ -6003,7 +7142,7 @@
         <p:spPr>
           <a:xfrm>
             <a:off x="841248" y="1097280"/>
-            <a:ext cx="10509199" cy="566928"/>
+            <a:ext cx="10509199" cy="2011680"/>
           </a:xfrm>
           <a:prstGeom prst="rect">
             <a:avLst/>
@@ -6025,62 +7164,93 @@
               </a:spcAft>
             </a:pPr>
             <a:r>
-              <a:rPr sz="2600" b="1" i="0">
+              <a:rPr sz="3400" b="1" i="0">
                 <a:solidFill>
                   <a:srgbClr val="111827"/>
                 </a:solidFill>
                 <a:latin typeface="Segoe UI"/>
               </a:rPr>
-              <a:t>Every software request in the company lands on one desk.</a:t>
-            </a:r>
-          </a:p>
-        </p:txBody>
-      </p:sp>
-      <p:sp>
-        <p:nvSpPr>
-          <p:cNvPr id="6" name="Rounded Rectangle 5"/>
-          <p:cNvSpPr/>
+              <a:t>Last month the support team asked to</a:t>
+            </a:r>
+          </a:p>
+          <a:p>
+            <a:pPr>
+              <a:lnSpc>
+                <a:spcPct val="110000"/>
+              </a:lnSpc>
+              <a:spcAft>
+                <a:spcPts val="0"/>
+              </a:spcAft>
+            </a:pPr>
+            <a:r>
+              <a:rPr sz="3400" b="1" i="0">
+                <a:solidFill>
+                  <a:srgbClr val="111827"/>
+                </a:solidFill>
+                <a:latin typeface="Segoe UI"/>
+              </a:rPr>
+              <a:t>install a remote-access tool.</a:t>
+            </a:r>
+          </a:p>
+        </p:txBody>
+      </p:sp>
+      <p:sp>
+        <p:nvSpPr>
+          <p:cNvPr id="6" name="TextBox 5"/>
+          <p:cNvSpPr txBox="1"/>
           <p:nvPr/>
         </p:nvSpPr>
         <p:spPr>
           <a:xfrm>
-            <a:off x="841248" y="1810512"/>
-            <a:ext cx="3368954" cy="1371600"/>
-          </a:xfrm>
-          <a:prstGeom prst="roundRect">
-            <a:avLst>
-              <a:gd name="adj" fmla="val 6000"/>
-            </a:avLst>
-          </a:prstGeom>
-          <a:solidFill>
-            <a:srgbClr val="FFFFFF"/>
-          </a:solidFill>
-          <a:ln w="12700">
-            <a:solidFill>
-              <a:srgbClr val="E2E5EB"/>
-            </a:solidFill>
-          </a:ln>
-          <a:effectLst/>
-        </p:spPr>
-        <p:style>
-          <a:lnRef idx="1">
-            <a:schemeClr val="accent1"/>
-          </a:lnRef>
-          <a:fillRef idx="3">
-            <a:schemeClr val="accent1"/>
-          </a:fillRef>
-          <a:effectRef idx="2">
-            <a:schemeClr val="accent1"/>
-          </a:effectRef>
-          <a:fontRef idx="minor">
-            <a:schemeClr val="lt1"/>
-          </a:fontRef>
-        </p:style>
-        <p:txBody>
-          <a:bodyPr rtlCol="0" anchor="ctr"/>
-          <a:lstStyle/>
-          <a:p>
-            <a:pPr algn="ctr"/>
+            <a:off x="841248" y="3255264"/>
+            <a:ext cx="7566623" cy="713232"/>
+          </a:xfrm>
+          <a:prstGeom prst="rect">
+            <a:avLst/>
+          </a:prstGeom>
+          <a:noFill/>
+        </p:spPr>
+        <p:txBody>
+          <a:bodyPr wrap="square">
+            <a:spAutoFit/>
+          </a:bodyPr>
+          <a:lstStyle/>
+          <a:p>
+            <a:pPr>
+              <a:lnSpc>
+                <a:spcPct val="140000"/>
+              </a:lnSpc>
+              <a:spcAft>
+                <a:spcPts val="0"/>
+              </a:spcAft>
+            </a:pPr>
+            <a:r>
+              <a:rPr sz="1600" b="0" i="0">
+                <a:solidFill>
+                  <a:srgbClr val="374151"/>
+                </a:solidFill>
+                <a:latin typeface="Segoe UI"/>
+              </a:rPr>
+              <a:t>When GreenLight checked, it was already on the public list of software </a:t>
+            </a:r>
+            <a:r>
+              <a:rPr sz="1600" b="1" i="0">
+                <a:solidFill>
+                  <a:srgbClr val="B42318"/>
+                </a:solidFill>
+                <a:latin typeface="Segoe UI"/>
+              </a:rPr>
+              <a:t>being actively broken into right now</a:t>
+            </a:r>
+            <a:r>
+              <a:rPr sz="1600" b="0" i="0">
+                <a:solidFill>
+                  <a:srgbClr val="374151"/>
+                </a:solidFill>
+                <a:latin typeface="Segoe UI"/>
+              </a:rPr>
+              <a:t>.</a:t>
+            </a:r>
           </a:p>
         </p:txBody>
       </p:sp>
@@ -6092,8 +7262,8 @@
         </p:nvSpPr>
         <p:spPr>
           <a:xfrm>
-            <a:off x="1042416" y="1956816"/>
-            <a:ext cx="2966618" cy="1097280"/>
+            <a:off x="841248" y="4096512"/>
+            <a:ext cx="8197175" cy="658368"/>
           </a:xfrm>
           <a:prstGeom prst="rect">
             <a:avLst/>
@@ -6108,101 +7278,52 @@
           <a:p>
             <a:pPr>
               <a:lnSpc>
-                <a:spcPct val="134000"/>
-              </a:lnSpc>
-              <a:spcAft>
-                <a:spcPts val="300"/>
-              </a:spcAft>
-            </a:pPr>
-            <a:r>
-              <a:rPr sz="1200" b="1" i="0">
+                <a:spcPct val="138000"/>
+              </a:lnSpc>
+              <a:spcAft>
+                <a:spcPts val="0"/>
+              </a:spcAft>
+            </a:pPr>
+            <a:r>
+              <a:rPr sz="1300" b="1" i="0">
                 <a:solidFill>
                   <a:srgbClr val="111827"/>
                 </a:solidFill>
                 <a:latin typeface="Segoe UI"/>
               </a:rPr>
-              <a:t>It waits</a:t>
-            </a:r>
-          </a:p>
-          <a:p>
-            <a:pPr>
-              <a:lnSpc>
-                <a:spcPct val="134000"/>
-              </a:lnSpc>
-              <a:spcAft>
-                <a:spcPts val="300"/>
-              </a:spcAft>
-            </a:pPr>
-            <a:r>
-              <a:rPr sz="1050" b="0" i="0">
+              <a:t>And nobody did anything wrong.</a:t>
+            </a:r>
+            <a:r>
+              <a:rPr sz="1300" b="0" i="0">
                 <a:solidFill>
                   <a:srgbClr val="374151"/>
                 </a:solidFill>
                 <a:latin typeface="Segoe UI"/>
               </a:rPr>
-              <a:t>Every operational request needs IT sign-off. They queue.</a:t>
-            </a:r>
-          </a:p>
-        </p:txBody>
-      </p:sp>
-      <p:sp>
-        <p:nvSpPr>
-          <p:cNvPr id="8" name="Rounded Rectangle 7"/>
-          <p:cNvSpPr/>
-          <p:nvPr/>
-        </p:nvSpPr>
-        <p:spPr>
-          <a:xfrm>
-            <a:off x="4411370" y="1810512"/>
-            <a:ext cx="3368954" cy="1371600"/>
-          </a:xfrm>
-          <a:prstGeom prst="roundRect">
-            <a:avLst>
-              <a:gd name="adj" fmla="val 6000"/>
-            </a:avLst>
-          </a:prstGeom>
-          <a:solidFill>
-            <a:srgbClr val="FDF2E7"/>
-          </a:solidFill>
-          <a:ln w="12700">
-            <a:solidFill>
-              <a:srgbClr val="F0C39A"/>
-            </a:solidFill>
-          </a:ln>
-          <a:effectLst/>
-        </p:spPr>
-        <p:style>
-          <a:lnRef idx="1">
-            <a:schemeClr val="accent1"/>
-          </a:lnRef>
-          <a:fillRef idx="3">
-            <a:schemeClr val="accent1"/>
-          </a:fillRef>
-          <a:effectRef idx="2">
-            <a:schemeClr val="accent1"/>
-          </a:effectRef>
-          <a:fontRef idx="minor">
-            <a:schemeClr val="lt1"/>
-          </a:fontRef>
-        </p:style>
-        <p:txBody>
-          <a:bodyPr rtlCol="0" anchor="ctr"/>
-          <a:lstStyle/>
-          <a:p>
-            <a:pPr algn="ctr"/>
-          </a:p>
-        </p:txBody>
-      </p:sp>
-      <p:sp>
-        <p:nvSpPr>
-          <p:cNvPr id="9" name="TextBox 8"/>
+              <a:t> The requester had no reason to check. The approver had no way to find out. </a:t>
+            </a:r>
+            <a:r>
+              <a:rPr sz="1300" b="0" i="0">
+                <a:solidFill>
+                  <a:srgbClr val="374151"/>
+                </a:solidFill>
+                <a:latin typeface="Segoe UI"/>
+              </a:rPr>
+              <a:t>The gap was not in the people — it was that answering the question properly takes hours nobody has.</a:t>
+            </a:r>
+          </a:p>
+        </p:txBody>
+      </p:sp>
+      <p:sp>
+        <p:nvSpPr>
+          <p:cNvPr id="8" name="TextBox 7"/>
           <p:cNvSpPr txBox="1"/>
           <p:nvPr/>
         </p:nvSpPr>
         <p:spPr>
           <a:xfrm>
-            <a:off x="4612538" y="1956816"/>
-            <a:ext cx="2966618" cy="1097280"/>
+            <a:off x="841248" y="5897880"/>
+            <a:ext cx="10509199" cy="640080"/>
           </a:xfrm>
           <a:prstGeom prst="rect">
             <a:avLst/>
@@ -6217,241 +7338,20 @@
           <a:p>
             <a:pPr>
               <a:lnSpc>
-                <a:spcPct val="134000"/>
-              </a:lnSpc>
-              <a:spcAft>
-                <a:spcPts val="300"/>
-              </a:spcAft>
-            </a:pPr>
-            <a:r>
-              <a:rPr sz="1200" b="1" i="0">
-                <a:solidFill>
-                  <a:srgbClr val="111827"/>
-                </a:solidFill>
-                <a:latin typeface="Segoe UI"/>
-              </a:rPr>
-              <a:t>It's unusable when opened</a:t>
-            </a:r>
-          </a:p>
-          <a:p>
-            <a:pPr>
-              <a:lnSpc>
-                <a:spcPct val="134000"/>
-              </a:lnSpc>
-              <a:spcAft>
-                <a:spcPts val="300"/>
-              </a:spcAft>
-            </a:pPr>
-            <a:r>
-              <a:rPr sz="1050" b="0" i="0">
-                <a:solidFill>
-                  <a:srgbClr val="374151"/>
-                </a:solidFill>
-                <a:latin typeface="Segoe UI"/>
-              </a:rPr>
-              <a:t>No justification, no security answer, no cost, no legal position.</a:t>
-            </a:r>
-          </a:p>
-        </p:txBody>
-      </p:sp>
-      <p:sp>
-        <p:nvSpPr>
-          <p:cNvPr id="10" name="Rounded Rectangle 9"/>
-          <p:cNvSpPr/>
-          <p:nvPr/>
-        </p:nvSpPr>
-        <p:spPr>
-          <a:xfrm>
-            <a:off x="7981492" y="1810512"/>
-            <a:ext cx="3368954" cy="1371600"/>
-          </a:xfrm>
-          <a:prstGeom prst="roundRect">
-            <a:avLst>
-              <a:gd name="adj" fmla="val 6000"/>
-            </a:avLst>
-          </a:prstGeom>
-          <a:solidFill>
-            <a:srgbClr val="FDECEB"/>
-          </a:solidFill>
-          <a:ln w="12700">
-            <a:solidFill>
-              <a:srgbClr val="F2B8B4"/>
-            </a:solidFill>
-          </a:ln>
-          <a:effectLst/>
-        </p:spPr>
-        <p:style>
-          <a:lnRef idx="1">
-            <a:schemeClr val="accent1"/>
-          </a:lnRef>
-          <a:fillRef idx="3">
-            <a:schemeClr val="accent1"/>
-          </a:fillRef>
-          <a:effectRef idx="2">
-            <a:schemeClr val="accent1"/>
-          </a:effectRef>
-          <a:fontRef idx="minor">
-            <a:schemeClr val="lt1"/>
-          </a:fontRef>
-        </p:style>
-        <p:txBody>
-          <a:bodyPr rtlCol="0" anchor="ctr"/>
-          <a:lstStyle/>
-          <a:p>
-            <a:pPr algn="ctr"/>
-          </a:p>
-        </p:txBody>
-      </p:sp>
-      <p:sp>
-        <p:nvSpPr>
-          <p:cNvPr id="11" name="TextBox 10"/>
-          <p:cNvSpPr txBox="1"/>
-          <p:nvPr/>
-        </p:nvSpPr>
-        <p:spPr>
-          <a:xfrm>
-            <a:off x="8182660" y="1956816"/>
-            <a:ext cx="2966618" cy="1097280"/>
-          </a:xfrm>
-          <a:prstGeom prst="rect">
-            <a:avLst/>
-          </a:prstGeom>
-          <a:noFill/>
-        </p:spPr>
-        <p:txBody>
-          <a:bodyPr wrap="square">
-            <a:spAutoFit/>
-          </a:bodyPr>
-          <a:lstStyle/>
-          <a:p>
-            <a:pPr>
-              <a:lnSpc>
-                <a:spcPct val="134000"/>
-              </a:lnSpc>
-              <a:spcAft>
-                <a:spcPts val="300"/>
-              </a:spcAft>
-            </a:pPr>
-            <a:r>
-              <a:rPr sz="1200" b="1" i="0">
-                <a:solidFill>
-                  <a:srgbClr val="111827"/>
-                </a:solidFill>
-                <a:latin typeface="Segoe UI"/>
-              </a:rPr>
-              <a:t>The approver becomes the researcher</a:t>
-            </a:r>
-          </a:p>
-          <a:p>
-            <a:pPr>
-              <a:lnSpc>
-                <a:spcPct val="134000"/>
-              </a:lnSpc>
-              <a:spcAft>
-                <a:spcPts val="300"/>
-              </a:spcAft>
-            </a:pPr>
-            <a:r>
-              <a:rPr sz="1050" b="0" i="0">
-                <a:solidFill>
-                  <a:srgbClr val="374151"/>
-                </a:solidFill>
-                <a:latin typeface="Segoe UI"/>
-              </a:rPr>
-              <a:t>Two to three hours of vendor research, per tool, by hand.</a:t>
-            </a:r>
-          </a:p>
-        </p:txBody>
-      </p:sp>
-      <p:sp>
-        <p:nvSpPr>
-          <p:cNvPr id="12" name="TextBox 11"/>
-          <p:cNvSpPr txBox="1"/>
-          <p:nvPr/>
-        </p:nvSpPr>
-        <p:spPr>
-          <a:xfrm>
-            <a:off x="841248" y="3419856"/>
-            <a:ext cx="9037911" cy="658368"/>
-          </a:xfrm>
-          <a:prstGeom prst="rect">
-            <a:avLst/>
-          </a:prstGeom>
-          <a:noFill/>
-        </p:spPr>
-        <p:txBody>
-          <a:bodyPr wrap="square">
-            <a:spAutoFit/>
-          </a:bodyPr>
-          <a:lstStyle/>
-          <a:p>
-            <a:pPr>
-              <a:lnSpc>
-                <a:spcPct val="138000"/>
+                <a:spcPct val="140000"/>
               </a:lnSpc>
               <a:spcAft>
                 <a:spcPts val="0"/>
               </a:spcAft>
             </a:pPr>
             <a:r>
-              <a:rPr sz="1300" b="1" i="0">
-                <a:solidFill>
-                  <a:srgbClr val="111827"/>
-                </a:solidFill>
-                <a:latin typeface="Segoe UI"/>
-              </a:rPr>
-              <a:t>Nobody did anything wrong.</a:t>
-            </a:r>
-            <a:r>
-              <a:rPr sz="1300" b="0" i="0">
-                <a:solidFill>
-                  <a:srgbClr val="374151"/>
-                </a:solidFill>
-                <a:latin typeface="Segoe UI"/>
-              </a:rPr>
-              <a:t> The requester didn't know what to include. The approver wasn't slow — they were buried.</a:t>
-            </a:r>
-          </a:p>
-        </p:txBody>
-      </p:sp>
-      <p:sp>
-        <p:nvSpPr>
-          <p:cNvPr id="13" name="TextBox 12"/>
-          <p:cNvSpPr txBox="1"/>
-          <p:nvPr/>
-        </p:nvSpPr>
-        <p:spPr>
-          <a:xfrm>
-            <a:off x="841248" y="5897880"/>
-            <a:ext cx="10509199" cy="640080"/>
-          </a:xfrm>
-          <a:prstGeom prst="rect">
-            <a:avLst/>
-          </a:prstGeom>
-          <a:noFill/>
-        </p:spPr>
-        <p:txBody>
-          <a:bodyPr wrap="square">
-            <a:spAutoFit/>
-          </a:bodyPr>
-          <a:lstStyle/>
-          <a:p>
-            <a:pPr>
-              <a:lnSpc>
-                <a:spcPct val="140000"/>
-              </a:lnSpc>
-              <a:spcAft>
-                <a:spcPts val="0"/>
-              </a:spcAft>
-            </a:pPr>
-            <a:r>
               <a:rPr sz="850" b="0" i="0">
                 <a:solidFill>
                   <a:srgbClr val="656C7A"/>
                 </a:solidFill>
                 <a:latin typeface="Segoe UI"/>
               </a:rPr>
-              <a:t>Elapsed time is an estimate and is marked as one throughout. The missing-justification case is real: it happened to an ISO approval last month.</a:t>
+              <a:t>Checked live against CISA's Known Exploited Vulnerabilities catalogue at the moment of asking. The figures are whatever the catalogue says that day — which is exactly the point.</a:t>
             </a:r>
           </a:p>
         </p:txBody>
@@ -6605,7 +7505,7 @@
                 </a:solidFill>
                 <a:latin typeface="Segoe UI"/>
               </a:rPr>
-              <a:t>W H E R E  I T  S T A R T S</a:t>
+              <a:t>T H E  R E C U R R I N G  T A S K</a:t>
             </a:r>
           </a:p>
         </p:txBody>
@@ -6647,7 +7547,7 @@
                 </a:solidFill>
                 <a:latin typeface="Segoe UI"/>
               </a:rPr>
-              <a:t>The request is an email. So GreenLight reads email.</a:t>
+              <a:t>One request. Nearly a week.</a:t>
             </a:r>
           </a:p>
         </p:txBody>
@@ -6661,7 +7561,7 @@
         <p:spPr>
           <a:xfrm>
             <a:off x="841248" y="1810512"/>
-            <a:ext cx="7566623" cy="713232"/>
+            <a:ext cx="10509199" cy="1280160"/>
           </a:xfrm>
           <a:prstGeom prst="rect">
             <a:avLst/>
@@ -6676,69 +7576,160 @@
           <a:p>
             <a:pPr>
               <a:lnSpc>
-                <a:spcPct val="140000"/>
+                <a:spcPct val="155000"/>
+              </a:lnSpc>
+              <a:spcAft>
+                <a:spcPts val="500"/>
+              </a:spcAft>
+            </a:pPr>
+            <a:r>
+              <a:rPr sz="1150" b="1" i="0">
+                <a:solidFill>
+                  <a:srgbClr val="B54708"/>
+                </a:solidFill>
+                <a:latin typeface="Consolas"/>
+              </a:rPr>
+              <a:t>3 days   </a:t>
+            </a:r>
+            <a:r>
+              <a:rPr sz="1250" b="0" i="0">
+                <a:solidFill>
+                  <a:srgbClr val="374151"/>
+                </a:solidFill>
+                <a:latin typeface="Segoe UI"/>
+              </a:rPr>
+              <a:t>It waits in the inbox. Every operational request in the company arrives at the same desk.</a:t>
+            </a:r>
+          </a:p>
+          <a:p>
+            <a:pPr>
+              <a:lnSpc>
+                <a:spcPct val="155000"/>
+              </a:lnSpc>
+              <a:spcAft>
+                <a:spcPts val="500"/>
+              </a:spcAft>
+            </a:pPr>
+            <a:r>
+              <a:rPr sz="1150" b="1" i="0">
+                <a:solidFill>
+                  <a:srgbClr val="B54708"/>
+                </a:solidFill>
+                <a:latin typeface="Consolas"/>
+              </a:rPr>
+              <a:t>1–2 days   </a:t>
+            </a:r>
+            <a:r>
+              <a:rPr sz="1250" b="0" i="0">
+                <a:solidFill>
+                  <a:srgbClr val="374151"/>
+                </a:solidFill>
+                <a:latin typeface="Segoe UI"/>
+              </a:rPr>
+              <a:t>It comes back incomplete — no justification, no cost, no security answer. The reply goes to the bottom of the queue.</a:t>
+            </a:r>
+          </a:p>
+          <a:p>
+            <a:pPr>
+              <a:lnSpc>
+                <a:spcPct val="155000"/>
+              </a:lnSpc>
+              <a:spcAft>
+                <a:spcPts val="500"/>
+              </a:spcAft>
+            </a:pPr>
+            <a:r>
+              <a:rPr sz="1150" b="1" i="0">
+                <a:solidFill>
+                  <a:srgbClr val="B42318"/>
+                </a:solidFill>
+                <a:latin typeface="Consolas"/>
+              </a:rPr>
+              <a:t>2–3 hrs   </a:t>
+            </a:r>
+            <a:r>
+              <a:rPr sz="1250" b="0" i="0">
+                <a:solidFill>
+                  <a:srgbClr val="374151"/>
+                </a:solidFill>
+                <a:latin typeface="Segoe UI"/>
+              </a:rPr>
+              <a:t>The approver becomes the researcher. Is this vendor safe? What does it cost? Are we allowed to use it here?</a:t>
+            </a:r>
+          </a:p>
+          <a:p>
+            <a:pPr>
+              <a:lnSpc>
+                <a:spcPct val="155000"/>
+              </a:lnSpc>
+              <a:spcAft>
+                <a:spcPts val="500"/>
+              </a:spcAft>
+            </a:pPr>
+            <a:r>
+              <a:rPr sz="625"/>
+              <a:t> </a:t>
+            </a:r>
+          </a:p>
+        </p:txBody>
+      </p:sp>
+      <p:sp>
+        <p:nvSpPr>
+          <p:cNvPr id="7" name="TextBox 6"/>
+          <p:cNvSpPr txBox="1"/>
+          <p:nvPr/>
+        </p:nvSpPr>
+        <p:spPr>
+          <a:xfrm>
+            <a:off x="841248" y="3291840"/>
+            <a:ext cx="9037911" cy="658368"/>
+          </a:xfrm>
+          <a:prstGeom prst="rect">
+            <a:avLst/>
+          </a:prstGeom>
+          <a:noFill/>
+        </p:spPr>
+        <p:txBody>
+          <a:bodyPr wrap="square">
+            <a:spAutoFit/>
+          </a:bodyPr>
+          <a:lstStyle/>
+          <a:p>
+            <a:pPr>
+              <a:lnSpc>
+                <a:spcPct val="138000"/>
               </a:lnSpc>
               <a:spcAft>
                 <a:spcPts val="0"/>
               </a:spcAft>
             </a:pPr>
             <a:r>
-              <a:rPr sz="1600" b="0" i="0">
+              <a:rPr sz="1300" b="1" i="0">
+                <a:solidFill>
+                  <a:srgbClr val="111827"/>
+                </a:solidFill>
+                <a:latin typeface="Segoe UI"/>
+              </a:rPr>
+              <a:t>Then multiply that by every tool, every week.</a:t>
+            </a:r>
+            <a:r>
+              <a:rPr sz="1300" b="0" i="0">
                 <a:solidFill>
                   <a:srgbClr val="374151"/>
                 </a:solidFill>
                 <a:latin typeface="Segoe UI"/>
               </a:rPr>
-              <a:t>Nobody at BISTEC fills in a form. They write to the Head of Operations — which meant someone still had to read the message and retype it.</a:t>
-            </a:r>
-          </a:p>
-        </p:txBody>
-      </p:sp>
-      <p:sp>
-        <p:nvSpPr>
-          <p:cNvPr id="7" name="Rounded Rectangle 6"/>
-          <p:cNvSpPr/>
-          <p:nvPr/>
-        </p:nvSpPr>
-        <p:spPr>
-          <a:xfrm>
-            <a:off x="841248" y="2651760"/>
-            <a:ext cx="5154015" cy="1965960"/>
-          </a:xfrm>
-          <a:prstGeom prst="roundRect">
-            <a:avLst>
-              <a:gd name="adj" fmla="val 6000"/>
-            </a:avLst>
-          </a:prstGeom>
-          <a:solidFill>
-            <a:srgbClr val="FFFFFF"/>
-          </a:solidFill>
-          <a:ln w="12700">
-            <a:solidFill>
-              <a:srgbClr val="E2E5EB"/>
-            </a:solidFill>
-          </a:ln>
-          <a:effectLst/>
-        </p:spPr>
-        <p:style>
-          <a:lnRef idx="1">
-            <a:schemeClr val="accent1"/>
-          </a:lnRef>
-          <a:fillRef idx="3">
-            <a:schemeClr val="accent1"/>
-          </a:fillRef>
-          <a:effectRef idx="2">
-            <a:schemeClr val="accent1"/>
-          </a:effectRef>
-          <a:fontRef idx="minor">
-            <a:schemeClr val="lt1"/>
-          </a:fontRef>
-        </p:style>
-        <p:txBody>
-          <a:bodyPr rtlCol="0" anchor="ctr"/>
-          <a:lstStyle/>
-          <a:p>
-            <a:pPr algn="ctr"/>
+              <a:t> One person is the bottleneck for the whole company, and the work that makes them </a:t>
+            </a:r>
+            <a:r>
+              <a:rPr sz="1300" b="0" i="0">
+                <a:solidFill>
+                  <a:srgbClr val="374151"/>
+                </a:solidFill>
+                <a:latin typeface="Segoe UI"/>
+              </a:rPr>
+              <a:t>the bottleneck is the same work every time.</a:t>
+            </a:r>
           </a:p>
         </p:txBody>
       </p:sp>
@@ -6750,8 +7741,8 @@
         </p:nvSpPr>
         <p:spPr>
           <a:xfrm>
-            <a:off x="1042416" y="2798064"/>
-            <a:ext cx="4751679" cy="1691640"/>
+            <a:off x="841248" y="5897880"/>
+            <a:ext cx="10509199" cy="640080"/>
           </a:xfrm>
           <a:prstGeom prst="rect">
             <a:avLst/>
@@ -6766,549 +7757,20 @@
           <a:p>
             <a:pPr>
               <a:lnSpc>
-                <a:spcPct val="134000"/>
-              </a:lnSpc>
-              <a:spcAft>
-                <a:spcPts val="300"/>
-              </a:spcAft>
-            </a:pPr>
-            <a:r>
-              <a:rPr sz="1200" b="1" i="0">
-                <a:solidFill>
-                  <a:srgbClr val="111827"/>
-                </a:solidFill>
-                <a:latin typeface="Segoe UI"/>
-              </a:rPr>
-              <a:t>What arrives</a:t>
-            </a:r>
-          </a:p>
-          <a:p>
-            <a:pPr>
-              <a:lnSpc>
-                <a:spcPct val="134000"/>
-              </a:lnSpc>
-              <a:spcAft>
-                <a:spcPts val="300"/>
-              </a:spcAft>
-            </a:pPr>
-            <a:r>
-              <a:rPr sz="950" b="0" i="0">
-                <a:solidFill>
-                  <a:srgbClr val="4B5563"/>
-                </a:solidFill>
-                <a:latin typeface="Consolas"/>
-              </a:rPr>
-              <a:t>Could we get Canva Pro for the</a:t>
-            </a:r>
-          </a:p>
-          <a:p>
-            <a:pPr>
-              <a:lnSpc>
-                <a:spcPct val="134000"/>
-              </a:lnSpc>
-              <a:spcAft>
-                <a:spcPts val="300"/>
-              </a:spcAft>
-            </a:pPr>
-            <a:r>
-              <a:rPr sz="950" b="0" i="0">
-                <a:solidFill>
-                  <a:srgbClr val="4B5563"/>
-                </a:solidFill>
-                <a:latin typeface="Consolas"/>
-              </a:rPr>
-              <a:t>marketing team? There are 6 of us</a:t>
-            </a:r>
-          </a:p>
-          <a:p>
-            <a:pPr>
-              <a:lnSpc>
-                <a:spcPct val="134000"/>
-              </a:lnSpc>
-              <a:spcAft>
-                <a:spcPts val="300"/>
-              </a:spcAft>
-            </a:pPr>
-            <a:r>
-              <a:rPr sz="950" b="0" i="0">
-                <a:solidFill>
-                  <a:srgbClr val="4B5563"/>
-                </a:solidFill>
-                <a:latin typeface="Consolas"/>
-              </a:rPr>
-              <a:t>and we are rebuilding the case-study</a:t>
-            </a:r>
-          </a:p>
-          <a:p>
-            <a:pPr>
-              <a:lnSpc>
-                <a:spcPct val="134000"/>
-              </a:lnSpc>
-              <a:spcAft>
-                <a:spcPts val="300"/>
-              </a:spcAft>
-            </a:pPr>
-            <a:r>
-              <a:rPr sz="950" b="0" i="0">
-                <a:solidFill>
-                  <a:srgbClr val="4B5563"/>
-                </a:solidFill>
-                <a:latin typeface="Consolas"/>
-              </a:rPr>
-              <a:t>templates.</a:t>
-            </a:r>
-          </a:p>
-          <a:p>
-            <a:pPr>
-              <a:lnSpc>
-                <a:spcPct val="134000"/>
-              </a:lnSpc>
-              <a:spcAft>
-                <a:spcPts val="300"/>
-              </a:spcAft>
-            </a:pPr>
-            <a:r>
-              <a:rPr sz="525"/>
-              <a:t> </a:t>
-            </a:r>
-          </a:p>
-          <a:p>
-            <a:pPr>
-              <a:lnSpc>
-                <a:spcPct val="134000"/>
-              </a:lnSpc>
-              <a:spcAft>
-                <a:spcPts val="300"/>
-              </a:spcAft>
-            </a:pPr>
-            <a:r>
-              <a:rPr sz="950" b="0" i="0">
-                <a:solidFill>
-                  <a:srgbClr val="4B5563"/>
-                </a:solidFill>
-                <a:latin typeface="Consolas"/>
-              </a:rPr>
-              <a:t>Thanks,</a:t>
-            </a:r>
-          </a:p>
-          <a:p>
-            <a:pPr>
-              <a:lnSpc>
-                <a:spcPct val="134000"/>
-              </a:lnSpc>
-              <a:spcAft>
-                <a:spcPts val="300"/>
-              </a:spcAft>
-            </a:pPr>
-            <a:r>
-              <a:rPr sz="950" b="0" i="0">
-                <a:solidFill>
-                  <a:srgbClr val="4B5563"/>
-                </a:solidFill>
-                <a:latin typeface="Consolas"/>
-              </a:rPr>
-              <a:t>Marketing Lead</a:t>
-            </a:r>
-          </a:p>
-        </p:txBody>
-      </p:sp>
-      <p:sp>
-        <p:nvSpPr>
-          <p:cNvPr id="9" name="Rounded Rectangle 8"/>
-          <p:cNvSpPr/>
-          <p:nvPr/>
-        </p:nvSpPr>
-        <p:spPr>
-          <a:xfrm>
-            <a:off x="6196431" y="2651760"/>
-            <a:ext cx="5154015" cy="1965960"/>
-          </a:xfrm>
-          <a:prstGeom prst="roundRect">
-            <a:avLst>
-              <a:gd name="adj" fmla="val 6000"/>
-            </a:avLst>
-          </a:prstGeom>
-          <a:solidFill>
-            <a:srgbClr val="E7F5EA"/>
-          </a:solidFill>
-          <a:ln w="12700">
-            <a:solidFill>
-              <a:srgbClr val="A8D9B4"/>
-            </a:solidFill>
-          </a:ln>
-          <a:effectLst/>
-        </p:spPr>
-        <p:style>
-          <a:lnRef idx="1">
-            <a:schemeClr val="accent1"/>
-          </a:lnRef>
-          <a:fillRef idx="3">
-            <a:schemeClr val="accent1"/>
-          </a:fillRef>
-          <a:effectRef idx="2">
-            <a:schemeClr val="accent1"/>
-          </a:effectRef>
-          <a:fontRef idx="minor">
-            <a:schemeClr val="lt1"/>
-          </a:fontRef>
-        </p:style>
-        <p:txBody>
-          <a:bodyPr rtlCol="0" anchor="ctr"/>
-          <a:lstStyle/>
-          <a:p>
-            <a:pPr algn="ctr"/>
-          </a:p>
-        </p:txBody>
-      </p:sp>
-      <p:sp>
-        <p:nvSpPr>
-          <p:cNvPr id="10" name="TextBox 9"/>
-          <p:cNvSpPr txBox="1"/>
-          <p:nvPr/>
-        </p:nvSpPr>
-        <p:spPr>
-          <a:xfrm>
-            <a:off x="6397599" y="2798064"/>
-            <a:ext cx="4751679" cy="1691640"/>
-          </a:xfrm>
-          <a:prstGeom prst="rect">
-            <a:avLst/>
-          </a:prstGeom>
-          <a:noFill/>
-        </p:spPr>
-        <p:txBody>
-          <a:bodyPr wrap="square">
-            <a:spAutoFit/>
-          </a:bodyPr>
-          <a:lstStyle/>
-          <a:p>
-            <a:pPr>
-              <a:lnSpc>
-                <a:spcPct val="134000"/>
-              </a:lnSpc>
-              <a:spcAft>
-                <a:spcPts val="300"/>
-              </a:spcAft>
-            </a:pPr>
-            <a:r>
-              <a:rPr sz="1200" b="1" i="0">
-                <a:solidFill>
-                  <a:srgbClr val="111827"/>
-                </a:solidFill>
-                <a:latin typeface="Segoe UI"/>
-              </a:rPr>
-              <a:t>What GreenLight files</a:t>
-            </a:r>
-          </a:p>
-          <a:p>
-            <a:pPr>
-              <a:lnSpc>
-                <a:spcPct val="134000"/>
-              </a:lnSpc>
-              <a:spcAft>
-                <a:spcPts val="300"/>
-              </a:spcAft>
-            </a:pPr>
-            <a:r>
-              <a:rPr sz="525"/>
-              <a:t> </a:t>
-            </a:r>
-          </a:p>
-        </p:txBody>
-      </p:sp>
-      <p:sp>
-        <p:nvSpPr>
-          <p:cNvPr id="11" name="TextBox 10"/>
-          <p:cNvSpPr txBox="1"/>
-          <p:nvPr/>
-        </p:nvSpPr>
-        <p:spPr>
-          <a:xfrm>
-            <a:off x="6397599" y="3218688"/>
-            <a:ext cx="4751679" cy="1325880"/>
-          </a:xfrm>
-          <a:prstGeom prst="rect">
-            <a:avLst/>
-          </a:prstGeom>
-          <a:noFill/>
-        </p:spPr>
-        <p:txBody>
-          <a:bodyPr wrap="square">
-            <a:spAutoFit/>
-          </a:bodyPr>
-          <a:lstStyle/>
-          <a:p>
-            <a:pPr>
-              <a:lnSpc>
-                <a:spcPct val="150000"/>
-              </a:lnSpc>
-              <a:spcAft>
-                <a:spcPts val="200"/>
-              </a:spcAft>
-            </a:pPr>
-            <a:r>
-              <a:rPr sz="950" b="0" i="0">
+                <a:spcPct val="140000"/>
+              </a:lnSpc>
+              <a:spcAft>
+                <a:spcPts val="0"/>
+              </a:spcAft>
+            </a:pPr>
+            <a:r>
+              <a:rPr sz="850" b="0" i="0">
                 <a:solidFill>
                   <a:srgbClr val="656C7A"/>
                 </a:solidFill>
-                <a:latin typeface="Consolas"/>
-              </a:rPr>
-              <a:t>Software   </a:t>
-            </a:r>
-            <a:r>
-              <a:rPr sz="1100" b="0" i="0">
-                <a:solidFill>
-                  <a:srgbClr val="374151"/>
-                </a:solidFill>
-                <a:latin typeface="Segoe UI"/>
-              </a:rPr>
-              <a:t>Canva Pro</a:t>
-            </a:r>
-          </a:p>
-          <a:p>
-            <a:pPr>
-              <a:lnSpc>
-                <a:spcPct val="150000"/>
-              </a:lnSpc>
-              <a:spcAft>
-                <a:spcPts val="200"/>
-              </a:spcAft>
-            </a:pPr>
-            <a:r>
-              <a:rPr sz="950" b="0" i="0">
-                <a:solidFill>
-                  <a:srgbClr val="656C7A"/>
-                </a:solidFill>
-                <a:latin typeface="Consolas"/>
-              </a:rPr>
-              <a:t>Seats   </a:t>
-            </a:r>
-            <a:r>
-              <a:rPr sz="1100" b="0" i="0">
-                <a:solidFill>
-                  <a:srgbClr val="374151"/>
-                </a:solidFill>
-                <a:latin typeface="Segoe UI"/>
-              </a:rPr>
-              <a:t>6</a:t>
-            </a:r>
-          </a:p>
-          <a:p>
-            <a:pPr>
-              <a:lnSpc>
-                <a:spcPct val="150000"/>
-              </a:lnSpc>
-              <a:spcAft>
-                <a:spcPts val="200"/>
-              </a:spcAft>
-            </a:pPr>
-            <a:r>
-              <a:rPr sz="950" b="0" i="0">
-                <a:solidFill>
-                  <a:srgbClr val="656C7A"/>
-                </a:solidFill>
-                <a:latin typeface="Consolas"/>
-              </a:rPr>
-              <a:t>Team   </a:t>
-            </a:r>
-            <a:r>
-              <a:rPr sz="1100" b="0" i="0">
-                <a:solidFill>
-                  <a:srgbClr val="374151"/>
-                </a:solidFill>
-                <a:latin typeface="Segoe UI"/>
-              </a:rPr>
-              <a:t>Marketing</a:t>
-            </a:r>
-          </a:p>
-          <a:p>
-            <a:pPr>
-              <a:lnSpc>
-                <a:spcPct val="150000"/>
-              </a:lnSpc>
-              <a:spcAft>
-                <a:spcPts val="200"/>
-              </a:spcAft>
-            </a:pPr>
-            <a:r>
-              <a:rPr sz="950" b="0" i="0">
-                <a:solidFill>
-                  <a:srgbClr val="656C7A"/>
-                </a:solidFill>
-                <a:latin typeface="Consolas"/>
-              </a:rPr>
-              <a:t>For   </a:t>
-            </a:r>
-            <a:r>
-              <a:rPr sz="1100" b="0" i="0">
-                <a:solidFill>
-                  <a:srgbClr val="374151"/>
-                </a:solidFill>
-                <a:latin typeface="Segoe UI"/>
-              </a:rPr>
-              <a:t>Rebuilding case-study templates</a:t>
-            </a:r>
-          </a:p>
-          <a:p>
-            <a:pPr>
-              <a:lnSpc>
-                <a:spcPct val="150000"/>
-              </a:lnSpc>
-              <a:spcAft>
-                <a:spcPts val="200"/>
-              </a:spcAft>
-            </a:pPr>
-            <a:r>
-              <a:rPr sz="950" b="0" i="0">
-                <a:solidFill>
-                  <a:srgbClr val="656C7A"/>
-                </a:solidFill>
-                <a:latin typeface="Consolas"/>
-              </a:rPr>
-              <a:t>Personal data   </a:t>
-            </a:r>
-            <a:r>
-              <a:rPr sz="1100" b="1" i="0">
-                <a:solidFill>
-                  <a:srgbClr val="B54708"/>
-                </a:solidFill>
-                <a:latin typeface="Segoe UI"/>
-              </a:rPr>
-              <a:t>not stated</a:t>
-            </a:r>
-          </a:p>
-          <a:p>
-            <a:pPr>
-              <a:lnSpc>
-                <a:spcPct val="150000"/>
-              </a:lnSpc>
-              <a:spcAft>
-                <a:spcPts val="200"/>
-              </a:spcAft>
-            </a:pPr>
-            <a:r>
-              <a:rPr sz="550"/>
-              <a:t> </a:t>
-            </a:r>
-          </a:p>
-        </p:txBody>
-      </p:sp>
-      <p:sp>
-        <p:nvSpPr>
-          <p:cNvPr id="12" name="TextBox 11"/>
-          <p:cNvSpPr txBox="1"/>
-          <p:nvPr/>
-        </p:nvSpPr>
-        <p:spPr>
-          <a:xfrm>
-            <a:off x="841248" y="4855464"/>
-            <a:ext cx="9037911" cy="932688"/>
-          </a:xfrm>
-          <a:prstGeom prst="rect">
-            <a:avLst/>
-          </a:prstGeom>
-          <a:noFill/>
-        </p:spPr>
-        <p:txBody>
-          <a:bodyPr wrap="square">
-            <a:spAutoFit/>
-          </a:bodyPr>
-          <a:lstStyle/>
-          <a:p>
-            <a:pPr>
-              <a:lnSpc>
-                <a:spcPct val="138000"/>
-              </a:lnSpc>
-              <a:spcAft>
-                <a:spcPts val="0"/>
-              </a:spcAft>
-            </a:pPr>
-            <a:r>
-              <a:rPr sz="1300" b="1" i="0">
-                <a:solidFill>
-                  <a:srgbClr val="111827"/>
-                </a:solidFill>
-                <a:latin typeface="Segoe UI"/>
-              </a:rPr>
-              <a:t>That last line is the whole point.</a:t>
-            </a:r>
-            <a:r>
-              <a:rPr sz="1300" b="0" i="0">
-                <a:solidFill>
-                  <a:srgbClr val="374151"/>
-                </a:solidFill>
-                <a:latin typeface="Segoe UI"/>
-              </a:rPr>
-              <a:t> Whether anyone's personal data goes in decides whether a privacy assessment is legally required. </a:t>
-            </a:r>
-            <a:r>
-              <a:rPr sz="1300" b="0" i="0">
-                <a:solidFill>
-                  <a:srgbClr val="374151"/>
-                </a:solidFill>
-                <a:latin typeface="Segoe UI"/>
-              </a:rPr>
-              <a:t>The email does not mention the subject — and </a:t>
-            </a:r>
-            <a:r>
-              <a:rPr sz="1300" b="1" i="0">
-                <a:solidFill>
-                  <a:srgbClr val="111827"/>
-                </a:solidFill>
-                <a:latin typeface="Segoe UI"/>
-              </a:rPr>
-              <a:t>silence is not a no</a:t>
-            </a:r>
-            <a:r>
-              <a:rPr sz="1300" b="0" i="0">
-                <a:solidFill>
-                  <a:srgbClr val="374151"/>
-                </a:solidFill>
-                <a:latin typeface="Segoe UI"/>
-              </a:rPr>
-              <a:t>. So GreenLight writes the question instead of assuming, and a person sends it.</a:t>
-            </a:r>
-          </a:p>
-        </p:txBody>
-      </p:sp>
-      <p:sp>
-        <p:nvSpPr>
-          <p:cNvPr id="13" name="TextBox 12"/>
-          <p:cNvSpPr txBox="1"/>
-          <p:nvPr/>
-        </p:nvSpPr>
-        <p:spPr>
-          <a:xfrm>
-            <a:off x="841248" y="5897880"/>
-            <a:ext cx="10509199" cy="640080"/>
-          </a:xfrm>
-          <a:prstGeom prst="rect">
-            <a:avLst/>
-          </a:prstGeom>
-          <a:noFill/>
-        </p:spPr>
-        <p:txBody>
-          <a:bodyPr wrap="square">
-            <a:spAutoFit/>
-          </a:bodyPr>
-          <a:lstStyle/>
-          <a:p>
-            <a:pPr>
-              <a:lnSpc>
-                <a:spcPct val="140000"/>
-              </a:lnSpc>
-              <a:spcAft>
-                <a:spcPts val="0"/>
-              </a:spcAft>
-            </a:pPr>
-            <a:r>
-              <a:rPr sz="850" b="0" i="0">
-                <a:solidFill>
-                  <a:srgbClr val="656C7A"/>
-                </a:solidFill>
-                <a:latin typeface="Segoe UI"/>
-              </a:rPr>
-              <a:t>Two ways in: paste the message, or let a Power Automate rule in Outlook post it. Both land on the same code. The Power Automate HTTP action is a premium connector, so the paste route is the one that needs nothing.</a:t>
+                <a:latin typeface="Segoe UI"/>
+              </a:rPr>
+              <a:t>Elapsed times are estimates and are marked as estimates throughout this deck. The missing-justification case is real — it happened to an ISO approval last month.</a:t>
             </a:r>
           </a:p>
         </p:txBody>
@@ -7462,7 +7924,7 @@
                 </a:solidFill>
                 <a:latin typeface="Segoe UI"/>
               </a:rPr>
-              <a:t>T H E  P A R T  A  S E C U R I T Y  L E A D  A S K S  A B O U T</a:t>
+              <a:t>W H A T  C H A N G E S</a:t>
             </a:r>
           </a:p>
         </p:txBody>
@@ -7504,63 +7966,21 @@
                 </a:solidFill>
                 <a:latin typeface="Segoe UI"/>
               </a:rPr>
-              <a:t>An inbox is the one input anyone can write to.</a:t>
-            </a:r>
-          </a:p>
-        </p:txBody>
-      </p:sp>
-      <p:sp>
-        <p:nvSpPr>
-          <p:cNvPr id="6" name="TextBox 5"/>
-          <p:cNvSpPr txBox="1"/>
-          <p:nvPr/>
-        </p:nvSpPr>
-        <p:spPr>
-          <a:xfrm>
-            <a:off x="841248" y="1810512"/>
-            <a:ext cx="7566623" cy="713232"/>
-          </a:xfrm>
-          <a:prstGeom prst="rect">
-            <a:avLst/>
-          </a:prstGeom>
-          <a:noFill/>
-        </p:spPr>
-        <p:txBody>
-          <a:bodyPr wrap="square">
-            <a:spAutoFit/>
-          </a:bodyPr>
-          <a:lstStyle/>
-          <a:p>
-            <a:pPr>
-              <a:lnSpc>
-                <a:spcPct val="140000"/>
-              </a:lnSpc>
-              <a:spcAft>
-                <a:spcPts val="0"/>
-              </a:spcAft>
-            </a:pPr>
-            <a:r>
-              <a:rPr sz="1600" b="0" i="0">
-                <a:solidFill>
-                  <a:srgbClr val="374151"/>
-                </a:solidFill>
-                <a:latin typeface="Segoe UI"/>
-              </a:rPr>
-              <a:t>Everything else GreenLight reads came from a signed-in colleague or a source it chose to call. An email is neither — so it is treated as data, never as instruction.</a:t>
-            </a:r>
-          </a:p>
-        </p:txBody>
-      </p:sp>
-      <p:sp>
-        <p:nvSpPr>
-          <p:cNvPr id="7" name="Rounded Rectangle 6"/>
+              <a:t>The same request, before and after.</a:t>
+            </a:r>
+          </a:p>
+        </p:txBody>
+      </p:sp>
+      <p:sp>
+        <p:nvSpPr>
+          <p:cNvPr id="6" name="Rounded Rectangle 5"/>
           <p:cNvSpPr/>
           <p:nvPr/>
         </p:nvSpPr>
         <p:spPr>
           <a:xfrm>
-            <a:off x="841248" y="2651760"/>
-            <a:ext cx="3368954" cy="1828800"/>
+            <a:off x="841248" y="1810512"/>
+            <a:ext cx="5154015" cy="2286000"/>
           </a:xfrm>
           <a:prstGeom prst="roundRect">
             <a:avLst>
@@ -7568,11 +7988,11 @@
             </a:avLst>
           </a:prstGeom>
           <a:solidFill>
-            <a:srgbClr val="FDECEB"/>
+            <a:srgbClr val="FFFFFF"/>
           </a:solidFill>
           <a:ln w="12700">
             <a:solidFill>
-              <a:srgbClr val="F2B8B4"/>
+              <a:srgbClr val="E2E5EB"/>
             </a:solidFill>
           </a:ln>
           <a:effectLst/>
@@ -7601,14 +8021,14 @@
       </p:sp>
       <p:sp>
         <p:nvSpPr>
-          <p:cNvPr id="8" name="TextBox 7"/>
+          <p:cNvPr id="7" name="TextBox 6"/>
           <p:cNvSpPr txBox="1"/>
           <p:nvPr/>
         </p:nvSpPr>
         <p:spPr>
           <a:xfrm>
-            <a:off x="1042416" y="2798064"/>
-            <a:ext cx="2966618" cy="1554480"/>
+            <a:off x="1042416" y="1956816"/>
+            <a:ext cx="4751679" cy="2011680"/>
           </a:xfrm>
           <a:prstGeom prst="rect">
             <a:avLst/>
@@ -7636,7 +8056,7 @@
                 </a:solidFill>
                 <a:latin typeface="Segoe UI"/>
               </a:rPr>
-              <a:t>A display name is not identity</a:t>
+              <a:t>What the approver used to open</a:t>
             </a:r>
           </a:p>
           <a:p>
@@ -7651,11 +8071,11 @@
             <a:r>
               <a:rPr sz="950" b="0" i="0">
                 <a:solidFill>
-                  <a:srgbClr val="B42318"/>
+                  <a:srgbClr val="4B5563"/>
                 </a:solidFill>
                 <a:latin typeface="Consolas"/>
               </a:rPr>
-              <a:t>"ops@bistecglobal.com"</a:t>
+              <a:t>Could we get Canva Pro for the</a:t>
             </a:r>
           </a:p>
           <a:p>
@@ -7670,11 +8090,49 @@
             <a:r>
               <a:rPr sz="950" b="0" i="0">
                 <a:solidFill>
-                  <a:srgbClr val="B42318"/>
+                  <a:srgbClr val="4B5563"/>
                 </a:solidFill>
                 <a:latin typeface="Consolas"/>
               </a:rPr>
-              <a:t>&lt;attacker@evil.com&gt;</a:t>
+              <a:t>marketing team? There are 6 of us</a:t>
+            </a:r>
+          </a:p>
+          <a:p>
+            <a:pPr>
+              <a:lnSpc>
+                <a:spcPct val="134000"/>
+              </a:lnSpc>
+              <a:spcAft>
+                <a:spcPts val="300"/>
+              </a:spcAft>
+            </a:pPr>
+            <a:r>
+              <a:rPr sz="950" b="0" i="0">
+                <a:solidFill>
+                  <a:srgbClr val="4B5563"/>
+                </a:solidFill>
+                <a:latin typeface="Consolas"/>
+              </a:rPr>
+              <a:t>and we are rebuilding the case-study</a:t>
+            </a:r>
+          </a:p>
+          <a:p>
+            <a:pPr>
+              <a:lnSpc>
+                <a:spcPct val="134000"/>
+              </a:lnSpc>
+              <a:spcAft>
+                <a:spcPts val="300"/>
+              </a:spcAft>
+            </a:pPr>
+            <a:r>
+              <a:rPr sz="950" b="0" i="0">
+                <a:solidFill>
+                  <a:srgbClr val="4B5563"/>
+                </a:solidFill>
+                <a:latin typeface="Consolas"/>
+              </a:rPr>
+              <a:t>templates.</a:t>
             </a:r>
           </a:p>
           <a:p>
@@ -7701,27 +8159,79 @@
               </a:spcAft>
             </a:pPr>
             <a:r>
-              <a:rPr sz="1050" b="0" i="0">
-                <a:solidFill>
-                  <a:srgbClr val="374151"/>
-                </a:solidFill>
-                <a:latin typeface="Segoe UI"/>
-              </a:rPr>
-              <a:t>The address in angle brackets is what counts. Everything else is text someone typed.</a:t>
-            </a:r>
-          </a:p>
-        </p:txBody>
-      </p:sp>
-      <p:sp>
-        <p:nvSpPr>
-          <p:cNvPr id="9" name="Rounded Rectangle 8"/>
+              <a:rPr sz="950" b="0" i="0">
+                <a:solidFill>
+                  <a:srgbClr val="4B5563"/>
+                </a:solidFill>
+                <a:latin typeface="Consolas"/>
+              </a:rPr>
+              <a:t>Thanks,</a:t>
+            </a:r>
+          </a:p>
+          <a:p>
+            <a:pPr>
+              <a:lnSpc>
+                <a:spcPct val="134000"/>
+              </a:lnSpc>
+              <a:spcAft>
+                <a:spcPts val="300"/>
+              </a:spcAft>
+            </a:pPr>
+            <a:r>
+              <a:rPr sz="950" b="0" i="0">
+                <a:solidFill>
+                  <a:srgbClr val="4B5563"/>
+                </a:solidFill>
+                <a:latin typeface="Consolas"/>
+              </a:rPr>
+              <a:t>Marketing Lead</a:t>
+            </a:r>
+          </a:p>
+          <a:p>
+            <a:pPr>
+              <a:lnSpc>
+                <a:spcPct val="134000"/>
+              </a:lnSpc>
+              <a:spcAft>
+                <a:spcPts val="300"/>
+              </a:spcAft>
+            </a:pPr>
+            <a:r>
+              <a:rPr sz="525"/>
+              <a:t> </a:t>
+            </a:r>
+          </a:p>
+          <a:p>
+            <a:pPr>
+              <a:lnSpc>
+                <a:spcPct val="134000"/>
+              </a:lnSpc>
+              <a:spcAft>
+                <a:spcPts val="300"/>
+              </a:spcAft>
+            </a:pPr>
+            <a:r>
+              <a:rPr sz="1050" b="1" i="0">
+                <a:solidFill>
+                  <a:srgbClr val="111827"/>
+                </a:solidFill>
+                <a:latin typeface="Segoe UI"/>
+              </a:rPr>
+              <a:t>And nothing else.</a:t>
+            </a:r>
+          </a:p>
+        </p:txBody>
+      </p:sp>
+      <p:sp>
+        <p:nvSpPr>
+          <p:cNvPr id="8" name="Rounded Rectangle 7"/>
           <p:cNvSpPr/>
           <p:nvPr/>
         </p:nvSpPr>
         <p:spPr>
           <a:xfrm>
-            <a:off x="4411370" y="2651760"/>
-            <a:ext cx="3368954" cy="1828800"/>
+            <a:off x="6196431" y="1810512"/>
+            <a:ext cx="5154015" cy="2286000"/>
           </a:xfrm>
           <a:prstGeom prst="roundRect">
             <a:avLst>
@@ -7729,11 +8239,11 @@
             </a:avLst>
           </a:prstGeom>
           <a:solidFill>
-            <a:srgbClr val="FDF2E7"/>
+            <a:srgbClr val="E7F5EA"/>
           </a:solidFill>
           <a:ln w="12700">
             <a:solidFill>
-              <a:srgbClr val="F0C39A"/>
+              <a:srgbClr val="A8D9B4"/>
             </a:solidFill>
           </a:ln>
           <a:effectLst/>
@@ -7762,14 +8272,70 @@
       </p:sp>
       <p:sp>
         <p:nvSpPr>
+          <p:cNvPr id="9" name="TextBox 8"/>
+          <p:cNvSpPr txBox="1"/>
+          <p:nvPr/>
+        </p:nvSpPr>
+        <p:spPr>
+          <a:xfrm>
+            <a:off x="6397599" y="1956816"/>
+            <a:ext cx="4751679" cy="2011680"/>
+          </a:xfrm>
+          <a:prstGeom prst="rect">
+            <a:avLst/>
+          </a:prstGeom>
+          <a:noFill/>
+        </p:spPr>
+        <p:txBody>
+          <a:bodyPr wrap="square">
+            <a:spAutoFit/>
+          </a:bodyPr>
+          <a:lstStyle/>
+          <a:p>
+            <a:pPr>
+              <a:lnSpc>
+                <a:spcPct val="134000"/>
+              </a:lnSpc>
+              <a:spcAft>
+                <a:spcPts val="300"/>
+              </a:spcAft>
+            </a:pPr>
+            <a:r>
+              <a:rPr sz="1200" b="1" i="0">
+                <a:solidFill>
+                  <a:srgbClr val="111827"/>
+                </a:solidFill>
+                <a:latin typeface="Segoe UI"/>
+              </a:rPr>
+              <a:t>What the approver opens now</a:t>
+            </a:r>
+          </a:p>
+          <a:p>
+            <a:pPr>
+              <a:lnSpc>
+                <a:spcPct val="134000"/>
+              </a:lnSpc>
+              <a:spcAft>
+                <a:spcPts val="300"/>
+              </a:spcAft>
+            </a:pPr>
+            <a:r>
+              <a:rPr sz="525"/>
+              <a:t> </a:t>
+            </a:r>
+          </a:p>
+        </p:txBody>
+      </p:sp>
+      <p:sp>
+        <p:nvSpPr>
           <p:cNvPr id="10" name="TextBox 9"/>
           <p:cNvSpPr txBox="1"/>
           <p:nvPr/>
         </p:nvSpPr>
         <p:spPr>
           <a:xfrm>
-            <a:off x="4612538" y="2798064"/>
-            <a:ext cx="2966618" cy="1554480"/>
+            <a:off x="6397599" y="2377440"/>
+            <a:ext cx="4751679" cy="1645920"/>
           </a:xfrm>
           <a:prstGeom prst="rect">
             <a:avLst/>
@@ -7784,101 +8350,224 @@
           <a:p>
             <a:pPr>
               <a:lnSpc>
-                <a:spcPct val="134000"/>
-              </a:lnSpc>
-              <a:spcAft>
-                <a:spcPts val="300"/>
-              </a:spcAft>
-            </a:pPr>
-            <a:r>
-              <a:rPr sz="1200" b="1" i="0">
+                <a:spcPct val="150000"/>
+              </a:lnSpc>
+              <a:spcAft>
+                <a:spcPts val="200"/>
+              </a:spcAft>
+            </a:pPr>
+            <a:r>
+              <a:rPr sz="950" b="0" i="0">
+                <a:solidFill>
+                  <a:srgbClr val="656C7A"/>
+                </a:solidFill>
+                <a:latin typeface="Consolas"/>
+              </a:rPr>
+              <a:t>Own it?   </a:t>
+            </a:r>
+            <a:r>
+              <a:rPr sz="1100" b="0" i="0">
+                <a:solidFill>
+                  <a:srgbClr val="374151"/>
+                </a:solidFill>
+                <a:latin typeface="Segoe UI"/>
+              </a:rPr>
+              <a:t>No — new to us</a:t>
+            </a:r>
+          </a:p>
+          <a:p>
+            <a:pPr>
+              <a:lnSpc>
+                <a:spcPct val="150000"/>
+              </a:lnSpc>
+              <a:spcAft>
+                <a:spcPts val="200"/>
+              </a:spcAft>
+            </a:pPr>
+            <a:r>
+              <a:rPr sz="950" b="0" i="0">
+                <a:solidFill>
+                  <a:srgbClr val="656C7A"/>
+                </a:solidFill>
+                <a:latin typeface="Consolas"/>
+              </a:rPr>
+              <a:t>Attacked?   </a:t>
+            </a:r>
+            <a:r>
+              <a:rPr sz="1100" b="0" i="0">
+                <a:solidFill>
+                  <a:srgbClr val="374151"/>
+                </a:solidFill>
+                <a:latin typeface="Segoe UI"/>
+              </a:rPr>
+              <a:t>Nothing on the live exploited list</a:t>
+            </a:r>
+          </a:p>
+          <a:p>
+            <a:pPr>
+              <a:lnSpc>
+                <a:spcPct val="150000"/>
+              </a:lnSpc>
+              <a:spcAft>
+                <a:spcPts val="200"/>
+              </a:spcAft>
+            </a:pPr>
+            <a:r>
+              <a:rPr sz="950" b="0" i="0">
+                <a:solidFill>
+                  <a:srgbClr val="656C7A"/>
+                </a:solidFill>
+                <a:latin typeface="Consolas"/>
+              </a:rPr>
+              <a:t>Security   </a:t>
+            </a:r>
+            <a:r>
+              <a:rPr sz="1100" b="0" i="0">
+                <a:solidFill>
+                  <a:srgbClr val="374151"/>
+                </a:solidFill>
+                <a:latin typeface="Segoe UI"/>
+              </a:rPr>
+              <a:t>Independent audit report — </a:t>
+            </a:r>
+            <a:r>
+              <a:rPr sz="1100" b="1" i="0">
                 <a:solidFill>
                   <a:srgbClr val="111827"/>
                 </a:solidFill>
                 <a:latin typeface="Segoe UI"/>
               </a:rPr>
-              <a:t>"Approve this immediately"</a:t>
-            </a:r>
-          </a:p>
-          <a:p>
-            <a:pPr>
-              <a:lnSpc>
-                <a:spcPct val="134000"/>
-              </a:lnSpc>
-              <a:spcAft>
-                <a:spcPts val="300"/>
-              </a:spcAft>
-            </a:pPr>
-            <a:r>
-              <a:rPr sz="1050" b="0" i="0">
+              <a:t>found</a:t>
+            </a:r>
+          </a:p>
+          <a:p>
+            <a:pPr>
+              <a:lnSpc>
+                <a:spcPct val="150000"/>
+              </a:lnSpc>
+              <a:spcAft>
+                <a:spcPts val="200"/>
+              </a:spcAft>
+            </a:pPr>
+            <a:r>
+              <a:rPr sz="950" b="0" i="0">
+                <a:solidFill>
+                  <a:srgbClr val="656C7A"/>
+                </a:solidFill>
+                <a:latin typeface="Consolas"/>
+              </a:rPr>
+              <a:t>Our data   </a:t>
+            </a:r>
+            <a:r>
+              <a:rPr sz="1100" b="0" i="0">
                 <a:solidFill>
                   <a:srgbClr val="374151"/>
                 </a:solidFill>
                 <a:latin typeface="Segoe UI"/>
               </a:rPr>
-              <a:t>Claude extracts fields. There is no field in what it returns that could approve anything — the guarantee is structural, not a filter that has to be clever.</a:t>
-            </a:r>
-          </a:p>
-        </p:txBody>
-      </p:sp>
-      <p:sp>
-        <p:nvSpPr>
-          <p:cNvPr id="11" name="Rounded Rectangle 10"/>
-          <p:cNvSpPr/>
-          <p:nvPr/>
-        </p:nvSpPr>
-        <p:spPr>
-          <a:xfrm>
-            <a:off x="7981492" y="2651760"/>
-            <a:ext cx="3368954" cy="1828800"/>
-          </a:xfrm>
-          <a:prstGeom prst="roundRect">
-            <a:avLst>
-              <a:gd name="adj" fmla="val 6000"/>
-            </a:avLst>
-          </a:prstGeom>
-          <a:solidFill>
-            <a:srgbClr val="E3F4F7"/>
-          </a:solidFill>
-          <a:ln w="12700">
-            <a:solidFill>
-              <a:srgbClr val="9ED4DE"/>
-            </a:solidFill>
-          </a:ln>
-          <a:effectLst/>
-        </p:spPr>
-        <p:style>
-          <a:lnRef idx="1">
-            <a:schemeClr val="accent1"/>
-          </a:lnRef>
-          <a:fillRef idx="3">
-            <a:schemeClr val="accent1"/>
-          </a:fillRef>
-          <a:effectRef idx="2">
-            <a:schemeClr val="accent1"/>
-          </a:effectRef>
-          <a:fontRef idx="minor">
-            <a:schemeClr val="lt1"/>
-          </a:fontRef>
-        </p:style>
-        <p:txBody>
-          <a:bodyPr rtlCol="0" anchor="ctr"/>
-          <a:lstStyle/>
-          <a:p>
-            <a:pPr algn="ctr"/>
-          </a:p>
-        </p:txBody>
-      </p:sp>
-      <p:sp>
-        <p:nvSpPr>
-          <p:cNvPr id="12" name="TextBox 11"/>
+              <a:t>United States — </a:t>
+            </a:r>
+            <a:r>
+              <a:rPr sz="1100" b="1" i="0">
+                <a:solidFill>
+                  <a:srgbClr val="B54708"/>
+                </a:solidFill>
+                <a:latin typeface="Segoe UI"/>
+              </a:rPr>
+              <a:t>vendor's own word only</a:t>
+            </a:r>
+          </a:p>
+          <a:p>
+            <a:pPr>
+              <a:lnSpc>
+                <a:spcPct val="150000"/>
+              </a:lnSpc>
+              <a:spcAft>
+                <a:spcPts val="200"/>
+              </a:spcAft>
+            </a:pPr>
+            <a:r>
+              <a:rPr sz="950" b="0" i="0">
+                <a:solidFill>
+                  <a:srgbClr val="656C7A"/>
+                </a:solidFill>
+                <a:latin typeface="Consolas"/>
+              </a:rPr>
+              <a:t>Cost   </a:t>
+            </a:r>
+            <a:r>
+              <a:rPr sz="1100" b="0" i="0">
+                <a:solidFill>
+                  <a:srgbClr val="374151"/>
+                </a:solidFill>
+                <a:latin typeface="Segoe UI"/>
+              </a:rPr>
+              <a:t>Within delegated spend authority</a:t>
+            </a:r>
+          </a:p>
+          <a:p>
+            <a:pPr>
+              <a:lnSpc>
+                <a:spcPct val="150000"/>
+              </a:lnSpc>
+              <a:spcAft>
+                <a:spcPts val="200"/>
+              </a:spcAft>
+            </a:pPr>
+            <a:r>
+              <a:rPr sz="950" b="0" i="0">
+                <a:solidFill>
+                  <a:srgbClr val="656C7A"/>
+                </a:solidFill>
+                <a:latin typeface="Consolas"/>
+              </a:rPr>
+              <a:t>Privacy   </a:t>
+            </a:r>
+            <a:r>
+              <a:rPr sz="1100" b="1" i="0">
+                <a:solidFill>
+                  <a:srgbClr val="B54708"/>
+                </a:solidFill>
+                <a:latin typeface="Segoe UI"/>
+              </a:rPr>
+              <a:t>Not stated</a:t>
+            </a:r>
+            <a:r>
+              <a:rPr sz="1100" b="0" i="0">
+                <a:solidFill>
+                  <a:srgbClr val="374151"/>
+                </a:solidFill>
+                <a:latin typeface="Segoe UI"/>
+              </a:rPr>
+              <a:t> — question drafted</a:t>
+            </a:r>
+          </a:p>
+          <a:p>
+            <a:pPr>
+              <a:lnSpc>
+                <a:spcPct val="150000"/>
+              </a:lnSpc>
+              <a:spcAft>
+                <a:spcPts val="200"/>
+              </a:spcAft>
+            </a:pPr>
+            <a:r>
+              <a:rPr sz="550"/>
+              <a:t> </a:t>
+            </a:r>
+          </a:p>
+        </p:txBody>
+      </p:sp>
+      <p:sp>
+        <p:nvSpPr>
+          <p:cNvPr id="11" name="TextBox 10"/>
           <p:cNvSpPr txBox="1"/>
           <p:nvPr/>
         </p:nvSpPr>
         <p:spPr>
           <a:xfrm>
-            <a:off x="8182660" y="2798064"/>
-            <a:ext cx="2966618" cy="1554480"/>
+            <a:off x="841248" y="4334256"/>
+            <a:ext cx="9037911" cy="658368"/>
           </a:xfrm>
           <a:prstGeom prst="rect">
             <a:avLst/>
@@ -7893,81 +8582,38 @@
           <a:p>
             <a:pPr>
               <a:lnSpc>
-                <a:spcPct val="134000"/>
-              </a:lnSpc>
-              <a:spcAft>
-                <a:spcPts val="300"/>
-              </a:spcAft>
-            </a:pPr>
-            <a:r>
-              <a:rPr sz="1200" b="1" i="0">
+                <a:spcPct val="138000"/>
+              </a:lnSpc>
+              <a:spcAft>
+                <a:spcPts val="0"/>
+              </a:spcAft>
+            </a:pPr>
+            <a:r>
+              <a:rPr sz="1300" b="0" i="0">
+                <a:solidFill>
+                  <a:srgbClr val="374151"/>
+                </a:solidFill>
+                <a:latin typeface="Segoe UI"/>
+              </a:rPr>
+              <a:t>Same request. Same approver. </a:t>
+            </a:r>
+            <a:r>
+              <a:rPr sz="1300" b="1" i="0">
                 <a:solidFill>
                   <a:srgbClr val="111827"/>
                 </a:solidFill>
                 <a:latin typeface="Segoe UI"/>
               </a:rPr>
-              <a:t>The message is kept</a:t>
-            </a:r>
-          </a:p>
-          <a:p>
-            <a:pPr>
-              <a:lnSpc>
-                <a:spcPct val="134000"/>
-              </a:lnSpc>
-              <a:spcAft>
-                <a:spcPts val="300"/>
-              </a:spcAft>
-            </a:pPr>
-            <a:r>
-              <a:rPr sz="1050" b="0" i="0">
+              <a:t>The homework is done before they open it</a:t>
+            </a:r>
+            <a:r>
+              <a:rPr sz="1300" b="0" i="0">
                 <a:solidFill>
                   <a:srgbClr val="374151"/>
                 </a:solidFill>
                 <a:latin typeface="Segoe UI"/>
               </a:rPr>
-              <a:t>Stored exactly as written, next to what was read out of it. An approver can always check the reading against the words.</a:t>
-            </a:r>
-          </a:p>
-        </p:txBody>
-      </p:sp>
-      <p:sp>
-        <p:nvSpPr>
-          <p:cNvPr id="13" name="TextBox 12"/>
-          <p:cNvSpPr txBox="1"/>
-          <p:nvPr/>
-        </p:nvSpPr>
-        <p:spPr>
-          <a:xfrm>
-            <a:off x="841248" y="5897880"/>
-            <a:ext cx="10509199" cy="640080"/>
-          </a:xfrm>
-          <a:prstGeom prst="rect">
-            <a:avLst/>
-          </a:prstGeom>
-          <a:noFill/>
-        </p:spPr>
-        <p:txBody>
-          <a:bodyPr wrap="square">
-            <a:spAutoFit/>
-          </a:bodyPr>
-          <a:lstStyle/>
-          <a:p>
-            <a:pPr>
-              <a:lnSpc>
-                <a:spcPct val="140000"/>
-              </a:lnSpc>
-              <a:spcAft>
-                <a:spcPts val="0"/>
-              </a:spcAft>
-            </a:pPr>
-            <a:r>
-              <a:rPr sz="850" b="0" i="0">
-                <a:solidFill>
-                  <a:srgbClr val="656C7A"/>
-                </a:solidFill>
-                <a:latin typeface="Segoe UI"/>
-              </a:rPr>
-              <a:t>A reply on a thread already linked to a request attaches to it rather than creating a second one — the failure every naive mailbox integration ships with.</a:t>
+              <a:t> — and what is still unknown is named, not quietly filled in.</a:t>
             </a:r>
           </a:p>
         </p:txBody>
@@ -8121,7 +8767,7 @@
                 </a:solidFill>
                 <a:latin typeface="Segoe UI"/>
               </a:rPr>
-              <a:t>T H E  F I R S T  I D E A</a:t>
+              <a:t>T H E  B I G G E S T  S A V I N G</a:t>
             </a:r>
           </a:p>
         </p:txBody>
@@ -8163,7 +8809,7 @@
                 </a:solidFill>
                 <a:latin typeface="Segoe UI"/>
               </a:rPr>
-              <a:t>Most requests shouldn't reach a person at all.</a:t>
+              <a:t>Most requests should never reach a person at all.</a:t>
             </a:r>
           </a:p>
         </p:txBody>
@@ -8228,7 +8874,7 @@
         <p:spPr>
           <a:xfrm>
             <a:off x="841248" y="2651760"/>
-            <a:ext cx="3368954" cy="1691640"/>
+            <a:ext cx="3368954" cy="1645920"/>
           </a:xfrm>
           <a:prstGeom prst="roundRect">
             <a:avLst>
@@ -8276,7 +8922,7 @@
         <p:spPr>
           <a:xfrm>
             <a:off x="1042416" y="2798064"/>
-            <a:ext cx="2966618" cy="1417320"/>
+            <a:ext cx="2966618" cy="1371600"/>
           </a:xfrm>
           <a:prstGeom prst="rect">
             <a:avLst/>
@@ -8323,7 +8969,7 @@
                 </a:solidFill>
                 <a:latin typeface="Segoe UI"/>
               </a:rPr>
-              <a:t>We own it and a licence is spare. Access in seconds, logged. No approver.</a:t>
+              <a:t>We own it and a licence is spare. Access in seconds, and it is still logged.</a:t>
             </a:r>
           </a:p>
         </p:txBody>
@@ -8337,7 +8983,7 @@
         <p:spPr>
           <a:xfrm>
             <a:off x="4411370" y="2651760"/>
-            <a:ext cx="3368954" cy="1691640"/>
+            <a:ext cx="3368954" cy="1645920"/>
           </a:xfrm>
           <a:prstGeom prst="roundRect">
             <a:avLst>
@@ -8385,7 +9031,7 @@
         <p:spPr>
           <a:xfrm>
             <a:off x="4612538" y="2798064"/>
-            <a:ext cx="2966618" cy="1417320"/>
+            <a:ext cx="2966618" cy="1371600"/>
           </a:xfrm>
           <a:prstGeom prst="rect">
             <a:avLst/>
@@ -8432,7 +9078,7 @@
                 </a:solidFill>
                 <a:latin typeface="Segoe UI"/>
               </a:rPr>
-              <a:t>We own it, no spare seat. A purchase, not a security question — so it never reaches IT.</a:t>
+              <a:t>We own it, no spare seat. That is a purchase, not a security question — so it never reaches IT.</a:t>
             </a:r>
           </a:p>
         </p:txBody>
@@ -8446,7 +9092,7 @@
         <p:spPr>
           <a:xfrm>
             <a:off x="7981492" y="2651760"/>
-            <a:ext cx="3368954" cy="1691640"/>
+            <a:ext cx="3368954" cy="1645920"/>
           </a:xfrm>
           <a:prstGeom prst="roundRect">
             <a:avLst>
@@ -8494,7 +9140,7 @@
         <p:spPr>
           <a:xfrm>
             <a:off x="8182660" y="2798064"/>
-            <a:ext cx="2966618" cy="1417320"/>
+            <a:ext cx="2966618" cy="1371600"/>
           </a:xfrm>
           <a:prstGeom prst="rect">
             <a:avLst/>
@@ -8541,7 +9187,7 @@
                 </a:solidFill>
                 <a:latin typeface="Segoe UI"/>
               </a:rPr>
-              <a:t>New to us, or the last answer has expired. This is the one worth attention.</a:t>
+              <a:t>New to us, or the last answer has expired. This is the one worth an approver's attention.</a:t>
             </a:r>
           </a:p>
         </p:txBody>
@@ -8554,8 +9200,8 @@
         </p:nvSpPr>
         <p:spPr>
           <a:xfrm>
-            <a:off x="841248" y="5897880"/>
-            <a:ext cx="10509199" cy="640080"/>
+            <a:off x="841248" y="4535424"/>
+            <a:ext cx="9037911" cy="658368"/>
           </a:xfrm>
           <a:prstGeom prst="rect">
             <a:avLst/>
@@ -8570,20 +9216,56 @@
           <a:p>
             <a:pPr>
               <a:lnSpc>
-                <a:spcPct val="140000"/>
+                <a:spcPct val="138000"/>
               </a:lnSpc>
               <a:spcAft>
                 <a:spcPts val="0"/>
               </a:spcAft>
             </a:pPr>
             <a:r>
-              <a:rPr sz="850" b="0" i="0">
-                <a:solidFill>
-                  <a:srgbClr val="656C7A"/>
-                </a:solidFill>
-                <a:latin typeface="Segoe UI"/>
-              </a:rPr>
-              <a:t>A catalog hit is not approval. An entry re-escalates when its review date passes, when it drifts out of a legal entity's scope, or when new exploited vulnerabilities appear after the approval. A catalog that never expires is just an allowlist.</a:t>
+              <a:rPr sz="1300" b="0" i="0">
+                <a:solidFill>
+                  <a:srgbClr val="374151"/>
+                </a:solidFill>
+                <a:latin typeface="Segoe UI"/>
+              </a:rPr>
+              <a:t>On one working day of real traffic, </a:t>
+            </a:r>
+            <a:r>
+              <a:rPr sz="1300" b="1" i="0">
+                <a:solidFill>
+                  <a:srgbClr val="111827"/>
+                </a:solidFill>
+                <a:latin typeface="Segoe UI"/>
+              </a:rPr>
+              <a:t>3 of 11 requests were settled before anyone read them</a:t>
+            </a:r>
+            <a:r>
+              <a:rPr sz="1300" b="0" i="0">
+                <a:solidFill>
+                  <a:srgbClr val="374151"/>
+                </a:solidFill>
+                <a:latin typeface="Segoe UI"/>
+              </a:rPr>
+              <a:t> — and of the four asking for software we already own, </a:t>
+            </a:r>
+            <a:r>
+              <a:rPr sz="1300" b="1" i="0">
+                <a:solidFill>
+                  <a:srgbClr val="111827"/>
+                </a:solidFill>
+                <a:latin typeface="Segoe UI"/>
+              </a:rPr>
+              <a:t>three needed no security review at all</a:t>
+            </a:r>
+            <a:r>
+              <a:rPr sz="1300" b="0" i="0">
+                <a:solidFill>
+                  <a:srgbClr val="374151"/>
+                </a:solidFill>
+                <a:latin typeface="Segoe UI"/>
+              </a:rPr>
+              <a:t>.</a:t>
             </a:r>
           </a:p>
         </p:txBody>
@@ -8737,7 +9419,7 @@
                 </a:solidFill>
                 <a:latin typeface="Segoe UI"/>
               </a:rPr>
-              <a:t>W H A T  C L A U D E  D O E S</a:t>
+              <a:t>W H E R E  C L A U D E  D O E S  T H E  W O R K</a:t>
             </a:r>
           </a:p>
         </p:txBody>
@@ -8779,7 +9461,7 @@
                 </a:solidFill>
                 <a:latin typeface="Segoe UI"/>
               </a:rPr>
-              <a:t>The question no database can answer.</a:t>
+              <a:t>The questions you cannot look up.</a:t>
             </a:r>
           </a:p>
         </p:txBody>
@@ -8793,7 +9475,7 @@
         <p:spPr>
           <a:xfrm>
             <a:off x="841248" y="1810512"/>
-            <a:ext cx="5154015" cy="2148840"/>
+            <a:ext cx="5154015" cy="2103120"/>
           </a:xfrm>
           <a:prstGeom prst="roundRect">
             <a:avLst>
@@ -8841,7 +9523,7 @@
         <p:spPr>
           <a:xfrm>
             <a:off x="1042416" y="1956816"/>
-            <a:ext cx="4751679" cy="1874520"/>
+            <a:ext cx="4751679" cy="1828800"/>
           </a:xfrm>
           <a:prstGeom prst="rect">
             <a:avLst/>
@@ -8869,7 +9551,7 @@
                 </a:solidFill>
                 <a:latin typeface="Segoe UI"/>
               </a:rPr>
-              <a:t>Machines answer this</a:t>
+              <a:t>A database can answer these</a:t>
             </a:r>
           </a:p>
           <a:p>
@@ -8888,7 +9570,7 @@
                 </a:solidFill>
                 <a:latin typeface="Segoe UI"/>
               </a:rPr>
-              <a:t>Is anyone attacking it right now? How many critical CVEs? What's the privacy grade?</a:t>
+              <a:t>Is anyone attacking it right now? How many serious flaws? What is its privacy record?</a:t>
             </a:r>
           </a:p>
           <a:p>
@@ -8921,7 +9603,7 @@
                 </a:solidFill>
                 <a:latin typeface="Consolas"/>
               </a:rPr>
-              <a:t>CISA KEV   ·   NIST NVD   ·   ToSDR   ·   OSV.dev</a:t>
+              <a:t>CISA   ·   NIST   ·   ToSDR   ·   OSV</a:t>
             </a:r>
           </a:p>
           <a:p>
@@ -8968,7 +9650,7 @@
         <p:spPr>
           <a:xfrm>
             <a:off x="6196431" y="1810512"/>
-            <a:ext cx="5154015" cy="2148840"/>
+            <a:ext cx="5154015" cy="2103120"/>
           </a:xfrm>
           <a:prstGeom prst="roundRect">
             <a:avLst>
@@ -9016,7 +9698,7 @@
         <p:spPr>
           <a:xfrm>
             <a:off x="6397599" y="1956816"/>
-            <a:ext cx="4751679" cy="1874520"/>
+            <a:ext cx="4751679" cy="1828800"/>
           </a:xfrm>
           <a:prstGeom prst="rect">
             <a:avLst/>
@@ -9044,7 +9726,7 @@
                 </a:solidFill>
                 <a:latin typeface="Segoe UI"/>
               </a:rPr>
-              <a:t>Only Claude answers this</a:t>
+              <a:t>Only Claude can answer these</a:t>
             </a:r>
           </a:p>
           <a:p>
@@ -9063,7 +9745,7 @@
                 </a:solidFill>
                 <a:latin typeface="Segoe UI"/>
               </a:rPr>
-              <a:t>Does this vendor hold a current SOC 2? Is there a DPA? Where does our data actually go? Does SSO exist on the tier we're buying?</a:t>
+              <a:t>Does this vendor hold a current security audit? Will they sign a data agreement? Where does our data physically sit? Who else do they hand it to?</a:t>
             </a:r>
           </a:p>
           <a:p>
@@ -9096,7 +9778,7 @@
                 </a:solidFill>
                 <a:latin typeface="Segoe UI"/>
               </a:rPr>
-              <a:t>There is no API for any of it.</a:t>
+              <a:t>There is no database for any of it.</a:t>
             </a:r>
             <a:r>
               <a:rPr sz="1050" b="0" i="0">
@@ -9105,7 +9787,7 @@
                 </a:solidFill>
                 <a:latin typeface="Segoe UI"/>
               </a:rPr>
-              <a:t> It lives as prose on trust centres and legal pages, in a different shape for every vendor.</a:t>
+              <a:t> It lives as prose on legal pages, in a different shape for every vendor.</a:t>
             </a:r>
           </a:p>
         </p:txBody>
@@ -9118,7 +9800,7 @@
         </p:nvSpPr>
         <p:spPr>
           <a:xfrm>
-            <a:off x="841248" y="4197096"/>
+            <a:off x="841248" y="4151376"/>
             <a:ext cx="9037911" cy="658368"/>
           </a:xfrm>
           <a:prstGeom prst="rect">
@@ -9141,31 +9823,22 @@
               </a:spcAft>
             </a:pPr>
             <a:r>
+              <a:rPr sz="1300" b="1" i="0">
+                <a:solidFill>
+                  <a:srgbClr val="111827"/>
+                </a:solidFill>
+                <a:latin typeface="Segoe UI"/>
+              </a:rPr>
+              <a:t>That reading is the recurring task.</a:t>
+            </a:r>
+            <a:r>
               <a:rPr sz="1300" b="0" i="0">
                 <a:solidFill>
                   <a:srgbClr val="374151"/>
                 </a:solidFill>
                 <a:latin typeface="Segoe UI"/>
               </a:rPr>
-              <a:t>Claude reads those pages and returns </a:t>
-            </a:r>
-            <a:r>
-              <a:rPr sz="1300" b="1" i="0">
-                <a:solidFill>
-                  <a:srgbClr val="111827"/>
-                </a:solidFill>
-                <a:latin typeface="Segoe UI"/>
-              </a:rPr>
-              <a:t>typed facts with a source URL for each one</a:t>
-            </a:r>
-            <a:r>
-              <a:rPr sz="1300" b="0" i="0">
-                <a:solidFill>
-                  <a:srgbClr val="374151"/>
-                </a:solidFill>
-                <a:latin typeface="Segoe UI"/>
-              </a:rPr>
-              <a:t> — and states plainly what it could not find.</a:t>
+              <a:t> It is what took two to three hours a time — and it is the part Claude takes off the desk.</a:t>
             </a:r>
           </a:p>
         </p:txBody>
@@ -9319,7 +9992,7 @@
                 </a:solidFill>
                 <a:latin typeface="Segoe UI"/>
               </a:rPr>
-              <a:t>T H E  R U L E  T H A T  M A K E S  I T  T R U S T W O R T H Y</a:t>
+              <a:t>W H Y  Y O U  C A N  T R U S T  I T</a:t>
             </a:r>
           </a:p>
         </p:txBody>
@@ -9361,21 +10034,63 @@
                 </a:solidFill>
                 <a:latin typeface="Segoe UI"/>
               </a:rPr>
-              <a:t>Every fact carries where it came from.</a:t>
-            </a:r>
-          </a:p>
-        </p:txBody>
-      </p:sp>
-      <p:sp>
-        <p:nvSpPr>
-          <p:cNvPr id="6" name="Rounded Rectangle 5"/>
+              <a:t>It tells you what it doesn't know.</a:t>
+            </a:r>
+          </a:p>
+        </p:txBody>
+      </p:sp>
+      <p:sp>
+        <p:nvSpPr>
+          <p:cNvPr id="6" name="TextBox 5"/>
+          <p:cNvSpPr txBox="1"/>
+          <p:nvPr/>
+        </p:nvSpPr>
+        <p:spPr>
+          <a:xfrm>
+            <a:off x="841248" y="1810512"/>
+            <a:ext cx="6936071" cy="713232"/>
+          </a:xfrm>
+          <a:prstGeom prst="rect">
+            <a:avLst/>
+          </a:prstGeom>
+          <a:noFill/>
+        </p:spPr>
+        <p:txBody>
+          <a:bodyPr wrap="square">
+            <a:spAutoFit/>
+          </a:bodyPr>
+          <a:lstStyle/>
+          <a:p>
+            <a:pPr>
+              <a:lnSpc>
+                <a:spcPct val="140000"/>
+              </a:lnSpc>
+              <a:spcAft>
+                <a:spcPts val="0"/>
+              </a:spcAft>
+            </a:pPr>
+            <a:r>
+              <a:rPr sz="1600" b="0" i="0">
+                <a:solidFill>
+                  <a:srgbClr val="374151"/>
+                </a:solidFill>
+                <a:latin typeface="Segoe UI"/>
+              </a:rPr>
+              <a:t>The thing everyone fears about an AI tool is confident nonsense. This one is built so it cannot produce any.</a:t>
+            </a:r>
+          </a:p>
+        </p:txBody>
+      </p:sp>
+      <p:sp>
+        <p:nvSpPr>
+          <p:cNvPr id="7" name="Rounded Rectangle 6"/>
           <p:cNvSpPr/>
           <p:nvPr/>
         </p:nvSpPr>
         <p:spPr>
           <a:xfrm>
-            <a:off x="841248" y="1810512"/>
-            <a:ext cx="1005840" cy="256032"/>
+            <a:off x="841248" y="2651760"/>
+            <a:ext cx="928116" cy="256032"/>
           </a:xfrm>
           <a:prstGeom prst="roundRect">
             <a:avLst>
@@ -9425,21 +10140,21 @@
                 </a:solidFill>
                 <a:latin typeface="Segoe UI"/>
               </a:rPr>
-              <a:t>verified</a:t>
-            </a:r>
-          </a:p>
-        </p:txBody>
-      </p:sp>
-      <p:sp>
-        <p:nvSpPr>
-          <p:cNvPr id="7" name="TextBox 6"/>
+              <a:t>checked</a:t>
+            </a:r>
+          </a:p>
+        </p:txBody>
+      </p:sp>
+      <p:sp>
+        <p:nvSpPr>
+          <p:cNvPr id="8" name="TextBox 7"/>
           <p:cNvSpPr txBox="1"/>
           <p:nvPr/>
         </p:nvSpPr>
         <p:spPr>
           <a:xfrm>
-            <a:off x="1975104" y="1796796"/>
-            <a:ext cx="9503359" cy="292608"/>
+            <a:off x="1897380" y="2638044"/>
+            <a:ext cx="9581083" cy="292608"/>
           </a:xfrm>
           <a:prstGeom prst="rect">
             <a:avLst/>
@@ -9467,21 +10182,21 @@
                 </a:solidFill>
                 <a:latin typeface="Segoe UI"/>
               </a:rPr>
-              <a:t>from a structured source anyone can re-query</a:t>
-            </a:r>
-          </a:p>
-        </p:txBody>
-      </p:sp>
-      <p:sp>
-        <p:nvSpPr>
-          <p:cNvPr id="8" name="Rounded Rectangle 7"/>
+              <a:t>we queried a source anyone else can query too</a:t>
+            </a:r>
+          </a:p>
+        </p:txBody>
+      </p:sp>
+      <p:sp>
+        <p:nvSpPr>
+          <p:cNvPr id="9" name="Rounded Rectangle 8"/>
           <p:cNvSpPr/>
           <p:nvPr/>
         </p:nvSpPr>
         <p:spPr>
           <a:xfrm>
-            <a:off x="841248" y="2176272"/>
-            <a:ext cx="928116" cy="256032"/>
+            <a:off x="841248" y="3017520"/>
+            <a:ext cx="772668" cy="256032"/>
           </a:xfrm>
           <a:prstGeom prst="roundRect">
             <a:avLst>
@@ -9531,21 +10246,21 @@
                 </a:solidFill>
                 <a:latin typeface="Segoe UI"/>
               </a:rPr>
-              <a:t>sourced</a:t>
-            </a:r>
-          </a:p>
-        </p:txBody>
-      </p:sp>
-      <p:sp>
-        <p:nvSpPr>
-          <p:cNvPr id="9" name="TextBox 8"/>
+              <a:t>found</a:t>
+            </a:r>
+          </a:p>
+        </p:txBody>
+      </p:sp>
+      <p:sp>
+        <p:nvSpPr>
+          <p:cNvPr id="10" name="TextBox 9"/>
           <p:cNvSpPr txBox="1"/>
           <p:nvPr/>
         </p:nvSpPr>
         <p:spPr>
           <a:xfrm>
-            <a:off x="1897380" y="2162556"/>
-            <a:ext cx="9581083" cy="292608"/>
+            <a:off x="1741932" y="3003804"/>
+            <a:ext cx="9736531" cy="292608"/>
           </a:xfrm>
           <a:prstGeom prst="rect">
             <a:avLst/>
@@ -9573,21 +10288,21 @@
                 </a:solidFill>
                 <a:latin typeface="Segoe UI"/>
               </a:rPr>
-              <a:t>found on an identifiable page, URL kept</a:t>
-            </a:r>
-          </a:p>
-        </p:txBody>
-      </p:sp>
-      <p:sp>
-        <p:nvSpPr>
-          <p:cNvPr id="10" name="Rounded Rectangle 9"/>
+              <a:t>it is written on a page, and the page is kept</a:t>
+            </a:r>
+          </a:p>
+        </p:txBody>
+      </p:sp>
+      <p:sp>
+        <p:nvSpPr>
+          <p:cNvPr id="11" name="Rounded Rectangle 10"/>
           <p:cNvSpPr/>
           <p:nvPr/>
         </p:nvSpPr>
         <p:spPr>
           <a:xfrm>
-            <a:off x="841248" y="2542032"/>
-            <a:ext cx="928116" cy="256032"/>
+            <a:off x="841248" y="3383280"/>
+            <a:ext cx="1161288" cy="256032"/>
           </a:xfrm>
           <a:prstGeom prst="roundRect">
             <a:avLst>
@@ -9637,21 +10352,21 @@
                 </a:solidFill>
                 <a:latin typeface="Segoe UI"/>
               </a:rPr>
-              <a:t>claimed</a:t>
-            </a:r>
-          </a:p>
-        </p:txBody>
-      </p:sp>
-      <p:sp>
-        <p:nvSpPr>
-          <p:cNvPr id="11" name="TextBox 10"/>
+              <a:t>their word</a:t>
+            </a:r>
+          </a:p>
+        </p:txBody>
+      </p:sp>
+      <p:sp>
+        <p:nvSpPr>
+          <p:cNvPr id="12" name="TextBox 11"/>
           <p:cNvSpPr txBox="1"/>
           <p:nvPr/>
         </p:nvSpPr>
         <p:spPr>
           <a:xfrm>
-            <a:off x="1897380" y="2528316"/>
-            <a:ext cx="9581083" cy="292608"/>
+            <a:off x="2130552" y="3369564"/>
+            <a:ext cx="9347911" cy="292608"/>
           </a:xfrm>
           <a:prstGeom prst="rect">
             <a:avLst/>
@@ -9686,13 +10401,13 @@
       </p:sp>
       <p:sp>
         <p:nvSpPr>
-          <p:cNvPr id="12" name="Rounded Rectangle 11"/>
+          <p:cNvPr id="13" name="Rounded Rectangle 12"/>
           <p:cNvSpPr/>
           <p:nvPr/>
         </p:nvSpPr>
         <p:spPr>
           <a:xfrm>
-            <a:off x="841248" y="2907792"/>
+            <a:off x="841248" y="3749040"/>
             <a:ext cx="1083564" cy="256032"/>
           </a:xfrm>
           <a:prstGeom prst="roundRect">
@@ -9750,13 +10465,13 @@
       </p:sp>
       <p:sp>
         <p:nvSpPr>
-          <p:cNvPr id="13" name="TextBox 12"/>
+          <p:cNvPr id="14" name="TextBox 13"/>
           <p:cNvSpPr txBox="1"/>
           <p:nvPr/>
         </p:nvSpPr>
         <p:spPr>
           <a:xfrm>
-            <a:off x="2052828" y="2894076"/>
+            <a:off x="2052828" y="3735324"/>
             <a:ext cx="9425635" cy="292608"/>
           </a:xfrm>
           <a:prstGeom prst="rect">
@@ -9785,21 +10500,21 @@
                 </a:solidFill>
                 <a:latin typeface="Segoe UI"/>
               </a:rPr>
-              <a:t>could not be established</a:t>
-            </a:r>
-          </a:p>
-        </p:txBody>
-      </p:sp>
-      <p:sp>
-        <p:nvSpPr>
-          <p:cNvPr id="14" name="Rounded Rectangle 13"/>
+              <a:t>we could not establish it, and we say so</a:t>
+            </a:r>
+          </a:p>
+        </p:txBody>
+      </p:sp>
+      <p:sp>
+        <p:nvSpPr>
+          <p:cNvPr id="15" name="Rounded Rectangle 14"/>
           <p:cNvSpPr/>
           <p:nvPr/>
         </p:nvSpPr>
         <p:spPr>
           <a:xfrm>
-            <a:off x="841248" y="3575304"/>
-            <a:ext cx="5154015" cy="1188720"/>
+            <a:off x="841248" y="4416552"/>
+            <a:ext cx="5154015" cy="1143000"/>
           </a:xfrm>
           <a:prstGeom prst="roundRect">
             <a:avLst>
@@ -9840,14 +10555,14 @@
       </p:sp>
       <p:sp>
         <p:nvSpPr>
-          <p:cNvPr id="15" name="TextBox 14"/>
+          <p:cNvPr id="16" name="TextBox 15"/>
           <p:cNvSpPr txBox="1"/>
           <p:nvPr/>
         </p:nvSpPr>
         <p:spPr>
           <a:xfrm>
-            <a:off x="1042416" y="3721608"/>
-            <a:ext cx="4751679" cy="914400"/>
+            <a:off x="1042416" y="4562856"/>
+            <a:ext cx="4751679" cy="868680"/>
           </a:xfrm>
           <a:prstGeom prst="rect">
             <a:avLst/>
@@ -9894,7 +10609,7 @@
                 </a:solidFill>
                 <a:latin typeface="Segoe UI"/>
               </a:rPr>
-              <a:t>A </a:t>
+              <a:t>A vendor's own claim </a:t>
             </a:r>
             <a:r>
               <a:rPr sz="1050" b="1" i="0">
@@ -9903,7 +10618,7 @@
                 </a:solidFill>
                 <a:latin typeface="Segoe UI"/>
               </a:rPr>
-              <a:t>claimed</a:t>
+              <a:t>cannot satisfy a requirement that blocks</a:t>
             </a:r>
             <a:r>
               <a:rPr sz="1050" b="0" i="0">
@@ -9912,21 +10627,21 @@
                 </a:solidFill>
                 <a:latin typeface="Segoe UI"/>
               </a:rPr>
-              <a:t> fact cannot satisfy a blocking requirement — however it arrived.</a:t>
-            </a:r>
-          </a:p>
-        </p:txBody>
-      </p:sp>
-      <p:sp>
-        <p:nvSpPr>
-          <p:cNvPr id="16" name="Rounded Rectangle 15"/>
+              <a:t>, however it arrived.</a:t>
+            </a:r>
+          </a:p>
+        </p:txBody>
+      </p:sp>
+      <p:sp>
+        <p:nvSpPr>
+          <p:cNvPr id="17" name="Rounded Rectangle 16"/>
           <p:cNvSpPr/>
           <p:nvPr/>
         </p:nvSpPr>
         <p:spPr>
           <a:xfrm>
-            <a:off x="6196431" y="3575304"/>
-            <a:ext cx="5154015" cy="1188720"/>
+            <a:off x="6196431" y="4416552"/>
+            <a:ext cx="5154015" cy="1143000"/>
           </a:xfrm>
           <a:prstGeom prst="roundRect">
             <a:avLst>
@@ -9967,14 +10682,14 @@
       </p:sp>
       <p:sp>
         <p:nvSpPr>
-          <p:cNvPr id="17" name="TextBox 16"/>
+          <p:cNvPr id="18" name="TextBox 17"/>
           <p:cNvSpPr txBox="1"/>
           <p:nvPr/>
         </p:nvSpPr>
         <p:spPr>
           <a:xfrm>
-            <a:off x="6397599" y="3721608"/>
-            <a:ext cx="4751679" cy="914400"/>
+            <a:off x="6397599" y="4562856"/>
+            <a:ext cx="4751679" cy="868680"/>
           </a:xfrm>
           <a:prstGeom prst="rect">
             <a:avLst/>
@@ -10002,7 +10717,7 @@
                 </a:solidFill>
                 <a:latin typeface="Segoe UI"/>
               </a:rPr>
-              <a:t>Not found is a finding</a:t>
+              <a:t>"Not found" is an answer</a:t>
             </a:r>
           </a:p>
           <a:p>
@@ -10021,7 +10736,7 @@
                 </a:solidFill>
                 <a:latin typeface="Segoe UI"/>
               </a:rPr>
-              <a:t>A requirement that can't be evaluated returns </a:t>
+              <a:t>A question it cannot settle comes back as </a:t>
             </a:r>
             <a:r>
               <a:rPr sz="1050" b="1" i="0">
@@ -10040,48 +10755,6 @@
                 <a:latin typeface="Segoe UI"/>
               </a:rPr>
               <a:t>. Never a guess.</a:t>
-            </a:r>
-          </a:p>
-        </p:txBody>
-      </p:sp>
-      <p:sp>
-        <p:nvSpPr>
-          <p:cNvPr id="18" name="TextBox 17"/>
-          <p:cNvSpPr txBox="1"/>
-          <p:nvPr/>
-        </p:nvSpPr>
-        <p:spPr>
-          <a:xfrm>
-            <a:off x="841248" y="5897880"/>
-            <a:ext cx="10509199" cy="640080"/>
-          </a:xfrm>
-          <a:prstGeom prst="rect">
-            <a:avLst/>
-          </a:prstGeom>
-          <a:noFill/>
-        </p:spPr>
-        <p:txBody>
-          <a:bodyPr wrap="square">
-            <a:spAutoFit/>
-          </a:bodyPr>
-          <a:lstStyle/>
-          <a:p>
-            <a:pPr>
-              <a:lnSpc>
-                <a:spcPct val="140000"/>
-              </a:lnSpc>
-              <a:spcAft>
-                <a:spcPts val="0"/>
-              </a:spcAft>
-            </a:pPr>
-            <a:r>
-              <a:rPr sz="850" b="0" i="0">
-                <a:solidFill>
-                  <a:srgbClr val="656C7A"/>
-                </a:solidFill>
-                <a:latin typeface="Segoe UI"/>
-              </a:rPr>
-              <a:t>This is the failure mode that sinks AI tools: confident synthesis of things nobody verified. GreenLight is built so it structurally cannot happen.</a:t>
             </a:r>
           </a:p>
         </p:txBody>
@@ -10235,7 +10908,7 @@
                 </a:solidFill>
                 <a:latin typeface="Segoe UI"/>
               </a:rPr>
-              <a:t>P O L I C Y</a:t>
+              <a:t>A F T E R  Y O U  S T O P  W A T C H I N G</a:t>
             </a:r>
           </a:p>
         </p:txBody>
@@ -10277,21 +10950,187 @@
                 </a:solidFill>
                 <a:latin typeface="Segoe UI"/>
               </a:rPr>
-              <a:t>The rules are a file Operations owns. Not code.</a:t>
-            </a:r>
-          </a:p>
-        </p:txBody>
-      </p:sp>
-      <p:sp>
-        <p:nvSpPr>
-          <p:cNvPr id="6" name="Rounded Rectangle 5"/>
+              <a:t>Approvals expire by themselves.</a:t>
+            </a:r>
+          </a:p>
+        </p:txBody>
+      </p:sp>
+      <p:sp>
+        <p:nvSpPr>
+          <p:cNvPr id="6" name="TextBox 5"/>
+          <p:cNvSpPr txBox="1"/>
+          <p:nvPr/>
+        </p:nvSpPr>
+        <p:spPr>
+          <a:xfrm>
+            <a:off x="841248" y="1810512"/>
+            <a:ext cx="10509199" cy="1280160"/>
+          </a:xfrm>
+          <a:prstGeom prst="rect">
+            <a:avLst/>
+          </a:prstGeom>
+          <a:noFill/>
+        </p:spPr>
+        <p:txBody>
+          <a:bodyPr wrap="square">
+            <a:spAutoFit/>
+          </a:bodyPr>
+          <a:lstStyle/>
+          <a:p>
+            <a:pPr>
+              <a:lnSpc>
+                <a:spcPct val="155000"/>
+              </a:lnSpc>
+              <a:spcAft>
+                <a:spcPts val="500"/>
+              </a:spcAft>
+            </a:pPr>
+            <a:r>
+              <a:rPr sz="1150" b="0" i="0">
+                <a:solidFill>
+                  <a:srgbClr val="656C7A"/>
+                </a:solidFill>
+                <a:latin typeface="Consolas"/>
+              </a:rPr>
+              <a:t>→   </a:t>
+            </a:r>
+            <a:r>
+              <a:rPr sz="1250" b="0" i="0">
+                <a:solidFill>
+                  <a:srgbClr val="374151"/>
+                </a:solidFill>
+                <a:latin typeface="Segoe UI"/>
+              </a:rPr>
+              <a:t>Slack's approval </a:t>
+            </a:r>
+            <a:r>
+              <a:rPr sz="1250" b="1" i="0">
+                <a:solidFill>
+                  <a:srgbClr val="111827"/>
+                </a:solidFill>
+                <a:latin typeface="Segoe UI"/>
+              </a:rPr>
+              <a:t>ran out this morning</a:t>
+            </a:r>
+            <a:r>
+              <a:rPr sz="1250" b="0" i="0">
+                <a:solidFill>
+                  <a:srgbClr val="374151"/>
+                </a:solidFill>
+                <a:latin typeface="Segoe UI"/>
+              </a:rPr>
+              <a:t>. It dropped off the list of what may run on company machines, on its own.</a:t>
+            </a:r>
+          </a:p>
+          <a:p>
+            <a:pPr>
+              <a:lnSpc>
+                <a:spcPct val="155000"/>
+              </a:lnSpc>
+              <a:spcAft>
+                <a:spcPts val="500"/>
+              </a:spcAft>
+            </a:pPr>
+            <a:r>
+              <a:rPr sz="1150" b="0" i="0">
+                <a:solidFill>
+                  <a:srgbClr val="656C7A"/>
+                </a:solidFill>
+                <a:latin typeface="Consolas"/>
+              </a:rPr>
+              <a:t>→   </a:t>
+            </a:r>
+            <a:r>
+              <a:rPr sz="1250" b="0" i="0">
+                <a:solidFill>
+                  <a:srgbClr val="374151"/>
+                </a:solidFill>
+                <a:latin typeface="Segoe UI"/>
+              </a:rPr>
+              <a:t>Microsoft 365 — </a:t>
+            </a:r>
+            <a:r>
+              <a:rPr sz="1250" b="1" i="0">
+                <a:solidFill>
+                  <a:srgbClr val="B42318"/>
+                </a:solidFill>
+                <a:latin typeface="Segoe UI"/>
+              </a:rPr>
+              <a:t>six new actively-exploited vulnerabilities</a:t>
+            </a:r>
+            <a:r>
+              <a:rPr sz="1250" b="0" i="0">
+                <a:solidFill>
+                  <a:srgbClr val="374151"/>
+                </a:solidFill>
+                <a:latin typeface="Segoe UI"/>
+              </a:rPr>
+              <a:t> published since it was approved. It stops self-serving until someone looks again.</a:t>
+            </a:r>
+          </a:p>
+          <a:p>
+            <a:pPr>
+              <a:lnSpc>
+                <a:spcPct val="155000"/>
+              </a:lnSpc>
+              <a:spcAft>
+                <a:spcPts val="500"/>
+              </a:spcAft>
+            </a:pPr>
+            <a:r>
+              <a:rPr sz="1150" b="0" i="0">
+                <a:solidFill>
+                  <a:srgbClr val="656C7A"/>
+                </a:solidFill>
+                <a:latin typeface="Consolas"/>
+              </a:rPr>
+              <a:t>→   </a:t>
+            </a:r>
+            <a:r>
+              <a:rPr sz="1250" b="1" i="0">
+                <a:solidFill>
+                  <a:srgbClr val="111827"/>
+                </a:solidFill>
+                <a:latin typeface="Segoe UI"/>
+              </a:rPr>
+              <a:t>No ticket. No restart. Nobody notified</a:t>
+            </a:r>
+            <a:r>
+              <a:rPr sz="1250" b="0" i="0">
+                <a:solidFill>
+                  <a:srgbClr val="374151"/>
+                </a:solidFill>
+                <a:latin typeface="Segoe UI"/>
+              </a:rPr>
+              <a:t> — because nobody needed to be.</a:t>
+            </a:r>
+          </a:p>
+          <a:p>
+            <a:pPr>
+              <a:lnSpc>
+                <a:spcPct val="155000"/>
+              </a:lnSpc>
+              <a:spcAft>
+                <a:spcPts val="500"/>
+              </a:spcAft>
+            </a:pPr>
+            <a:r>
+              <a:rPr sz="625"/>
+              <a:t> </a:t>
+            </a:r>
+          </a:p>
+        </p:txBody>
+      </p:sp>
+      <p:sp>
+        <p:nvSpPr>
+          <p:cNvPr id="7" name="Rounded Rectangle 6"/>
           <p:cNvSpPr/>
           <p:nvPr/>
         </p:nvSpPr>
         <p:spPr>
           <a:xfrm>
-            <a:off x="841248" y="1810512"/>
-            <a:ext cx="5154015" cy="1554480"/>
+            <a:off x="841248" y="3291840"/>
+            <a:ext cx="10509199" cy="914400"/>
           </a:xfrm>
           <a:prstGeom prst="roundRect">
             <a:avLst>
@@ -10299,11 +11138,11 @@
             </a:avLst>
           </a:prstGeom>
           <a:solidFill>
-            <a:srgbClr val="FFFFFF"/>
+            <a:srgbClr val="FDF2E7"/>
           </a:solidFill>
           <a:ln w="12700">
             <a:solidFill>
-              <a:srgbClr val="E2E5EB"/>
+              <a:srgbClr val="F0C39A"/>
             </a:solidFill>
           </a:ln>
           <a:effectLst/>
@@ -10332,14 +11171,14 @@
       </p:sp>
       <p:sp>
         <p:nvSpPr>
-          <p:cNvPr id="7" name="TextBox 6"/>
+          <p:cNvPr id="8" name="TextBox 7"/>
           <p:cNvSpPr txBox="1"/>
           <p:nvPr/>
         </p:nvSpPr>
         <p:spPr>
           <a:xfrm>
-            <a:off x="1042416" y="1956816"/>
-            <a:ext cx="4751679" cy="1280160"/>
+            <a:off x="1042416" y="3438144"/>
+            <a:ext cx="10106863" cy="640080"/>
           </a:xfrm>
           <a:prstGeom prst="rect">
             <a:avLst/>
@@ -10367,16 +11206,7 @@
                 </a:solidFill>
                 <a:latin typeface="Segoe UI"/>
               </a:rPr>
-              <a:t>Software approval</a:t>
-            </a:r>
-            <a:r>
-              <a:rPr sz="850" b="1" i="0">
-                <a:solidFill>
-                  <a:srgbClr val="4B5563"/>
-                </a:solidFill>
-                <a:latin typeface="Consolas"/>
-              </a:rPr>
-              <a:t>   BISTEC Global</a:t>
+              <a:t>And it finds what nobody approved</a:t>
             </a:r>
           </a:p>
           <a:p>
@@ -10389,81 +11219,14 @@
               </a:spcAft>
             </a:pPr>
             <a:r>
-              <a:rPr sz="950" b="0" i="0">
-                <a:solidFill>
-                  <a:srgbClr val="4B5563"/>
-                </a:solidFill>
-                <a:latin typeface="Consolas"/>
-              </a:rPr>
-              <a:t>software-approval@2.1</a:t>
-            </a:r>
-          </a:p>
-          <a:p>
-            <a:pPr>
-              <a:lnSpc>
-                <a:spcPct val="134000"/>
-              </a:lnSpc>
-              <a:spcAft>
-                <a:spcPts val="300"/>
-              </a:spcAft>
-            </a:pPr>
-            <a:r>
               <a:rPr sz="1050" b="0" i="0">
                 <a:solidFill>
                   <a:srgbClr val="374151"/>
                 </a:solidFill>
                 <a:latin typeface="Segoe UI"/>
               </a:rPr>
-              <a:t>PDPA No. 9 of 2022. Eight requirements — SOC 2, DPA, residency, SSO, exploited CVEs.</a:t>
-            </a:r>
-          </a:p>
-        </p:txBody>
-      </p:sp>
-      <p:sp>
-        <p:nvSpPr>
-          <p:cNvPr id="8" name="Rounded Rectangle 7"/>
-          <p:cNvSpPr/>
-          <p:nvPr/>
-        </p:nvSpPr>
-        <p:spPr>
-          <a:xfrm>
-            <a:off x="6196431" y="1810512"/>
-            <a:ext cx="5154015" cy="1554480"/>
-          </a:xfrm>
-          <a:prstGeom prst="roundRect">
-            <a:avLst>
-              <a:gd name="adj" fmla="val 6000"/>
-            </a:avLst>
-          </a:prstGeom>
-          <a:solidFill>
-            <a:srgbClr val="FFFFFF"/>
-          </a:solidFill>
-          <a:ln w="12700">
-            <a:solidFill>
-              <a:srgbClr val="E2E5EB"/>
-            </a:solidFill>
-          </a:ln>
-          <a:effectLst/>
-        </p:spPr>
-        <p:style>
-          <a:lnRef idx="1">
-            <a:schemeClr val="accent1"/>
-          </a:lnRef>
-          <a:fillRef idx="3">
-            <a:schemeClr val="accent1"/>
-          </a:fillRef>
-          <a:effectRef idx="2">
-            <a:schemeClr val="accent1"/>
-          </a:effectRef>
-          <a:fontRef idx="minor">
-            <a:schemeClr val="lt1"/>
-          </a:fontRef>
-        </p:style>
-        <p:txBody>
-          <a:bodyPr rtlCol="0" anchor="ctr"/>
-          <a:lstStyle/>
-          <a:p>
-            <a:pPr algn="ctr"/>
+              <a:t>GreenLight compares what was approved against what is actually installed on company machines — so software that arrived without asking shows up.</a:t>
+            </a:r>
           </a:p>
         </p:txBody>
       </p:sp>
@@ -10475,8 +11238,8 @@
         </p:nvSpPr>
         <p:spPr>
           <a:xfrm>
-            <a:off x="6397599" y="1956816"/>
-            <a:ext cx="4751679" cy="1280160"/>
+            <a:off x="841248" y="5897880"/>
+            <a:ext cx="10509199" cy="640080"/>
           </a:xfrm>
           <a:prstGeom prst="rect">
             <a:avLst/>
@@ -10491,187 +11254,20 @@
           <a:p>
             <a:pPr>
               <a:lnSpc>
-                <a:spcPct val="134000"/>
-              </a:lnSpc>
-              <a:spcAft>
-                <a:spcPts val="300"/>
-              </a:spcAft>
-            </a:pPr>
-            <a:r>
-              <a:rPr sz="1200" b="1" i="0">
-                <a:solidFill>
-                  <a:srgbClr val="111827"/>
-                </a:solidFill>
-                <a:latin typeface="Segoe UI"/>
-              </a:rPr>
-              <a:t>ISO document approval</a:t>
-            </a:r>
-            <a:r>
-              <a:rPr sz="850" b="1" i="0">
-                <a:solidFill>
-                  <a:srgbClr val="4B5563"/>
-                </a:solidFill>
-                <a:latin typeface="Consolas"/>
-              </a:rPr>
-              <a:t>   same engine</a:t>
-            </a:r>
-          </a:p>
-          <a:p>
-            <a:pPr>
-              <a:lnSpc>
-                <a:spcPct val="134000"/>
-              </a:lnSpc>
-              <a:spcAft>
-                <a:spcPts val="300"/>
-              </a:spcAft>
-            </a:pPr>
-            <a:r>
-              <a:rPr sz="950" b="0" i="0">
-                <a:solidFill>
-                  <a:srgbClr val="4B5563"/>
-                </a:solidFill>
-                <a:latin typeface="Consolas"/>
-              </a:rPr>
-              <a:t>iso-document-approval@1.0</a:t>
-            </a:r>
-          </a:p>
-          <a:p>
-            <a:pPr>
-              <a:lnSpc>
-                <a:spcPct val="134000"/>
-              </a:lnSpc>
-              <a:spcAft>
-                <a:spcPts val="300"/>
-              </a:spcAft>
-            </a:pPr>
-            <a:r>
-              <a:rPr sz="1050" b="0" i="0">
-                <a:solidFill>
-                  <a:srgbClr val="374151"/>
-                </a:solidFill>
-                <a:latin typeface="Segoe UI"/>
-              </a:rPr>
-              <a:t>Nothing to research. Five requirements a person judges — and the engine cannot tell the difference.</a:t>
-            </a:r>
-          </a:p>
-        </p:txBody>
-      </p:sp>
-      <p:sp>
-        <p:nvSpPr>
-          <p:cNvPr id="10" name="TextBox 9"/>
-          <p:cNvSpPr txBox="1"/>
-          <p:nvPr/>
-        </p:nvSpPr>
-        <p:spPr>
-          <a:xfrm>
-            <a:off x="841248" y="3602736"/>
-            <a:ext cx="9037911" cy="932688"/>
-          </a:xfrm>
-          <a:prstGeom prst="rect">
-            <a:avLst/>
-          </a:prstGeom>
-          <a:noFill/>
-        </p:spPr>
-        <p:txBody>
-          <a:bodyPr wrap="square">
-            <a:spAutoFit/>
-          </a:bodyPr>
-          <a:lstStyle/>
-          <a:p>
-            <a:pPr>
-              <a:lnSpc>
-                <a:spcPct val="138000"/>
+                <a:spcPct val="140000"/>
               </a:lnSpc>
               <a:spcAft>
                 <a:spcPts val="0"/>
               </a:spcAft>
             </a:pPr>
             <a:r>
-              <a:rPr sz="1300" b="0" i="0">
-                <a:solidFill>
-                  <a:srgbClr val="374151"/>
-                </a:solidFill>
-                <a:latin typeface="Segoe UI"/>
-              </a:rPr>
-              <a:t>Change a rule and </a:t>
-            </a:r>
-            <a:r>
-              <a:rPr sz="1300" b="1" i="0">
-                <a:solidFill>
-                  <a:srgbClr val="111827"/>
-                </a:solidFill>
-                <a:latin typeface="Segoe UI"/>
-              </a:rPr>
-              <a:t>nothing is deployed</a:t>
-            </a:r>
-            <a:r>
-              <a:rPr sz="1300" b="0" i="0">
-                <a:solidFill>
-                  <a:srgbClr val="374151"/>
-                </a:solidFill>
-                <a:latin typeface="Segoe UI"/>
-              </a:rPr>
-              <a:t> — you edit a YAML file and bump its version. Every decision is stamped with the version that governed it, so an auditor asking </a:t>
-            </a:r>
-            <a:r>
-              <a:rPr sz="1300" b="0" i="1">
-                <a:solidFill>
-                  <a:srgbClr val="374151"/>
-                </a:solidFill>
-                <a:latin typeface="Segoe UI"/>
-              </a:rPr>
-              <a:t>"what were the rules in March?"</a:t>
-            </a:r>
-            <a:r>
-              <a:rPr sz="1300" b="0" i="0">
-                <a:solidFill>
-                  <a:srgbClr val="374151"/>
-                </a:solidFill>
-                <a:latin typeface="Segoe UI"/>
-              </a:rPr>
-              <a:t> gets an answer rather than a git archaeology exercise.</a:t>
-            </a:r>
-          </a:p>
-        </p:txBody>
-      </p:sp>
-      <p:sp>
-        <p:nvSpPr>
-          <p:cNvPr id="11" name="TextBox 10"/>
-          <p:cNvSpPr txBox="1"/>
-          <p:nvPr/>
-        </p:nvSpPr>
-        <p:spPr>
-          <a:xfrm>
-            <a:off x="841248" y="5897880"/>
-            <a:ext cx="10509199" cy="640080"/>
-          </a:xfrm>
-          <a:prstGeom prst="rect">
-            <a:avLst/>
-          </a:prstGeom>
-          <a:noFill/>
-        </p:spPr>
-        <p:txBody>
-          <a:bodyPr wrap="square">
-            <a:spAutoFit/>
-          </a:bodyPr>
-          <a:lstStyle/>
-          <a:p>
-            <a:pPr>
-              <a:lnSpc>
-                <a:spcPct val="140000"/>
-              </a:lnSpc>
-              <a:spcAft>
-                <a:spcPts val="0"/>
-              </a:spcAft>
-            </a:pPr>
-            <a:r>
               <a:rPr sz="850" b="0" i="0">
                 <a:solidFill>
                   <a:srgbClr val="656C7A"/>
                 </a:solidFill>
                 <a:latin typeface="Segoe UI"/>
               </a:rPr>
-              <a:t>One legal entity today, and policy is keyed by entity — a second is another file, not a code change. Proven by a test: the engine evaluates a leave-approval pack that exists only inside the test file.</a:t>
+              <a:t>Two products covering 550 seats were withheld automatically this morning — one because its approval expired, one because it came under attack after we approved it.</a:t>
             </a:r>
           </a:p>
         </p:txBody>
@@ -10825,7 +11421,7 @@
                 </a:solidFill>
                 <a:latin typeface="Segoe UI"/>
               </a:rPr>
-              <a:t>T H E  P A R T  I ' D  S H O W  A  S E C U R I T Y  L E A D</a:t>
+              <a:t>W H O  O W N S  T H E  P O L I C Y</a:t>
             </a:r>
           </a:p>
         </p:txBody>
@@ -10867,7 +11463,7 @@
                 </a:solidFill>
                 <a:latin typeface="Segoe UI"/>
               </a:rPr>
-              <a:t>Approvals expire. On their own.</a:t>
+              <a:t>Operations changes the rules. Not a developer.</a:t>
             </a:r>
           </a:p>
         </p:txBody>
@@ -10881,7 +11477,7 @@
         <p:spPr>
           <a:xfrm>
             <a:off x="841248" y="1810512"/>
-            <a:ext cx="10509199" cy="1115568"/>
+            <a:ext cx="7146255" cy="713232"/>
           </a:xfrm>
           <a:prstGeom prst="rect">
             <a:avLst/>
@@ -10896,167 +11492,112 @@
           <a:p>
             <a:pPr>
               <a:lnSpc>
-                <a:spcPct val="150000"/>
-              </a:lnSpc>
-              <a:spcAft>
-                <a:spcPts val="400"/>
-              </a:spcAft>
-            </a:pPr>
-            <a:r>
-              <a:rPr sz="1200" b="0" i="0">
-                <a:solidFill>
-                  <a:srgbClr val="656C7A"/>
-                </a:solidFill>
-                <a:latin typeface="Consolas"/>
-              </a:rPr>
-              <a:t>→   </a:t>
-            </a:r>
-            <a:r>
-              <a:rPr sz="1350" b="0" i="0">
+                <a:spcPct val="140000"/>
+              </a:lnSpc>
+              <a:spcAft>
+                <a:spcPts val="0"/>
+              </a:spcAft>
+            </a:pPr>
+            <a:r>
+              <a:rPr sz="1600" b="0" i="0">
                 <a:solidFill>
                   <a:srgbClr val="374151"/>
                 </a:solidFill>
                 <a:latin typeface="Segoe UI"/>
               </a:rPr>
-              <a:t>Slack was approved in November with a ten-month review interval.</a:t>
-            </a:r>
-          </a:p>
-          <a:p>
-            <a:pPr>
-              <a:lnSpc>
-                <a:spcPct val="150000"/>
-              </a:lnSpc>
-              <a:spcAft>
-                <a:spcPts val="400"/>
-              </a:spcAft>
-            </a:pPr>
-            <a:r>
-              <a:rPr sz="1200" b="0" i="0">
-                <a:solidFill>
-                  <a:srgbClr val="656C7A"/>
-                </a:solidFill>
-                <a:latin typeface="Consolas"/>
-              </a:rPr>
-              <a:t>→   </a:t>
-            </a:r>
-            <a:r>
-              <a:rPr sz="1350" b="0" i="0">
+              <a:t>The rules are a file Operations owns — nineteen requirements across software approval, ISO documents and privacy screening.</a:t>
+            </a:r>
+          </a:p>
+        </p:txBody>
+      </p:sp>
+      <p:sp>
+        <p:nvSpPr>
+          <p:cNvPr id="7" name="TextBox 6"/>
+          <p:cNvSpPr txBox="1"/>
+          <p:nvPr/>
+        </p:nvSpPr>
+        <p:spPr>
+          <a:xfrm>
+            <a:off x="841248" y="2651760"/>
+            <a:ext cx="8617543" cy="932688"/>
+          </a:xfrm>
+          <a:prstGeom prst="rect">
+            <a:avLst/>
+          </a:prstGeom>
+          <a:noFill/>
+        </p:spPr>
+        <p:txBody>
+          <a:bodyPr wrap="square">
+            <a:spAutoFit/>
+          </a:bodyPr>
+          <a:lstStyle/>
+          <a:p>
+            <a:pPr>
+              <a:lnSpc>
+                <a:spcPct val="138000"/>
+              </a:lnSpc>
+              <a:spcAft>
+                <a:spcPts val="0"/>
+              </a:spcAft>
+            </a:pPr>
+            <a:r>
+              <a:rPr sz="1300" b="0" i="0">
                 <a:solidFill>
                   <a:srgbClr val="374151"/>
                 </a:solidFill>
                 <a:latin typeface="Segoe UI"/>
               </a:rPr>
-              <a:t>That interval </a:t>
-            </a:r>
-            <a:r>
-              <a:rPr sz="1350" b="1" i="0">
+              <a:t>Change one and </a:t>
+            </a:r>
+            <a:r>
+              <a:rPr sz="1300" b="1" i="0">
                 <a:solidFill>
                   <a:srgbClr val="111827"/>
                 </a:solidFill>
                 <a:latin typeface="Segoe UI"/>
               </a:rPr>
-              <a:t>ran out today</a:t>
-            </a:r>
-            <a:r>
-              <a:rPr sz="1350" b="0" i="0">
+              <a:t>nothing is deployed and no ticket is raised</a:t>
+            </a:r>
+            <a:r>
+              <a:rPr sz="1300" b="0" i="0">
                 <a:solidFill>
                   <a:srgbClr val="374151"/>
                 </a:solidFill>
                 <a:latin typeface="Segoe UI"/>
               </a:rPr>
-              <a:t>.</a:t>
-            </a:r>
-          </a:p>
-          <a:p>
-            <a:pPr>
-              <a:lnSpc>
-                <a:spcPct val="150000"/>
-              </a:lnSpc>
-              <a:spcAft>
-                <a:spcPts val="400"/>
-              </a:spcAft>
-            </a:pPr>
-            <a:r>
-              <a:rPr sz="1200" b="0" i="0">
-                <a:solidFill>
-                  <a:srgbClr val="656C7A"/>
-                </a:solidFill>
-                <a:latin typeface="Consolas"/>
-              </a:rPr>
-              <a:t>→   </a:t>
-            </a:r>
-            <a:r>
-              <a:rPr sz="1350" b="0" i="0">
+              <a:t>. Every decision is stamped with the version of the rules that governed it, so an auditor asking </a:t>
+            </a:r>
+            <a:r>
+              <a:rPr sz="1300" b="0" i="1">
                 <a:solidFill>
                   <a:srgbClr val="374151"/>
                 </a:solidFill>
                 <a:latin typeface="Segoe UI"/>
               </a:rPr>
-              <a:t>So </a:t>
-            </a:r>
-            <a:r>
-              <a:rPr sz="1150" b="0" i="0">
+              <a:t>"what were the rules in March?"</a:t>
+            </a:r>
+            <a:r>
+              <a:rPr sz="1300" b="0" i="0">
                 <a:solidFill>
                   <a:srgbClr val="374151"/>
                 </a:solidFill>
-                <a:latin typeface="Consolas"/>
-              </a:rPr>
-              <a:t>slack.exe</a:t>
-            </a:r>
-            <a:r>
-              <a:rPr sz="1350" b="0" i="0">
-                <a:solidFill>
-                  <a:srgbClr val="374151"/>
-                </a:solidFill>
-                <a:latin typeface="Segoe UI"/>
-              </a:rPr>
-              <a:t> </a:t>
-            </a:r>
-            <a:r>
-              <a:rPr sz="1350" b="1" i="0">
-                <a:solidFill>
-                  <a:srgbClr val="B42318"/>
-                </a:solidFill>
-                <a:latin typeface="Segoe UI"/>
-              </a:rPr>
-              <a:t>dropped off the endpoint allow list by itself</a:t>
-            </a:r>
-            <a:r>
-              <a:rPr sz="1350" b="0" i="0">
-                <a:solidFill>
-                  <a:srgbClr val="374151"/>
-                </a:solidFill>
-                <a:latin typeface="Segoe UI"/>
-              </a:rPr>
-              <a:t> — no ticket, no restart, nobody notified.</a:t>
-            </a:r>
-          </a:p>
-          <a:p>
-            <a:pPr>
-              <a:lnSpc>
-                <a:spcPct val="150000"/>
-              </a:lnSpc>
-              <a:spcAft>
-                <a:spcPts val="400"/>
-              </a:spcAft>
-            </a:pPr>
-            <a:r>
-              <a:rPr sz="675"/>
-              <a:t> </a:t>
-            </a:r>
-          </a:p>
-        </p:txBody>
-      </p:sp>
-      <p:sp>
-        <p:nvSpPr>
-          <p:cNvPr id="7" name="Rounded Rectangle 6"/>
+                <a:latin typeface="Segoe UI"/>
+              </a:rPr>
+              <a:t> gets an answer rather than an archaeology exercise.</a:t>
+            </a:r>
+          </a:p>
+        </p:txBody>
+      </p:sp>
+      <p:sp>
+        <p:nvSpPr>
+          <p:cNvPr id="8" name="Rounded Rectangle 7"/>
           <p:cNvSpPr/>
           <p:nvPr/>
         </p:nvSpPr>
         <p:spPr>
           <a:xfrm>
-            <a:off x="841248" y="3127248"/>
-            <a:ext cx="10509199" cy="960120"/>
+            <a:off x="841248" y="3767328"/>
+            <a:ext cx="10509199" cy="914400"/>
           </a:xfrm>
           <a:prstGeom prst="roundRect">
             <a:avLst>
@@ -11064,11 +11605,11 @@
             </a:avLst>
           </a:prstGeom>
           <a:solidFill>
-            <a:srgbClr val="FDF2E7"/>
+            <a:srgbClr val="E3F4F7"/>
           </a:solidFill>
           <a:ln w="12700">
             <a:solidFill>
-              <a:srgbClr val="F0C39A"/>
+              <a:srgbClr val="9ED4DE"/>
             </a:solidFill>
           </a:ln>
           <a:effectLst/>
@@ -11097,14 +11638,14 @@
       </p:sp>
       <p:sp>
         <p:nvSpPr>
-          <p:cNvPr id="8" name="TextBox 7"/>
+          <p:cNvPr id="9" name="TextBox 8"/>
           <p:cNvSpPr txBox="1"/>
           <p:nvPr/>
         </p:nvSpPr>
         <p:spPr>
           <a:xfrm>
-            <a:off x="1042416" y="3273552"/>
-            <a:ext cx="10106863" cy="685800"/>
+            <a:off x="1042416" y="3913632"/>
+            <a:ext cx="10106863" cy="640080"/>
           </a:xfrm>
           <a:prstGeom prst="rect">
             <a:avLst/>
@@ -11132,7 +11673,7 @@
                 </a:solidFill>
                 <a:latin typeface="Segoe UI"/>
               </a:rPr>
-              <a:t>And Microsoft 365 is being watched</a:t>
+              <a:t>ISO audits are due early next year</a:t>
             </a:r>
           </a:p>
           <a:p>
@@ -11151,67 +11692,7 @@
                 </a:solidFill>
                 <a:latin typeface="Segoe UI"/>
               </a:rPr>
-              <a:t>Six new actively-exploited vulnerabilities have been published </a:t>
-            </a:r>
-            <a:r>
-              <a:rPr sz="1050" b="1" i="0">
-                <a:solidFill>
-                  <a:srgbClr val="111827"/>
-                </a:solidFill>
-                <a:latin typeface="Segoe UI"/>
-              </a:rPr>
-              <a:t>since it was approved</a:t>
-            </a:r>
-            <a:r>
-              <a:rPr sz="1050" b="0" i="0">
-                <a:solidFill>
-                  <a:srgbClr val="374151"/>
-                </a:solidFill>
-                <a:latin typeface="Segoe UI"/>
-              </a:rPr>
-              <a:t>. It stops self-serving until someone looks again.</a:t>
-            </a:r>
-          </a:p>
-        </p:txBody>
-      </p:sp>
-      <p:sp>
-        <p:nvSpPr>
-          <p:cNvPr id="9" name="TextBox 8"/>
-          <p:cNvSpPr txBox="1"/>
-          <p:nvPr/>
-        </p:nvSpPr>
-        <p:spPr>
-          <a:xfrm>
-            <a:off x="841248" y="5897880"/>
-            <a:ext cx="10509199" cy="640080"/>
-          </a:xfrm>
-          <a:prstGeom prst="rect">
-            <a:avLst/>
-          </a:prstGeom>
-          <a:noFill/>
-        </p:spPr>
-        <p:txBody>
-          <a:bodyPr wrap="square">
-            <a:spAutoFit/>
-          </a:bodyPr>
-          <a:lstStyle/>
-          <a:p>
-            <a:pPr>
-              <a:lnSpc>
-                <a:spcPct val="140000"/>
-              </a:lnSpc>
-              <a:spcAft>
-                <a:spcPts val="0"/>
-              </a:spcAft>
-            </a:pPr>
-            <a:r>
-              <a:rPr sz="850" b="0" i="0">
-                <a:solidFill>
-                  <a:srgbClr val="656C7A"/>
-                </a:solidFill>
-                <a:latin typeface="Segoe UI"/>
-              </a:rPr>
-              <a:t>The same validity rule governs both the approval queue and what endpoints are permitted to run, so policy and enforcement cannot disagree.</a:t>
+              <a:t>The evidence file builds itself — every decision, who made it, when, and under which version of our own policy. Including the ones nobody had to touch.</a:t>
             </a:r>
           </a:p>
         </p:txBody>
@@ -11542,4 +12023,324 @@
   </a:objectDefaults>
   <a:extraClrSchemeLst/>
 </a:theme>
+</file>
+
+<file path=ppt/theme/theme2.xml><?xml version="1.0" encoding="utf-8"?>
+<a:theme xmlns:a="http://schemas.openxmlformats.org/drawingml/2006/main" name="Office Theme">
+  <a:themeElements>
+    <a:clrScheme name="Office">
+      <a:dk1>
+        <a:sysClr val="windowText" lastClr="000000"/>
+      </a:dk1>
+      <a:lt1>
+        <a:sysClr val="window" lastClr="FFFFFF"/>
+      </a:lt1>
+      <a:dk2>
+        <a:srgbClr val="1F497D"/>
+      </a:dk2>
+      <a:lt2>
+        <a:srgbClr val="EEECE1"/>
+      </a:lt2>
+      <a:accent1>
+        <a:srgbClr val="4F81BD"/>
+      </a:accent1>
+      <a:accent2>
+        <a:srgbClr val="C0504D"/>
+      </a:accent2>
+      <a:accent3>
+        <a:srgbClr val="9BBB59"/>
+      </a:accent3>
+      <a:accent4>
+        <a:srgbClr val="8064A2"/>
+      </a:accent4>
+      <a:accent5>
+        <a:srgbClr val="4BACC6"/>
+      </a:accent5>
+      <a:accent6>
+        <a:srgbClr val="F79646"/>
+      </a:accent6>
+      <a:hlink>
+        <a:srgbClr val="0000FF"/>
+      </a:hlink>
+      <a:folHlink>
+        <a:srgbClr val="800080"/>
+      </a:folHlink>
+    </a:clrScheme>
+    <a:fontScheme name="Office">
+      <a:majorFont>
+        <a:latin typeface="Calibri"/>
+        <a:ea typeface=""/>
+        <a:cs typeface=""/>
+        <a:font script="Jpan" typeface="ＭＳ Ｐゴシック"/>
+        <a:font script="Hang" typeface="맑은 고딕"/>
+        <a:font script="Hans" typeface="宋体"/>
+        <a:font script="Hant" typeface="新細明體"/>
+        <a:font script="Arab" typeface="Times New Roman"/>
+        <a:font script="Hebr" typeface="Times New Roman"/>
+        <a:font script="Thai" typeface="Angsana New"/>
+        <a:font script="Ethi" typeface="Nyala"/>
+        <a:font script="Beng" typeface="Vrinda"/>
+        <a:font script="Gujr" typeface="Shruti"/>
+        <a:font script="Khmr" typeface="MoolBoran"/>
+        <a:font script="Knda" typeface="Tunga"/>
+        <a:font script="Guru" typeface="Raavi"/>
+        <a:font script="Cans" typeface="Euphemia"/>
+        <a:font script="Cher" typeface="Plantagenet Cherokee"/>
+        <a:font script="Yiii" typeface="Microsoft Yi Baiti"/>
+        <a:font script="Tibt" typeface="Microsoft Himalaya"/>
+        <a:font script="Thaa" typeface="MV Boli"/>
+        <a:font script="Deva" typeface="Mangal"/>
+        <a:font script="Telu" typeface="Gautami"/>
+        <a:font script="Taml" typeface="Latha"/>
+        <a:font script="Syrc" typeface="Estrangelo Edessa"/>
+        <a:font script="Orya" typeface="Kalinga"/>
+        <a:font script="Mlym" typeface="Kartika"/>
+        <a:font script="Laoo" typeface="DokChampa"/>
+        <a:font script="Sinh" typeface="Iskoola Pota"/>
+        <a:font script="Mong" typeface="Mongolian Baiti"/>
+        <a:font script="Viet" typeface="Times New Roman"/>
+        <a:font script="Uigh" typeface="Microsoft Uighur"/>
+        <a:font script="Geor" typeface="Sylfaen"/>
+      </a:majorFont>
+      <a:minorFont>
+        <a:latin typeface="Calibri"/>
+        <a:ea typeface=""/>
+        <a:cs typeface=""/>
+        <a:font script="Jpan" typeface="ＭＳ Ｐゴシック"/>
+        <a:font script="Hang" typeface="맑은 고딕"/>
+        <a:font script="Hans" typeface="宋体"/>
+        <a:font script="Hant" typeface="新細明體"/>
+        <a:font script="Arab" typeface="Arial"/>
+        <a:font script="Hebr" typeface="Arial"/>
+        <a:font script="Thai" typeface="Cordia New"/>
+        <a:font script="Ethi" typeface="Nyala"/>
+        <a:font script="Beng" typeface="Vrinda"/>
+        <a:font script="Gujr" typeface="Shruti"/>
+        <a:font script="Khmr" typeface="DaunPenh"/>
+        <a:font script="Knda" typeface="Tunga"/>
+        <a:font script="Guru" typeface="Raavi"/>
+        <a:font script="Cans" typeface="Euphemia"/>
+        <a:font script="Cher" typeface="Plantagenet Cherokee"/>
+        <a:font script="Yiii" typeface="Microsoft Yi Baiti"/>
+        <a:font script="Tibt" typeface="Microsoft Himalaya"/>
+        <a:font script="Thaa" typeface="MV Boli"/>
+        <a:font script="Deva" typeface="Mangal"/>
+        <a:font script="Telu" typeface="Gautami"/>
+        <a:font script="Taml" typeface="Latha"/>
+        <a:font script="Syrc" typeface="Estrangelo Edessa"/>
+        <a:font script="Orya" typeface="Kalinga"/>
+        <a:font script="Mlym" typeface="Kartika"/>
+        <a:font script="Laoo" typeface="DokChampa"/>
+        <a:font script="Sinh" typeface="Iskoola Pota"/>
+        <a:font script="Mong" typeface="Mongolian Baiti"/>
+        <a:font script="Viet" typeface="Arial"/>
+        <a:font script="Uigh" typeface="Microsoft Uighur"/>
+        <a:font script="Geor" typeface="Sylfaen"/>
+      </a:minorFont>
+    </a:fontScheme>
+    <a:fmtScheme name="Office">
+      <a:fillStyleLst>
+        <a:solidFill>
+          <a:schemeClr val="phClr"/>
+        </a:solidFill>
+        <a:gradFill rotWithShape="1">
+          <a:gsLst>
+            <a:gs pos="0">
+              <a:schemeClr val="phClr">
+                <a:tint val="50000"/>
+                <a:satMod val="300000"/>
+              </a:schemeClr>
+            </a:gs>
+            <a:gs pos="35000">
+              <a:schemeClr val="phClr">
+                <a:tint val="37000"/>
+                <a:satMod val="300000"/>
+              </a:schemeClr>
+            </a:gs>
+            <a:gs pos="100000">
+              <a:schemeClr val="phClr">
+                <a:tint val="15000"/>
+                <a:satMod val="350000"/>
+              </a:schemeClr>
+            </a:gs>
+          </a:gsLst>
+          <a:lin ang="16200000" scaled="1"/>
+        </a:gradFill>
+        <a:gradFill rotWithShape="1">
+          <a:gsLst>
+            <a:gs pos="0">
+              <a:schemeClr val="phClr">
+                <a:tint val="100000"/>
+                <a:shade val="100000"/>
+                <a:satMod val="130000"/>
+              </a:schemeClr>
+            </a:gs>
+            <a:gs pos="100000">
+              <a:schemeClr val="phClr">
+                <a:tint val="50000"/>
+                <a:shade val="100000"/>
+                <a:satMod val="350000"/>
+              </a:schemeClr>
+            </a:gs>
+          </a:gsLst>
+          <a:lin ang="16200000" scaled="0"/>
+        </a:gradFill>
+      </a:fillStyleLst>
+      <a:lnStyleLst>
+        <a:ln w="9525" cap="flat" cmpd="sng" algn="ctr">
+          <a:solidFill>
+            <a:schemeClr val="phClr">
+              <a:shade val="95000"/>
+              <a:satMod val="105000"/>
+            </a:schemeClr>
+          </a:solidFill>
+          <a:prstDash val="solid"/>
+        </a:ln>
+        <a:ln w="25400" cap="flat" cmpd="sng" algn="ctr">
+          <a:solidFill>
+            <a:schemeClr val="phClr"/>
+          </a:solidFill>
+          <a:prstDash val="solid"/>
+        </a:ln>
+        <a:ln w="38100" cap="flat" cmpd="sng" algn="ctr">
+          <a:solidFill>
+            <a:schemeClr val="phClr"/>
+          </a:solidFill>
+          <a:prstDash val="solid"/>
+        </a:ln>
+      </a:lnStyleLst>
+      <a:effectStyleLst>
+        <a:effectStyle>
+          <a:effectLst>
+            <a:outerShdw blurRad="40000" dist="20000" dir="5400000" rotWithShape="0">
+              <a:srgbClr val="000000">
+                <a:alpha val="38000"/>
+              </a:srgbClr>
+            </a:outerShdw>
+          </a:effectLst>
+        </a:effectStyle>
+        <a:effectStyle>
+          <a:effectLst>
+            <a:outerShdw blurRad="40000" dist="23000" dir="5400000" rotWithShape="0">
+              <a:srgbClr val="000000">
+                <a:alpha val="35000"/>
+              </a:srgbClr>
+            </a:outerShdw>
+          </a:effectLst>
+        </a:effectStyle>
+        <a:effectStyle>
+          <a:effectLst>
+            <a:outerShdw blurRad="40000" dist="23000" dir="5400000" rotWithShape="0">
+              <a:srgbClr val="000000">
+                <a:alpha val="35000"/>
+              </a:srgbClr>
+            </a:outerShdw>
+          </a:effectLst>
+          <a:scene3d>
+            <a:camera prst="orthographicFront">
+              <a:rot lat="0" lon="0" rev="0"/>
+            </a:camera>
+            <a:lightRig rig="threePt" dir="t">
+              <a:rot lat="0" lon="0" rev="1200000"/>
+            </a:lightRig>
+          </a:scene3d>
+          <a:sp3d>
+            <a:bevelT w="63500" h="25400"/>
+          </a:sp3d>
+        </a:effectStyle>
+      </a:effectStyleLst>
+      <a:bgFillStyleLst>
+        <a:solidFill>
+          <a:schemeClr val="phClr"/>
+        </a:solidFill>
+        <a:gradFill rotWithShape="1">
+          <a:gsLst>
+            <a:gs pos="0">
+              <a:schemeClr val="phClr">
+                <a:tint val="40000"/>
+                <a:satMod val="350000"/>
+              </a:schemeClr>
+            </a:gs>
+            <a:gs pos="40000">
+              <a:schemeClr val="phClr">
+                <a:tint val="45000"/>
+                <a:shade val="99000"/>
+                <a:satMod val="350000"/>
+              </a:schemeClr>
+            </a:gs>
+            <a:gs pos="100000">
+              <a:schemeClr val="phClr">
+                <a:shade val="20000"/>
+                <a:satMod val="255000"/>
+              </a:schemeClr>
+            </a:gs>
+          </a:gsLst>
+          <a:path path="circle">
+            <a:fillToRect l="50000" t="-80000" r="50000" b="180000"/>
+          </a:path>
+        </a:gradFill>
+        <a:gradFill rotWithShape="1">
+          <a:gsLst>
+            <a:gs pos="0">
+              <a:schemeClr val="phClr">
+                <a:tint val="80000"/>
+                <a:satMod val="300000"/>
+              </a:schemeClr>
+            </a:gs>
+            <a:gs pos="100000">
+              <a:schemeClr val="phClr">
+                <a:shade val="30000"/>
+                <a:satMod val="200000"/>
+              </a:schemeClr>
+            </a:gs>
+          </a:gsLst>
+          <a:path path="circle">
+            <a:fillToRect l="50000" t="50000" r="50000" b="50000"/>
+          </a:path>
+        </a:gradFill>
+      </a:bgFillStyleLst>
+    </a:fmtScheme>
+  </a:themeElements>
+  <a:objectDefaults>
+    <a:spDef>
+      <a:spPr/>
+      <a:bodyPr/>
+      <a:lstStyle/>
+      <a:style>
+        <a:lnRef idx="1">
+          <a:schemeClr val="accent1"/>
+        </a:lnRef>
+        <a:fillRef idx="3">
+          <a:schemeClr val="accent1"/>
+        </a:fillRef>
+        <a:effectRef idx="2">
+          <a:schemeClr val="accent1"/>
+        </a:effectRef>
+        <a:fontRef idx="minor">
+          <a:schemeClr val="lt1"/>
+        </a:fontRef>
+      </a:style>
+    </a:spDef>
+    <a:lnDef>
+      <a:spPr/>
+      <a:bodyPr/>
+      <a:lstStyle/>
+      <a:style>
+        <a:lnRef idx="2">
+          <a:schemeClr val="accent1"/>
+        </a:lnRef>
+        <a:fillRef idx="0">
+          <a:schemeClr val="accent1"/>
+        </a:fillRef>
+        <a:effectRef idx="1">
+          <a:schemeClr val="accent1"/>
+        </a:effectRef>
+        <a:fontRef idx="minor">
+          <a:schemeClr val="tx1"/>
+        </a:fontRef>
+      </a:style>
+    </a:lnDef>
+  </a:objectDefaults>
+  <a:extraClrSchemeLst/>
+</a:theme>
 </file>